--- a/presentation-limonad/presentation.pptx
+++ b/presentation-limonad/presentation.pptx
@@ -4511,113 +4511,33 @@
         <p:nvPr/>
       </p:nvGrpSpPr>
       <p:grpSpPr/>
-      <p:sp>
-        <p:nvSpPr>
-          <p:cNvPr id="2" name="Oval 1"/>
-          <p:cNvSpPr/>
-          <p:nvPr/>
-        </p:nvSpPr>
-        <p:spPr>
-          <a:xfrm>
-            <a:off x="8778240" y="-1005840"/>
-            <a:ext cx="5120640" cy="5120640"/>
-          </a:xfrm>
-          <a:prstGeom prst="ellipse">
-            <a:avLst/>
-          </a:prstGeom>
-          <a:gradFill rotWithShape="1">
-            <a:gsLst>
-              <a:gs pos="0">
-                <a:srgbClr val="4C9AFF"/>
-              </a:gs>
-              <a:gs pos="100000">
-                <a:srgbClr val="7B61FF"/>
-              </a:gs>
-            </a:gsLst>
-            <a:lin scaled="0" ang="19800000"/>
-          </a:gradFill>
-          <a:ln>
-            <a:noFill/>
-          </a:ln>
-          <a:effectLst/>
-        </p:spPr>
-        <p:style>
-          <a:lnRef idx="1">
-            <a:schemeClr val="accent1"/>
-          </a:lnRef>
-          <a:fillRef idx="3">
-            <a:schemeClr val="accent1"/>
-          </a:fillRef>
-          <a:effectRef idx="2">
-            <a:schemeClr val="accent1"/>
-          </a:effectRef>
-          <a:fontRef idx="minor">
-            <a:schemeClr val="lt1"/>
-          </a:fontRef>
-        </p:style>
-        <p:txBody>
-          <a:bodyPr rtlCol="0" anchor="ctr"/>
-          <a:lstStyle/>
-          <a:p>
-            <a:pPr algn="ctr"/>
-          </a:p>
-        </p:txBody>
-      </p:sp>
-      <p:sp>
-        <p:nvSpPr>
-          <p:cNvPr id="3" name="Oval 2"/>
-          <p:cNvSpPr/>
-          <p:nvPr/>
-        </p:nvSpPr>
-        <p:spPr>
-          <a:xfrm>
-            <a:off x="10424160" y="4206240"/>
-            <a:ext cx="2194560" cy="2194560"/>
-          </a:xfrm>
-          <a:prstGeom prst="ellipse">
-            <a:avLst/>
-          </a:prstGeom>
-          <a:gradFill rotWithShape="1">
-            <a:gsLst>
-              <a:gs pos="0">
-                <a:srgbClr val="7B61FF"/>
-              </a:gs>
-              <a:gs pos="100000">
-                <a:srgbClr val="4C9AFF"/>
-              </a:gs>
-            </a:gsLst>
-            <a:lin scaled="0" ang="19800000"/>
-          </a:gradFill>
-          <a:ln>
-            <a:noFill/>
-          </a:ln>
-          <a:effectLst/>
-        </p:spPr>
-        <p:style>
-          <a:lnRef idx="1">
-            <a:schemeClr val="accent1"/>
-          </a:lnRef>
-          <a:fillRef idx="3">
-            <a:schemeClr val="accent1"/>
-          </a:fillRef>
-          <a:effectRef idx="2">
-            <a:schemeClr val="accent1"/>
-          </a:effectRef>
-          <a:fontRef idx="minor">
-            <a:schemeClr val="lt1"/>
-          </a:fontRef>
-        </p:style>
-        <p:txBody>
-          <a:bodyPr rtlCol="0" anchor="ctr"/>
-          <a:lstStyle/>
-          <a:p>
-            <a:pPr algn="ctr"/>
-          </a:p>
-        </p:txBody>
-      </p:sp>
-      <p:sp>
-        <p:nvSpPr>
-          <p:cNvPr id="4" name="Rounded Rectangle 3"/>
+      <p:pic>
+        <p:nvPicPr>
+          <p:cNvPr id="2" name="Picture 1" descr="cover.png"/>
+          <p:cNvPicPr>
+            <a:picLocks noChangeAspect="1"/>
+          </p:cNvPicPr>
+          <p:nvPr/>
+        </p:nvPicPr>
+        <p:blipFill>
+          <a:blip r:embed="rId2"/>
+          <a:stretch>
+            <a:fillRect/>
+          </a:stretch>
+        </p:blipFill>
+        <p:spPr>
+          <a:xfrm>
+            <a:off x="6949440" y="-548640"/>
+            <a:ext cx="6035040" cy="6035040"/>
+          </a:xfrm>
+          <a:prstGeom prst="rect">
+            <a:avLst/>
+          </a:prstGeom>
+        </p:spPr>
+      </p:pic>
+      <p:sp>
+        <p:nvSpPr>
+          <p:cNvPr id="3" name="Rounded Rectangle 2"/>
           <p:cNvSpPr/>
           <p:nvPr/>
         </p:nvSpPr>
@@ -4671,7 +4591,7 @@
       </p:sp>
       <p:sp>
         <p:nvSpPr>
-          <p:cNvPr id="5" name="TextBox 4"/>
+          <p:cNvPr id="4" name="TextBox 3"/>
           <p:cNvSpPr txBox="1"/>
           <p:nvPr/>
         </p:nvSpPr>
@@ -4709,7 +4629,7 @@
       </p:sp>
       <p:sp>
         <p:nvSpPr>
-          <p:cNvPr id="6" name="TextBox 5"/>
+          <p:cNvPr id="5" name="TextBox 4"/>
           <p:cNvSpPr txBox="1"/>
           <p:nvPr/>
         </p:nvSpPr>
@@ -4750,6 +4670,18 @@
   <p:clrMapOvr>
     <a:masterClrMapping/>
   </p:clrMapOvr>
+  <mc:AlternateContent xmlns:mc="http://schemas.openxmlformats.org/markup-compatibility/2006">
+    <mc:Choice xmlns:p14="http://schemas.microsoft.com/office/powerpoint/2010/main" Requires="p14">
+      <p:transition spd="slow" p14:dur="600">
+        <p:fade/>
+      </p:transition>
+    </mc:Choice>
+    <mc:Fallback>
+      <p:transition spd="slow">
+        <p:fade/>
+      </p:transition>
+    </mc:Fallback>
+  </mc:AlternateContent>
 </p:sld>
 </file>
 
@@ -4771,9 +4703,33 @@
         <p:nvPr/>
       </p:nvGrpSpPr>
       <p:grpSpPr/>
-      <p:sp>
-        <p:nvSpPr>
-          <p:cNvPr id="2" name="Rounded Rectangle 1"/>
+      <p:pic>
+        <p:nvPicPr>
+          <p:cNvPr id="2" name="Picture 1" descr="s10.png"/>
+          <p:cNvPicPr>
+            <a:picLocks noChangeAspect="1"/>
+          </p:cNvPicPr>
+          <p:nvPr/>
+        </p:nvPicPr>
+        <p:blipFill>
+          <a:blip r:embed="rId2"/>
+          <a:stretch>
+            <a:fillRect/>
+          </a:stretch>
+        </p:blipFill>
+        <p:spPr>
+          <a:xfrm>
+            <a:off x="9418320" y="3657600"/>
+            <a:ext cx="4023360" cy="4023360"/>
+          </a:xfrm>
+          <a:prstGeom prst="rect">
+            <a:avLst/>
+          </a:prstGeom>
+        </p:spPr>
+      </p:pic>
+      <p:sp>
+        <p:nvSpPr>
+          <p:cNvPr id="3" name="Rounded Rectangle 2"/>
           <p:cNvSpPr/>
           <p:nvPr/>
         </p:nvSpPr>
@@ -4827,7 +4783,7 @@
       </p:sp>
       <p:sp>
         <p:nvSpPr>
-          <p:cNvPr id="3" name="TextBox 2"/>
+          <p:cNvPr id="4" name="TextBox 3"/>
           <p:cNvSpPr txBox="1"/>
           <p:nvPr/>
         </p:nvSpPr>
@@ -4865,14 +4821,14 @@
       </p:sp>
       <p:sp>
         <p:nvSpPr>
-          <p:cNvPr id="4" name="Rounded Rectangle 3"/>
+          <p:cNvPr id="5" name="Rounded Rectangle 4"/>
           <p:cNvSpPr/>
           <p:nvPr/>
         </p:nvSpPr>
         <p:spPr>
           <a:xfrm>
             <a:off x="822960" y="1965960"/>
-            <a:ext cx="10515600" cy="841248"/>
+            <a:ext cx="8229600" cy="841248"/>
           </a:xfrm>
           <a:prstGeom prst="roundRect">
             <a:avLst>
@@ -4911,7 +4867,7 @@
       </p:sp>
       <p:sp>
         <p:nvSpPr>
-          <p:cNvPr id="5" name="Oval 4"/>
+          <p:cNvPr id="6" name="Oval 5"/>
           <p:cNvSpPr/>
           <p:nvPr/>
         </p:nvSpPr>
@@ -4963,7 +4919,7 @@
       </p:sp>
       <p:sp>
         <p:nvSpPr>
-          <p:cNvPr id="6" name="TextBox 5"/>
+          <p:cNvPr id="7" name="TextBox 6"/>
           <p:cNvSpPr txBox="1"/>
           <p:nvPr/>
         </p:nvSpPr>
@@ -5001,14 +4957,14 @@
       </p:sp>
       <p:sp>
         <p:nvSpPr>
-          <p:cNvPr id="7" name="TextBox 6"/>
+          <p:cNvPr id="8" name="TextBox 7"/>
           <p:cNvSpPr txBox="1"/>
           <p:nvPr/>
         </p:nvSpPr>
         <p:spPr>
           <a:xfrm>
             <a:off x="1691640" y="2185416"/>
-            <a:ext cx="9418320" cy="841248"/>
+            <a:ext cx="7132320" cy="841248"/>
           </a:xfrm>
           <a:prstGeom prst="rect">
             <a:avLst/>
@@ -5039,14 +4995,14 @@
       </p:sp>
       <p:sp>
         <p:nvSpPr>
-          <p:cNvPr id="8" name="Rounded Rectangle 7"/>
+          <p:cNvPr id="9" name="Rounded Rectangle 8"/>
           <p:cNvSpPr/>
           <p:nvPr/>
         </p:nvSpPr>
         <p:spPr>
           <a:xfrm>
             <a:off x="822960" y="3008376"/>
-            <a:ext cx="10515600" cy="841248"/>
+            <a:ext cx="8229600" cy="841248"/>
           </a:xfrm>
           <a:prstGeom prst="roundRect">
             <a:avLst>
@@ -5085,7 +5041,7 @@
       </p:sp>
       <p:sp>
         <p:nvSpPr>
-          <p:cNvPr id="9" name="Oval 8"/>
+          <p:cNvPr id="10" name="Oval 9"/>
           <p:cNvSpPr/>
           <p:nvPr/>
         </p:nvSpPr>
@@ -5137,7 +5093,7 @@
       </p:sp>
       <p:sp>
         <p:nvSpPr>
-          <p:cNvPr id="10" name="TextBox 9"/>
+          <p:cNvPr id="11" name="TextBox 10"/>
           <p:cNvSpPr txBox="1"/>
           <p:nvPr/>
         </p:nvSpPr>
@@ -5175,14 +5131,14 @@
       </p:sp>
       <p:sp>
         <p:nvSpPr>
-          <p:cNvPr id="11" name="TextBox 10"/>
+          <p:cNvPr id="12" name="TextBox 11"/>
           <p:cNvSpPr txBox="1"/>
           <p:nvPr/>
         </p:nvSpPr>
         <p:spPr>
           <a:xfrm>
             <a:off x="1691640" y="3227832"/>
-            <a:ext cx="9418320" cy="841248"/>
+            <a:ext cx="7132320" cy="841248"/>
           </a:xfrm>
           <a:prstGeom prst="rect">
             <a:avLst/>
@@ -5213,14 +5169,14 @@
       </p:sp>
       <p:sp>
         <p:nvSpPr>
-          <p:cNvPr id="12" name="Rounded Rectangle 11"/>
+          <p:cNvPr id="13" name="Rounded Rectangle 12"/>
           <p:cNvSpPr/>
           <p:nvPr/>
         </p:nvSpPr>
         <p:spPr>
           <a:xfrm>
             <a:off x="822960" y="4050792"/>
-            <a:ext cx="10515600" cy="841248"/>
+            <a:ext cx="8229600" cy="841248"/>
           </a:xfrm>
           <a:prstGeom prst="roundRect">
             <a:avLst>
@@ -5259,7 +5215,7 @@
       </p:sp>
       <p:sp>
         <p:nvSpPr>
-          <p:cNvPr id="13" name="Oval 12"/>
+          <p:cNvPr id="14" name="Oval 13"/>
           <p:cNvSpPr/>
           <p:nvPr/>
         </p:nvSpPr>
@@ -5311,7 +5267,7 @@
       </p:sp>
       <p:sp>
         <p:nvSpPr>
-          <p:cNvPr id="14" name="TextBox 13"/>
+          <p:cNvPr id="15" name="TextBox 14"/>
           <p:cNvSpPr txBox="1"/>
           <p:nvPr/>
         </p:nvSpPr>
@@ -5349,14 +5305,14 @@
       </p:sp>
       <p:sp>
         <p:nvSpPr>
-          <p:cNvPr id="15" name="TextBox 14"/>
+          <p:cNvPr id="16" name="TextBox 15"/>
           <p:cNvSpPr txBox="1"/>
           <p:nvPr/>
         </p:nvSpPr>
         <p:spPr>
           <a:xfrm>
             <a:off x="1691640" y="4270248"/>
-            <a:ext cx="9418320" cy="841248"/>
+            <a:ext cx="7132320" cy="841248"/>
           </a:xfrm>
           <a:prstGeom prst="rect">
             <a:avLst/>
@@ -5387,14 +5343,14 @@
       </p:sp>
       <p:sp>
         <p:nvSpPr>
-          <p:cNvPr id="16" name="Rounded Rectangle 15"/>
+          <p:cNvPr id="17" name="Rounded Rectangle 16"/>
           <p:cNvSpPr/>
           <p:nvPr/>
         </p:nvSpPr>
         <p:spPr>
           <a:xfrm>
             <a:off x="822960" y="5093208"/>
-            <a:ext cx="10515600" cy="841248"/>
+            <a:ext cx="8229600" cy="841248"/>
           </a:xfrm>
           <a:prstGeom prst="roundRect">
             <a:avLst>
@@ -5433,7 +5389,7 @@
       </p:sp>
       <p:sp>
         <p:nvSpPr>
-          <p:cNvPr id="17" name="Oval 16"/>
+          <p:cNvPr id="18" name="Oval 17"/>
           <p:cNvSpPr/>
           <p:nvPr/>
         </p:nvSpPr>
@@ -5485,7 +5441,7 @@
       </p:sp>
       <p:sp>
         <p:nvSpPr>
-          <p:cNvPr id="18" name="TextBox 17"/>
+          <p:cNvPr id="19" name="TextBox 18"/>
           <p:cNvSpPr txBox="1"/>
           <p:nvPr/>
         </p:nvSpPr>
@@ -5523,14 +5479,14 @@
       </p:sp>
       <p:sp>
         <p:nvSpPr>
-          <p:cNvPr id="19" name="TextBox 18"/>
+          <p:cNvPr id="20" name="TextBox 19"/>
           <p:cNvSpPr txBox="1"/>
           <p:nvPr/>
         </p:nvSpPr>
         <p:spPr>
           <a:xfrm>
             <a:off x="1691640" y="5312664"/>
-            <a:ext cx="9418320" cy="841248"/>
+            <a:ext cx="7132320" cy="841248"/>
           </a:xfrm>
           <a:prstGeom prst="rect">
             <a:avLst/>
@@ -5561,7 +5517,7 @@
       </p:sp>
       <p:sp>
         <p:nvSpPr>
-          <p:cNvPr id="20" name="TextBox 19"/>
+          <p:cNvPr id="21" name="TextBox 20"/>
           <p:cNvSpPr txBox="1"/>
           <p:nvPr/>
         </p:nvSpPr>
@@ -5599,7 +5555,7 @@
       </p:sp>
       <p:sp>
         <p:nvSpPr>
-          <p:cNvPr id="21" name="TextBox 20"/>
+          <p:cNvPr id="22" name="TextBox 21"/>
           <p:cNvSpPr txBox="1"/>
           <p:nvPr/>
         </p:nvSpPr>
@@ -5640,6 +5596,18 @@
   <p:clrMapOvr>
     <a:masterClrMapping/>
   </p:clrMapOvr>
+  <mc:AlternateContent xmlns:mc="http://schemas.openxmlformats.org/markup-compatibility/2006">
+    <mc:Choice xmlns:p14="http://schemas.microsoft.com/office/powerpoint/2010/main" Requires="p14">
+      <p:transition spd="slow" p14:dur="600">
+        <p:fade/>
+      </p:transition>
+    </mc:Choice>
+    <mc:Fallback>
+      <p:transition spd="slow">
+        <p:fade/>
+      </p:transition>
+    </mc:Fallback>
+  </mc:AlternateContent>
 </p:sld>
 </file>
 
@@ -5661,9 +5629,33 @@
         <p:nvPr/>
       </p:nvGrpSpPr>
       <p:grpSpPr/>
-      <p:sp>
-        <p:nvSpPr>
-          <p:cNvPr id="2" name="Rounded Rectangle 1"/>
+      <p:pic>
+        <p:nvPicPr>
+          <p:cNvPr id="2" name="Picture 1" descr="s11.png"/>
+          <p:cNvPicPr>
+            <a:picLocks noChangeAspect="1"/>
+          </p:cNvPicPr>
+          <p:nvPr/>
+        </p:nvPicPr>
+        <p:blipFill>
+          <a:blip r:embed="rId2"/>
+          <a:stretch>
+            <a:fillRect/>
+          </a:stretch>
+        </p:blipFill>
+        <p:spPr>
+          <a:xfrm>
+            <a:off x="9418320" y="3657600"/>
+            <a:ext cx="4023360" cy="4023360"/>
+          </a:xfrm>
+          <a:prstGeom prst="rect">
+            <a:avLst/>
+          </a:prstGeom>
+        </p:spPr>
+      </p:pic>
+      <p:sp>
+        <p:nvSpPr>
+          <p:cNvPr id="3" name="Rounded Rectangle 2"/>
           <p:cNvSpPr/>
           <p:nvPr/>
         </p:nvSpPr>
@@ -5717,7 +5709,7 @@
       </p:sp>
       <p:sp>
         <p:nvSpPr>
-          <p:cNvPr id="3" name="TextBox 2"/>
+          <p:cNvPr id="4" name="TextBox 3"/>
           <p:cNvSpPr txBox="1"/>
           <p:nvPr/>
         </p:nvSpPr>
@@ -5755,14 +5747,14 @@
       </p:sp>
       <p:sp>
         <p:nvSpPr>
-          <p:cNvPr id="4" name="Rounded Rectangle 3"/>
+          <p:cNvPr id="5" name="Rounded Rectangle 4"/>
           <p:cNvSpPr/>
           <p:nvPr/>
         </p:nvSpPr>
         <p:spPr>
           <a:xfrm>
             <a:off x="822960" y="1965960"/>
-            <a:ext cx="10515600" cy="841248"/>
+            <a:ext cx="8229600" cy="841248"/>
           </a:xfrm>
           <a:prstGeom prst="roundRect">
             <a:avLst>
@@ -5801,7 +5793,7 @@
       </p:sp>
       <p:sp>
         <p:nvSpPr>
-          <p:cNvPr id="5" name="Oval 4"/>
+          <p:cNvPr id="6" name="Oval 5"/>
           <p:cNvSpPr/>
           <p:nvPr/>
         </p:nvSpPr>
@@ -5853,7 +5845,7 @@
       </p:sp>
       <p:sp>
         <p:nvSpPr>
-          <p:cNvPr id="6" name="TextBox 5"/>
+          <p:cNvPr id="7" name="TextBox 6"/>
           <p:cNvSpPr txBox="1"/>
           <p:nvPr/>
         </p:nvSpPr>
@@ -5891,14 +5883,14 @@
       </p:sp>
       <p:sp>
         <p:nvSpPr>
-          <p:cNvPr id="7" name="TextBox 6"/>
+          <p:cNvPr id="8" name="TextBox 7"/>
           <p:cNvSpPr txBox="1"/>
           <p:nvPr/>
         </p:nvSpPr>
         <p:spPr>
           <a:xfrm>
             <a:off x="1691640" y="2185416"/>
-            <a:ext cx="9418320" cy="841248"/>
+            <a:ext cx="7132320" cy="841248"/>
           </a:xfrm>
           <a:prstGeom prst="rect">
             <a:avLst/>
@@ -5929,14 +5921,14 @@
       </p:sp>
       <p:sp>
         <p:nvSpPr>
-          <p:cNvPr id="8" name="Rounded Rectangle 7"/>
+          <p:cNvPr id="9" name="Rounded Rectangle 8"/>
           <p:cNvSpPr/>
           <p:nvPr/>
         </p:nvSpPr>
         <p:spPr>
           <a:xfrm>
             <a:off x="822960" y="3008376"/>
-            <a:ext cx="10515600" cy="841248"/>
+            <a:ext cx="8229600" cy="841248"/>
           </a:xfrm>
           <a:prstGeom prst="roundRect">
             <a:avLst>
@@ -5975,7 +5967,7 @@
       </p:sp>
       <p:sp>
         <p:nvSpPr>
-          <p:cNvPr id="9" name="Oval 8"/>
+          <p:cNvPr id="10" name="Oval 9"/>
           <p:cNvSpPr/>
           <p:nvPr/>
         </p:nvSpPr>
@@ -6027,7 +6019,7 @@
       </p:sp>
       <p:sp>
         <p:nvSpPr>
-          <p:cNvPr id="10" name="TextBox 9"/>
+          <p:cNvPr id="11" name="TextBox 10"/>
           <p:cNvSpPr txBox="1"/>
           <p:nvPr/>
         </p:nvSpPr>
@@ -6065,14 +6057,14 @@
       </p:sp>
       <p:sp>
         <p:nvSpPr>
-          <p:cNvPr id="11" name="TextBox 10"/>
+          <p:cNvPr id="12" name="TextBox 11"/>
           <p:cNvSpPr txBox="1"/>
           <p:nvPr/>
         </p:nvSpPr>
         <p:spPr>
           <a:xfrm>
             <a:off x="1691640" y="3227832"/>
-            <a:ext cx="9418320" cy="841248"/>
+            <a:ext cx="7132320" cy="841248"/>
           </a:xfrm>
           <a:prstGeom prst="rect">
             <a:avLst/>
@@ -6103,14 +6095,14 @@
       </p:sp>
       <p:sp>
         <p:nvSpPr>
-          <p:cNvPr id="12" name="Rounded Rectangle 11"/>
+          <p:cNvPr id="13" name="Rounded Rectangle 12"/>
           <p:cNvSpPr/>
           <p:nvPr/>
         </p:nvSpPr>
         <p:spPr>
           <a:xfrm>
             <a:off x="822960" y="4050792"/>
-            <a:ext cx="10515600" cy="841248"/>
+            <a:ext cx="8229600" cy="841248"/>
           </a:xfrm>
           <a:prstGeom prst="roundRect">
             <a:avLst>
@@ -6149,7 +6141,7 @@
       </p:sp>
       <p:sp>
         <p:nvSpPr>
-          <p:cNvPr id="13" name="Oval 12"/>
+          <p:cNvPr id="14" name="Oval 13"/>
           <p:cNvSpPr/>
           <p:nvPr/>
         </p:nvSpPr>
@@ -6201,7 +6193,7 @@
       </p:sp>
       <p:sp>
         <p:nvSpPr>
-          <p:cNvPr id="14" name="TextBox 13"/>
+          <p:cNvPr id="15" name="TextBox 14"/>
           <p:cNvSpPr txBox="1"/>
           <p:nvPr/>
         </p:nvSpPr>
@@ -6239,14 +6231,14 @@
       </p:sp>
       <p:sp>
         <p:nvSpPr>
-          <p:cNvPr id="15" name="TextBox 14"/>
+          <p:cNvPr id="16" name="TextBox 15"/>
           <p:cNvSpPr txBox="1"/>
           <p:nvPr/>
         </p:nvSpPr>
         <p:spPr>
           <a:xfrm>
             <a:off x="1691640" y="4270248"/>
-            <a:ext cx="9418320" cy="841248"/>
+            <a:ext cx="7132320" cy="841248"/>
           </a:xfrm>
           <a:prstGeom prst="rect">
             <a:avLst/>
@@ -6277,14 +6269,14 @@
       </p:sp>
       <p:sp>
         <p:nvSpPr>
-          <p:cNvPr id="16" name="Rounded Rectangle 15"/>
+          <p:cNvPr id="17" name="Rounded Rectangle 16"/>
           <p:cNvSpPr/>
           <p:nvPr/>
         </p:nvSpPr>
         <p:spPr>
           <a:xfrm>
             <a:off x="822960" y="5093208"/>
-            <a:ext cx="10515600" cy="841248"/>
+            <a:ext cx="8229600" cy="841248"/>
           </a:xfrm>
           <a:prstGeom prst="roundRect">
             <a:avLst>
@@ -6323,7 +6315,7 @@
       </p:sp>
       <p:sp>
         <p:nvSpPr>
-          <p:cNvPr id="17" name="Oval 16"/>
+          <p:cNvPr id="18" name="Oval 17"/>
           <p:cNvSpPr/>
           <p:nvPr/>
         </p:nvSpPr>
@@ -6375,7 +6367,7 @@
       </p:sp>
       <p:sp>
         <p:nvSpPr>
-          <p:cNvPr id="18" name="TextBox 17"/>
+          <p:cNvPr id="19" name="TextBox 18"/>
           <p:cNvSpPr txBox="1"/>
           <p:nvPr/>
         </p:nvSpPr>
@@ -6413,14 +6405,14 @@
       </p:sp>
       <p:sp>
         <p:nvSpPr>
-          <p:cNvPr id="19" name="TextBox 18"/>
+          <p:cNvPr id="20" name="TextBox 19"/>
           <p:cNvSpPr txBox="1"/>
           <p:nvPr/>
         </p:nvSpPr>
         <p:spPr>
           <a:xfrm>
             <a:off x="1691640" y="5312664"/>
-            <a:ext cx="9418320" cy="841248"/>
+            <a:ext cx="7132320" cy="841248"/>
           </a:xfrm>
           <a:prstGeom prst="rect">
             <a:avLst/>
@@ -6451,7 +6443,7 @@
       </p:sp>
       <p:sp>
         <p:nvSpPr>
-          <p:cNvPr id="20" name="TextBox 19"/>
+          <p:cNvPr id="21" name="TextBox 20"/>
           <p:cNvSpPr txBox="1"/>
           <p:nvPr/>
         </p:nvSpPr>
@@ -6489,7 +6481,7 @@
       </p:sp>
       <p:sp>
         <p:nvSpPr>
-          <p:cNvPr id="21" name="TextBox 20"/>
+          <p:cNvPr id="22" name="TextBox 21"/>
           <p:cNvSpPr txBox="1"/>
           <p:nvPr/>
         </p:nvSpPr>
@@ -6530,6 +6522,18 @@
   <p:clrMapOvr>
     <a:masterClrMapping/>
   </p:clrMapOvr>
+  <mc:AlternateContent xmlns:mc="http://schemas.openxmlformats.org/markup-compatibility/2006">
+    <mc:Choice xmlns:p14="http://schemas.microsoft.com/office/powerpoint/2010/main" Requires="p14">
+      <p:transition spd="slow" p14:dur="600">
+        <p:fade/>
+      </p:transition>
+    </mc:Choice>
+    <mc:Fallback>
+      <p:transition spd="slow">
+        <p:fade/>
+      </p:transition>
+    </mc:Fallback>
+  </mc:AlternateContent>
 </p:sld>
 </file>
 
@@ -6551,9 +6555,33 @@
         <p:nvPr/>
       </p:nvGrpSpPr>
       <p:grpSpPr/>
-      <p:sp>
-        <p:nvSpPr>
-          <p:cNvPr id="2" name="Rounded Rectangle 1"/>
+      <p:pic>
+        <p:nvPicPr>
+          <p:cNvPr id="2" name="Picture 1" descr="cover.png"/>
+          <p:cNvPicPr>
+            <a:picLocks noChangeAspect="1"/>
+          </p:cNvPicPr>
+          <p:nvPr/>
+        </p:nvPicPr>
+        <p:blipFill>
+          <a:blip r:embed="rId2"/>
+          <a:stretch>
+            <a:fillRect/>
+          </a:stretch>
+        </p:blipFill>
+        <p:spPr>
+          <a:xfrm>
+            <a:off x="9418320" y="3657600"/>
+            <a:ext cx="4023360" cy="4023360"/>
+          </a:xfrm>
+          <a:prstGeom prst="rect">
+            <a:avLst/>
+          </a:prstGeom>
+        </p:spPr>
+      </p:pic>
+      <p:sp>
+        <p:nvSpPr>
+          <p:cNvPr id="3" name="Rounded Rectangle 2"/>
           <p:cNvSpPr/>
           <p:nvPr/>
         </p:nvSpPr>
@@ -6607,7 +6635,7 @@
       </p:sp>
       <p:sp>
         <p:nvSpPr>
-          <p:cNvPr id="3" name="TextBox 2"/>
+          <p:cNvPr id="4" name="TextBox 3"/>
           <p:cNvSpPr txBox="1"/>
           <p:nvPr/>
         </p:nvSpPr>
@@ -6645,14 +6673,14 @@
       </p:sp>
       <p:sp>
         <p:nvSpPr>
-          <p:cNvPr id="4" name="Rounded Rectangle 3"/>
+          <p:cNvPr id="5" name="Rounded Rectangle 4"/>
           <p:cNvSpPr/>
           <p:nvPr/>
         </p:nvSpPr>
         <p:spPr>
           <a:xfrm>
             <a:off x="822960" y="1965960"/>
-            <a:ext cx="10515600" cy="841248"/>
+            <a:ext cx="8229600" cy="841248"/>
           </a:xfrm>
           <a:prstGeom prst="roundRect">
             <a:avLst>
@@ -6691,7 +6719,7 @@
       </p:sp>
       <p:sp>
         <p:nvSpPr>
-          <p:cNvPr id="5" name="Oval 4"/>
+          <p:cNvPr id="6" name="Oval 5"/>
           <p:cNvSpPr/>
           <p:nvPr/>
         </p:nvSpPr>
@@ -6743,7 +6771,7 @@
       </p:sp>
       <p:sp>
         <p:nvSpPr>
-          <p:cNvPr id="6" name="TextBox 5"/>
+          <p:cNvPr id="7" name="TextBox 6"/>
           <p:cNvSpPr txBox="1"/>
           <p:nvPr/>
         </p:nvSpPr>
@@ -6781,14 +6809,14 @@
       </p:sp>
       <p:sp>
         <p:nvSpPr>
-          <p:cNvPr id="7" name="TextBox 6"/>
+          <p:cNvPr id="8" name="TextBox 7"/>
           <p:cNvSpPr txBox="1"/>
           <p:nvPr/>
         </p:nvSpPr>
         <p:spPr>
           <a:xfrm>
             <a:off x="1691640" y="2185416"/>
-            <a:ext cx="9418320" cy="841248"/>
+            <a:ext cx="7132320" cy="841248"/>
           </a:xfrm>
           <a:prstGeom prst="rect">
             <a:avLst/>
@@ -6819,14 +6847,14 @@
       </p:sp>
       <p:sp>
         <p:nvSpPr>
-          <p:cNvPr id="8" name="Rounded Rectangle 7"/>
+          <p:cNvPr id="9" name="Rounded Rectangle 8"/>
           <p:cNvSpPr/>
           <p:nvPr/>
         </p:nvSpPr>
         <p:spPr>
           <a:xfrm>
             <a:off x="822960" y="3008376"/>
-            <a:ext cx="10515600" cy="841248"/>
+            <a:ext cx="8229600" cy="841248"/>
           </a:xfrm>
           <a:prstGeom prst="roundRect">
             <a:avLst>
@@ -6865,7 +6893,7 @@
       </p:sp>
       <p:sp>
         <p:nvSpPr>
-          <p:cNvPr id="9" name="Oval 8"/>
+          <p:cNvPr id="10" name="Oval 9"/>
           <p:cNvSpPr/>
           <p:nvPr/>
         </p:nvSpPr>
@@ -6917,7 +6945,7 @@
       </p:sp>
       <p:sp>
         <p:nvSpPr>
-          <p:cNvPr id="10" name="TextBox 9"/>
+          <p:cNvPr id="11" name="TextBox 10"/>
           <p:cNvSpPr txBox="1"/>
           <p:nvPr/>
         </p:nvSpPr>
@@ -6955,14 +6983,14 @@
       </p:sp>
       <p:sp>
         <p:nvSpPr>
-          <p:cNvPr id="11" name="TextBox 10"/>
+          <p:cNvPr id="12" name="TextBox 11"/>
           <p:cNvSpPr txBox="1"/>
           <p:nvPr/>
         </p:nvSpPr>
         <p:spPr>
           <a:xfrm>
             <a:off x="1691640" y="3227832"/>
-            <a:ext cx="9418320" cy="841248"/>
+            <a:ext cx="7132320" cy="841248"/>
           </a:xfrm>
           <a:prstGeom prst="rect">
             <a:avLst/>
@@ -6993,14 +7021,14 @@
       </p:sp>
       <p:sp>
         <p:nvSpPr>
-          <p:cNvPr id="12" name="Rounded Rectangle 11"/>
+          <p:cNvPr id="13" name="Rounded Rectangle 12"/>
           <p:cNvSpPr/>
           <p:nvPr/>
         </p:nvSpPr>
         <p:spPr>
           <a:xfrm>
             <a:off x="822960" y="4050792"/>
-            <a:ext cx="10515600" cy="841248"/>
+            <a:ext cx="8229600" cy="841248"/>
           </a:xfrm>
           <a:prstGeom prst="roundRect">
             <a:avLst>
@@ -7039,7 +7067,7 @@
       </p:sp>
       <p:sp>
         <p:nvSpPr>
-          <p:cNvPr id="13" name="Oval 12"/>
+          <p:cNvPr id="14" name="Oval 13"/>
           <p:cNvSpPr/>
           <p:nvPr/>
         </p:nvSpPr>
@@ -7091,7 +7119,7 @@
       </p:sp>
       <p:sp>
         <p:nvSpPr>
-          <p:cNvPr id="14" name="TextBox 13"/>
+          <p:cNvPr id="15" name="TextBox 14"/>
           <p:cNvSpPr txBox="1"/>
           <p:nvPr/>
         </p:nvSpPr>
@@ -7129,14 +7157,14 @@
       </p:sp>
       <p:sp>
         <p:nvSpPr>
-          <p:cNvPr id="15" name="TextBox 14"/>
+          <p:cNvPr id="16" name="TextBox 15"/>
           <p:cNvSpPr txBox="1"/>
           <p:nvPr/>
         </p:nvSpPr>
         <p:spPr>
           <a:xfrm>
             <a:off x="1691640" y="4270248"/>
-            <a:ext cx="9418320" cy="841248"/>
+            <a:ext cx="7132320" cy="841248"/>
           </a:xfrm>
           <a:prstGeom prst="rect">
             <a:avLst/>
@@ -7167,14 +7195,14 @@
       </p:sp>
       <p:sp>
         <p:nvSpPr>
-          <p:cNvPr id="16" name="Rounded Rectangle 15"/>
+          <p:cNvPr id="17" name="Rounded Rectangle 16"/>
           <p:cNvSpPr/>
           <p:nvPr/>
         </p:nvSpPr>
         <p:spPr>
           <a:xfrm>
             <a:off x="822960" y="5093208"/>
-            <a:ext cx="10515600" cy="841248"/>
+            <a:ext cx="8229600" cy="841248"/>
           </a:xfrm>
           <a:prstGeom prst="roundRect">
             <a:avLst>
@@ -7213,7 +7241,7 @@
       </p:sp>
       <p:sp>
         <p:nvSpPr>
-          <p:cNvPr id="17" name="Oval 16"/>
+          <p:cNvPr id="18" name="Oval 17"/>
           <p:cNvSpPr/>
           <p:nvPr/>
         </p:nvSpPr>
@@ -7265,7 +7293,7 @@
       </p:sp>
       <p:sp>
         <p:nvSpPr>
-          <p:cNvPr id="18" name="TextBox 17"/>
+          <p:cNvPr id="19" name="TextBox 18"/>
           <p:cNvSpPr txBox="1"/>
           <p:nvPr/>
         </p:nvSpPr>
@@ -7303,14 +7331,14 @@
       </p:sp>
       <p:sp>
         <p:nvSpPr>
-          <p:cNvPr id="19" name="TextBox 18"/>
+          <p:cNvPr id="20" name="TextBox 19"/>
           <p:cNvSpPr txBox="1"/>
           <p:nvPr/>
         </p:nvSpPr>
         <p:spPr>
           <a:xfrm>
             <a:off x="1691640" y="5312664"/>
-            <a:ext cx="9418320" cy="841248"/>
+            <a:ext cx="7132320" cy="841248"/>
           </a:xfrm>
           <a:prstGeom prst="rect">
             <a:avLst/>
@@ -7341,7 +7369,7 @@
       </p:sp>
       <p:sp>
         <p:nvSpPr>
-          <p:cNvPr id="20" name="TextBox 19"/>
+          <p:cNvPr id="21" name="TextBox 20"/>
           <p:cNvSpPr txBox="1"/>
           <p:nvPr/>
         </p:nvSpPr>
@@ -7379,7 +7407,7 @@
       </p:sp>
       <p:sp>
         <p:nvSpPr>
-          <p:cNvPr id="21" name="TextBox 20"/>
+          <p:cNvPr id="22" name="TextBox 21"/>
           <p:cNvSpPr txBox="1"/>
           <p:nvPr/>
         </p:nvSpPr>
@@ -7420,6 +7448,18 @@
   <p:clrMapOvr>
     <a:masterClrMapping/>
   </p:clrMapOvr>
+  <mc:AlternateContent xmlns:mc="http://schemas.openxmlformats.org/markup-compatibility/2006">
+    <mc:Choice xmlns:p14="http://schemas.microsoft.com/office/powerpoint/2010/main" Requires="p14">
+      <p:transition spd="slow" p14:dur="600">
+        <p:fade/>
+      </p:transition>
+    </mc:Choice>
+    <mc:Fallback>
+      <p:transition spd="slow">
+        <p:fade/>
+      </p:transition>
+    </mc:Fallback>
+  </mc:AlternateContent>
 </p:sld>
 </file>
 
@@ -7441,9 +7481,33 @@
         <p:nvPr/>
       </p:nvGrpSpPr>
       <p:grpSpPr/>
-      <p:sp>
-        <p:nvSpPr>
-          <p:cNvPr id="2" name="Rounded Rectangle 1"/>
+      <p:pic>
+        <p:nvPicPr>
+          <p:cNvPr id="2" name="Picture 1" descr="s10.png"/>
+          <p:cNvPicPr>
+            <a:picLocks noChangeAspect="1"/>
+          </p:cNvPicPr>
+          <p:nvPr/>
+        </p:nvPicPr>
+        <p:blipFill>
+          <a:blip r:embed="rId2"/>
+          <a:stretch>
+            <a:fillRect/>
+          </a:stretch>
+        </p:blipFill>
+        <p:spPr>
+          <a:xfrm>
+            <a:off x="9418320" y="3657600"/>
+            <a:ext cx="4023360" cy="4023360"/>
+          </a:xfrm>
+          <a:prstGeom prst="rect">
+            <a:avLst/>
+          </a:prstGeom>
+        </p:spPr>
+      </p:pic>
+      <p:sp>
+        <p:nvSpPr>
+          <p:cNvPr id="3" name="Rounded Rectangle 2"/>
           <p:cNvSpPr/>
           <p:nvPr/>
         </p:nvSpPr>
@@ -7497,7 +7561,7 @@
       </p:sp>
       <p:sp>
         <p:nvSpPr>
-          <p:cNvPr id="3" name="TextBox 2"/>
+          <p:cNvPr id="4" name="TextBox 3"/>
           <p:cNvSpPr txBox="1"/>
           <p:nvPr/>
         </p:nvSpPr>
@@ -7535,14 +7599,14 @@
       </p:sp>
       <p:sp>
         <p:nvSpPr>
-          <p:cNvPr id="4" name="Rounded Rectangle 3"/>
+          <p:cNvPr id="5" name="Rounded Rectangle 4"/>
           <p:cNvSpPr/>
           <p:nvPr/>
         </p:nvSpPr>
         <p:spPr>
           <a:xfrm>
             <a:off x="822960" y="1965960"/>
-            <a:ext cx="10515600" cy="841248"/>
+            <a:ext cx="8229600" cy="841248"/>
           </a:xfrm>
           <a:prstGeom prst="roundRect">
             <a:avLst>
@@ -7581,7 +7645,7 @@
       </p:sp>
       <p:sp>
         <p:nvSpPr>
-          <p:cNvPr id="5" name="Oval 4"/>
+          <p:cNvPr id="6" name="Oval 5"/>
           <p:cNvSpPr/>
           <p:nvPr/>
         </p:nvSpPr>
@@ -7633,7 +7697,7 @@
       </p:sp>
       <p:sp>
         <p:nvSpPr>
-          <p:cNvPr id="6" name="TextBox 5"/>
+          <p:cNvPr id="7" name="TextBox 6"/>
           <p:cNvSpPr txBox="1"/>
           <p:nvPr/>
         </p:nvSpPr>
@@ -7671,14 +7735,14 @@
       </p:sp>
       <p:sp>
         <p:nvSpPr>
-          <p:cNvPr id="7" name="TextBox 6"/>
+          <p:cNvPr id="8" name="TextBox 7"/>
           <p:cNvSpPr txBox="1"/>
           <p:nvPr/>
         </p:nvSpPr>
         <p:spPr>
           <a:xfrm>
             <a:off x="1691640" y="2185416"/>
-            <a:ext cx="9418320" cy="841248"/>
+            <a:ext cx="7132320" cy="841248"/>
           </a:xfrm>
           <a:prstGeom prst="rect">
             <a:avLst/>
@@ -7709,14 +7773,14 @@
       </p:sp>
       <p:sp>
         <p:nvSpPr>
-          <p:cNvPr id="8" name="Rounded Rectangle 7"/>
+          <p:cNvPr id="9" name="Rounded Rectangle 8"/>
           <p:cNvSpPr/>
           <p:nvPr/>
         </p:nvSpPr>
         <p:spPr>
           <a:xfrm>
             <a:off x="822960" y="3008376"/>
-            <a:ext cx="10515600" cy="841248"/>
+            <a:ext cx="8229600" cy="841248"/>
           </a:xfrm>
           <a:prstGeom prst="roundRect">
             <a:avLst>
@@ -7755,7 +7819,7 @@
       </p:sp>
       <p:sp>
         <p:nvSpPr>
-          <p:cNvPr id="9" name="Oval 8"/>
+          <p:cNvPr id="10" name="Oval 9"/>
           <p:cNvSpPr/>
           <p:nvPr/>
         </p:nvSpPr>
@@ -7807,7 +7871,7 @@
       </p:sp>
       <p:sp>
         <p:nvSpPr>
-          <p:cNvPr id="10" name="TextBox 9"/>
+          <p:cNvPr id="11" name="TextBox 10"/>
           <p:cNvSpPr txBox="1"/>
           <p:nvPr/>
         </p:nvSpPr>
@@ -7845,14 +7909,14 @@
       </p:sp>
       <p:sp>
         <p:nvSpPr>
-          <p:cNvPr id="11" name="TextBox 10"/>
+          <p:cNvPr id="12" name="TextBox 11"/>
           <p:cNvSpPr txBox="1"/>
           <p:nvPr/>
         </p:nvSpPr>
         <p:spPr>
           <a:xfrm>
             <a:off x="1691640" y="3227832"/>
-            <a:ext cx="9418320" cy="841248"/>
+            <a:ext cx="7132320" cy="841248"/>
           </a:xfrm>
           <a:prstGeom prst="rect">
             <a:avLst/>
@@ -7883,14 +7947,14 @@
       </p:sp>
       <p:sp>
         <p:nvSpPr>
-          <p:cNvPr id="12" name="Rounded Rectangle 11"/>
+          <p:cNvPr id="13" name="Rounded Rectangle 12"/>
           <p:cNvSpPr/>
           <p:nvPr/>
         </p:nvSpPr>
         <p:spPr>
           <a:xfrm>
             <a:off x="822960" y="4050792"/>
-            <a:ext cx="10515600" cy="841248"/>
+            <a:ext cx="8229600" cy="841248"/>
           </a:xfrm>
           <a:prstGeom prst="roundRect">
             <a:avLst>
@@ -7929,7 +7993,7 @@
       </p:sp>
       <p:sp>
         <p:nvSpPr>
-          <p:cNvPr id="13" name="Oval 12"/>
+          <p:cNvPr id="14" name="Oval 13"/>
           <p:cNvSpPr/>
           <p:nvPr/>
         </p:nvSpPr>
@@ -7981,7 +8045,7 @@
       </p:sp>
       <p:sp>
         <p:nvSpPr>
-          <p:cNvPr id="14" name="TextBox 13"/>
+          <p:cNvPr id="15" name="TextBox 14"/>
           <p:cNvSpPr txBox="1"/>
           <p:nvPr/>
         </p:nvSpPr>
@@ -8019,14 +8083,14 @@
       </p:sp>
       <p:sp>
         <p:nvSpPr>
-          <p:cNvPr id="15" name="TextBox 14"/>
+          <p:cNvPr id="16" name="TextBox 15"/>
           <p:cNvSpPr txBox="1"/>
           <p:nvPr/>
         </p:nvSpPr>
         <p:spPr>
           <a:xfrm>
             <a:off x="1691640" y="4270248"/>
-            <a:ext cx="9418320" cy="841248"/>
+            <a:ext cx="7132320" cy="841248"/>
           </a:xfrm>
           <a:prstGeom prst="rect">
             <a:avLst/>
@@ -8057,14 +8121,14 @@
       </p:sp>
       <p:sp>
         <p:nvSpPr>
-          <p:cNvPr id="16" name="Rounded Rectangle 15"/>
+          <p:cNvPr id="17" name="Rounded Rectangle 16"/>
           <p:cNvSpPr/>
           <p:nvPr/>
         </p:nvSpPr>
         <p:spPr>
           <a:xfrm>
             <a:off x="822960" y="5093208"/>
-            <a:ext cx="10515600" cy="841248"/>
+            <a:ext cx="8229600" cy="841248"/>
           </a:xfrm>
           <a:prstGeom prst="roundRect">
             <a:avLst>
@@ -8103,7 +8167,7 @@
       </p:sp>
       <p:sp>
         <p:nvSpPr>
-          <p:cNvPr id="17" name="Oval 16"/>
+          <p:cNvPr id="18" name="Oval 17"/>
           <p:cNvSpPr/>
           <p:nvPr/>
         </p:nvSpPr>
@@ -8155,7 +8219,7 @@
       </p:sp>
       <p:sp>
         <p:nvSpPr>
-          <p:cNvPr id="18" name="TextBox 17"/>
+          <p:cNvPr id="19" name="TextBox 18"/>
           <p:cNvSpPr txBox="1"/>
           <p:nvPr/>
         </p:nvSpPr>
@@ -8193,14 +8257,14 @@
       </p:sp>
       <p:sp>
         <p:nvSpPr>
-          <p:cNvPr id="19" name="TextBox 18"/>
+          <p:cNvPr id="20" name="TextBox 19"/>
           <p:cNvSpPr txBox="1"/>
           <p:nvPr/>
         </p:nvSpPr>
         <p:spPr>
           <a:xfrm>
             <a:off x="1691640" y="5312664"/>
-            <a:ext cx="9418320" cy="841248"/>
+            <a:ext cx="7132320" cy="841248"/>
           </a:xfrm>
           <a:prstGeom prst="rect">
             <a:avLst/>
@@ -8231,7 +8295,7 @@
       </p:sp>
       <p:sp>
         <p:nvSpPr>
-          <p:cNvPr id="20" name="TextBox 19"/>
+          <p:cNvPr id="21" name="TextBox 20"/>
           <p:cNvSpPr txBox="1"/>
           <p:nvPr/>
         </p:nvSpPr>
@@ -8269,7 +8333,7 @@
       </p:sp>
       <p:sp>
         <p:nvSpPr>
-          <p:cNvPr id="21" name="TextBox 20"/>
+          <p:cNvPr id="22" name="TextBox 21"/>
           <p:cNvSpPr txBox="1"/>
           <p:nvPr/>
         </p:nvSpPr>
@@ -8310,6 +8374,18 @@
   <p:clrMapOvr>
     <a:masterClrMapping/>
   </p:clrMapOvr>
+  <mc:AlternateContent xmlns:mc="http://schemas.openxmlformats.org/markup-compatibility/2006">
+    <mc:Choice xmlns:p14="http://schemas.microsoft.com/office/powerpoint/2010/main" Requires="p14">
+      <p:transition spd="slow" p14:dur="600">
+        <p:fade/>
+      </p:transition>
+    </mc:Choice>
+    <mc:Fallback>
+      <p:transition spd="slow">
+        <p:fade/>
+      </p:transition>
+    </mc:Fallback>
+  </mc:AlternateContent>
 </p:sld>
 </file>
 
@@ -8840,6 +8916,18 @@
   <p:clrMapOvr>
     <a:masterClrMapping/>
   </p:clrMapOvr>
+  <mc:AlternateContent xmlns:mc="http://schemas.openxmlformats.org/markup-compatibility/2006">
+    <mc:Choice xmlns:p14="http://schemas.microsoft.com/office/powerpoint/2010/main" Requires="p14">
+      <p:transition spd="slow" p14:dur="600">
+        <p:fade/>
+      </p:transition>
+    </mc:Choice>
+    <mc:Fallback>
+      <p:transition spd="slow">
+        <p:fade/>
+      </p:transition>
+    </mc:Fallback>
+  </mc:AlternateContent>
 </p:sld>
 </file>
 
@@ -8861,9 +8949,33 @@
         <p:nvPr/>
       </p:nvGrpSpPr>
       <p:grpSpPr/>
-      <p:sp>
-        <p:nvSpPr>
-          <p:cNvPr id="2" name="Rounded Rectangle 1"/>
+      <p:pic>
+        <p:nvPicPr>
+          <p:cNvPr id="2" name="Picture 1" descr="s10.png"/>
+          <p:cNvPicPr>
+            <a:picLocks noChangeAspect="1"/>
+          </p:cNvPicPr>
+          <p:nvPr/>
+        </p:nvPicPr>
+        <p:blipFill>
+          <a:blip r:embed="rId2"/>
+          <a:stretch>
+            <a:fillRect/>
+          </a:stretch>
+        </p:blipFill>
+        <p:spPr>
+          <a:xfrm>
+            <a:off x="9418320" y="3657600"/>
+            <a:ext cx="4023360" cy="4023360"/>
+          </a:xfrm>
+          <a:prstGeom prst="rect">
+            <a:avLst/>
+          </a:prstGeom>
+        </p:spPr>
+      </p:pic>
+      <p:sp>
+        <p:nvSpPr>
+          <p:cNvPr id="3" name="Rounded Rectangle 2"/>
           <p:cNvSpPr/>
           <p:nvPr/>
         </p:nvSpPr>
@@ -8917,7 +9029,7 @@
       </p:sp>
       <p:sp>
         <p:nvSpPr>
-          <p:cNvPr id="3" name="TextBox 2"/>
+          <p:cNvPr id="4" name="TextBox 3"/>
           <p:cNvSpPr txBox="1"/>
           <p:nvPr/>
         </p:nvSpPr>
@@ -8955,14 +9067,14 @@
       </p:sp>
       <p:sp>
         <p:nvSpPr>
-          <p:cNvPr id="4" name="Rounded Rectangle 3"/>
+          <p:cNvPr id="5" name="Rounded Rectangle 4"/>
           <p:cNvSpPr/>
           <p:nvPr/>
         </p:nvSpPr>
         <p:spPr>
           <a:xfrm>
             <a:off x="822960" y="1965960"/>
-            <a:ext cx="10515600" cy="841248"/>
+            <a:ext cx="8229600" cy="841248"/>
           </a:xfrm>
           <a:prstGeom prst="roundRect">
             <a:avLst>
@@ -9001,7 +9113,7 @@
       </p:sp>
       <p:sp>
         <p:nvSpPr>
-          <p:cNvPr id="5" name="Oval 4"/>
+          <p:cNvPr id="6" name="Oval 5"/>
           <p:cNvSpPr/>
           <p:nvPr/>
         </p:nvSpPr>
@@ -9053,7 +9165,7 @@
       </p:sp>
       <p:sp>
         <p:nvSpPr>
-          <p:cNvPr id="6" name="TextBox 5"/>
+          <p:cNvPr id="7" name="TextBox 6"/>
           <p:cNvSpPr txBox="1"/>
           <p:nvPr/>
         </p:nvSpPr>
@@ -9091,14 +9203,14 @@
       </p:sp>
       <p:sp>
         <p:nvSpPr>
-          <p:cNvPr id="7" name="TextBox 6"/>
+          <p:cNvPr id="8" name="TextBox 7"/>
           <p:cNvSpPr txBox="1"/>
           <p:nvPr/>
         </p:nvSpPr>
         <p:spPr>
           <a:xfrm>
             <a:off x="1691640" y="2185416"/>
-            <a:ext cx="9418320" cy="841248"/>
+            <a:ext cx="7132320" cy="841248"/>
           </a:xfrm>
           <a:prstGeom prst="rect">
             <a:avLst/>
@@ -9129,14 +9241,14 @@
       </p:sp>
       <p:sp>
         <p:nvSpPr>
-          <p:cNvPr id="8" name="Rounded Rectangle 7"/>
+          <p:cNvPr id="9" name="Rounded Rectangle 8"/>
           <p:cNvSpPr/>
           <p:nvPr/>
         </p:nvSpPr>
         <p:spPr>
           <a:xfrm>
             <a:off x="822960" y="3008376"/>
-            <a:ext cx="10515600" cy="841248"/>
+            <a:ext cx="8229600" cy="841248"/>
           </a:xfrm>
           <a:prstGeom prst="roundRect">
             <a:avLst>
@@ -9175,7 +9287,7 @@
       </p:sp>
       <p:sp>
         <p:nvSpPr>
-          <p:cNvPr id="9" name="Oval 8"/>
+          <p:cNvPr id="10" name="Oval 9"/>
           <p:cNvSpPr/>
           <p:nvPr/>
         </p:nvSpPr>
@@ -9227,7 +9339,7 @@
       </p:sp>
       <p:sp>
         <p:nvSpPr>
-          <p:cNvPr id="10" name="TextBox 9"/>
+          <p:cNvPr id="11" name="TextBox 10"/>
           <p:cNvSpPr txBox="1"/>
           <p:nvPr/>
         </p:nvSpPr>
@@ -9265,14 +9377,14 @@
       </p:sp>
       <p:sp>
         <p:nvSpPr>
-          <p:cNvPr id="11" name="TextBox 10"/>
+          <p:cNvPr id="12" name="TextBox 11"/>
           <p:cNvSpPr txBox="1"/>
           <p:nvPr/>
         </p:nvSpPr>
         <p:spPr>
           <a:xfrm>
             <a:off x="1691640" y="3227832"/>
-            <a:ext cx="9418320" cy="841248"/>
+            <a:ext cx="7132320" cy="841248"/>
           </a:xfrm>
           <a:prstGeom prst="rect">
             <a:avLst/>
@@ -9303,14 +9415,14 @@
       </p:sp>
       <p:sp>
         <p:nvSpPr>
-          <p:cNvPr id="12" name="Rounded Rectangle 11"/>
+          <p:cNvPr id="13" name="Rounded Rectangle 12"/>
           <p:cNvSpPr/>
           <p:nvPr/>
         </p:nvSpPr>
         <p:spPr>
           <a:xfrm>
             <a:off x="822960" y="4050792"/>
-            <a:ext cx="10515600" cy="841248"/>
+            <a:ext cx="8229600" cy="841248"/>
           </a:xfrm>
           <a:prstGeom prst="roundRect">
             <a:avLst>
@@ -9349,7 +9461,7 @@
       </p:sp>
       <p:sp>
         <p:nvSpPr>
-          <p:cNvPr id="13" name="Oval 12"/>
+          <p:cNvPr id="14" name="Oval 13"/>
           <p:cNvSpPr/>
           <p:nvPr/>
         </p:nvSpPr>
@@ -9401,7 +9513,7 @@
       </p:sp>
       <p:sp>
         <p:nvSpPr>
-          <p:cNvPr id="14" name="TextBox 13"/>
+          <p:cNvPr id="15" name="TextBox 14"/>
           <p:cNvSpPr txBox="1"/>
           <p:nvPr/>
         </p:nvSpPr>
@@ -9439,14 +9551,14 @@
       </p:sp>
       <p:sp>
         <p:nvSpPr>
-          <p:cNvPr id="15" name="TextBox 14"/>
+          <p:cNvPr id="16" name="TextBox 15"/>
           <p:cNvSpPr txBox="1"/>
           <p:nvPr/>
         </p:nvSpPr>
         <p:spPr>
           <a:xfrm>
             <a:off x="1691640" y="4270248"/>
-            <a:ext cx="9418320" cy="841248"/>
+            <a:ext cx="7132320" cy="841248"/>
           </a:xfrm>
           <a:prstGeom prst="rect">
             <a:avLst/>
@@ -9477,14 +9589,14 @@
       </p:sp>
       <p:sp>
         <p:nvSpPr>
-          <p:cNvPr id="16" name="Rounded Rectangle 15"/>
+          <p:cNvPr id="17" name="Rounded Rectangle 16"/>
           <p:cNvSpPr/>
           <p:nvPr/>
         </p:nvSpPr>
         <p:spPr>
           <a:xfrm>
             <a:off x="822960" y="5093208"/>
-            <a:ext cx="10515600" cy="841248"/>
+            <a:ext cx="8229600" cy="841248"/>
           </a:xfrm>
           <a:prstGeom prst="roundRect">
             <a:avLst>
@@ -9523,7 +9635,7 @@
       </p:sp>
       <p:sp>
         <p:nvSpPr>
-          <p:cNvPr id="17" name="Oval 16"/>
+          <p:cNvPr id="18" name="Oval 17"/>
           <p:cNvSpPr/>
           <p:nvPr/>
         </p:nvSpPr>
@@ -9575,7 +9687,7 @@
       </p:sp>
       <p:sp>
         <p:nvSpPr>
-          <p:cNvPr id="18" name="TextBox 17"/>
+          <p:cNvPr id="19" name="TextBox 18"/>
           <p:cNvSpPr txBox="1"/>
           <p:nvPr/>
         </p:nvSpPr>
@@ -9613,14 +9725,14 @@
       </p:sp>
       <p:sp>
         <p:nvSpPr>
-          <p:cNvPr id="19" name="TextBox 18"/>
+          <p:cNvPr id="20" name="TextBox 19"/>
           <p:cNvSpPr txBox="1"/>
           <p:nvPr/>
         </p:nvSpPr>
         <p:spPr>
           <a:xfrm>
             <a:off x="1691640" y="5312664"/>
-            <a:ext cx="9418320" cy="841248"/>
+            <a:ext cx="7132320" cy="841248"/>
           </a:xfrm>
           <a:prstGeom prst="rect">
             <a:avLst/>
@@ -9651,7 +9763,7 @@
       </p:sp>
       <p:sp>
         <p:nvSpPr>
-          <p:cNvPr id="20" name="TextBox 19"/>
+          <p:cNvPr id="21" name="TextBox 20"/>
           <p:cNvSpPr txBox="1"/>
           <p:nvPr/>
         </p:nvSpPr>
@@ -9689,7 +9801,7 @@
       </p:sp>
       <p:sp>
         <p:nvSpPr>
-          <p:cNvPr id="21" name="TextBox 20"/>
+          <p:cNvPr id="22" name="TextBox 21"/>
           <p:cNvSpPr txBox="1"/>
           <p:nvPr/>
         </p:nvSpPr>
@@ -9730,6 +9842,18 @@
   <p:clrMapOvr>
     <a:masterClrMapping/>
   </p:clrMapOvr>
+  <mc:AlternateContent xmlns:mc="http://schemas.openxmlformats.org/markup-compatibility/2006">
+    <mc:Choice xmlns:p14="http://schemas.microsoft.com/office/powerpoint/2010/main" Requires="p14">
+      <p:transition spd="slow" p14:dur="600">
+        <p:fade/>
+      </p:transition>
+    </mc:Choice>
+    <mc:Fallback>
+      <p:transition spd="slow">
+        <p:fade/>
+      </p:transition>
+    </mc:Fallback>
+  </mc:AlternateContent>
 </p:sld>
 </file>
 
@@ -9751,9 +9875,33 @@
         <p:nvPr/>
       </p:nvGrpSpPr>
       <p:grpSpPr/>
-      <p:sp>
-        <p:nvSpPr>
-          <p:cNvPr id="2" name="Rounded Rectangle 1"/>
+      <p:pic>
+        <p:nvPicPr>
+          <p:cNvPr id="2" name="Picture 1" descr="cover.png"/>
+          <p:cNvPicPr>
+            <a:picLocks noChangeAspect="1"/>
+          </p:cNvPicPr>
+          <p:nvPr/>
+        </p:nvPicPr>
+        <p:blipFill>
+          <a:blip r:embed="rId2"/>
+          <a:stretch>
+            <a:fillRect/>
+          </a:stretch>
+        </p:blipFill>
+        <p:spPr>
+          <a:xfrm>
+            <a:off x="9418320" y="3657600"/>
+            <a:ext cx="4023360" cy="4023360"/>
+          </a:xfrm>
+          <a:prstGeom prst="rect">
+            <a:avLst/>
+          </a:prstGeom>
+        </p:spPr>
+      </p:pic>
+      <p:sp>
+        <p:nvSpPr>
+          <p:cNvPr id="3" name="Rounded Rectangle 2"/>
           <p:cNvSpPr/>
           <p:nvPr/>
         </p:nvSpPr>
@@ -9807,7 +9955,7 @@
       </p:sp>
       <p:sp>
         <p:nvSpPr>
-          <p:cNvPr id="3" name="TextBox 2"/>
+          <p:cNvPr id="4" name="TextBox 3"/>
           <p:cNvSpPr txBox="1"/>
           <p:nvPr/>
         </p:nvSpPr>
@@ -9845,14 +9993,14 @@
       </p:sp>
       <p:sp>
         <p:nvSpPr>
-          <p:cNvPr id="4" name="Rounded Rectangle 3"/>
+          <p:cNvPr id="5" name="Rounded Rectangle 4"/>
           <p:cNvSpPr/>
           <p:nvPr/>
         </p:nvSpPr>
         <p:spPr>
           <a:xfrm>
             <a:off x="822960" y="1965960"/>
-            <a:ext cx="10515600" cy="841248"/>
+            <a:ext cx="8229600" cy="841248"/>
           </a:xfrm>
           <a:prstGeom prst="roundRect">
             <a:avLst>
@@ -9891,7 +10039,7 @@
       </p:sp>
       <p:sp>
         <p:nvSpPr>
-          <p:cNvPr id="5" name="Oval 4"/>
+          <p:cNvPr id="6" name="Oval 5"/>
           <p:cNvSpPr/>
           <p:nvPr/>
         </p:nvSpPr>
@@ -9943,7 +10091,7 @@
       </p:sp>
       <p:sp>
         <p:nvSpPr>
-          <p:cNvPr id="6" name="TextBox 5"/>
+          <p:cNvPr id="7" name="TextBox 6"/>
           <p:cNvSpPr txBox="1"/>
           <p:nvPr/>
         </p:nvSpPr>
@@ -9981,14 +10129,14 @@
       </p:sp>
       <p:sp>
         <p:nvSpPr>
-          <p:cNvPr id="7" name="TextBox 6"/>
+          <p:cNvPr id="8" name="TextBox 7"/>
           <p:cNvSpPr txBox="1"/>
           <p:nvPr/>
         </p:nvSpPr>
         <p:spPr>
           <a:xfrm>
             <a:off x="1691640" y="2185416"/>
-            <a:ext cx="9418320" cy="841248"/>
+            <a:ext cx="7132320" cy="841248"/>
           </a:xfrm>
           <a:prstGeom prst="rect">
             <a:avLst/>
@@ -10019,14 +10167,14 @@
       </p:sp>
       <p:sp>
         <p:nvSpPr>
-          <p:cNvPr id="8" name="Rounded Rectangle 7"/>
+          <p:cNvPr id="9" name="Rounded Rectangle 8"/>
           <p:cNvSpPr/>
           <p:nvPr/>
         </p:nvSpPr>
         <p:spPr>
           <a:xfrm>
             <a:off x="822960" y="3008376"/>
-            <a:ext cx="10515600" cy="841248"/>
+            <a:ext cx="8229600" cy="841248"/>
           </a:xfrm>
           <a:prstGeom prst="roundRect">
             <a:avLst>
@@ -10065,7 +10213,7 @@
       </p:sp>
       <p:sp>
         <p:nvSpPr>
-          <p:cNvPr id="9" name="Oval 8"/>
+          <p:cNvPr id="10" name="Oval 9"/>
           <p:cNvSpPr/>
           <p:nvPr/>
         </p:nvSpPr>
@@ -10117,7 +10265,7 @@
       </p:sp>
       <p:sp>
         <p:nvSpPr>
-          <p:cNvPr id="10" name="TextBox 9"/>
+          <p:cNvPr id="11" name="TextBox 10"/>
           <p:cNvSpPr txBox="1"/>
           <p:nvPr/>
         </p:nvSpPr>
@@ -10155,14 +10303,14 @@
       </p:sp>
       <p:sp>
         <p:nvSpPr>
-          <p:cNvPr id="11" name="TextBox 10"/>
+          <p:cNvPr id="12" name="TextBox 11"/>
           <p:cNvSpPr txBox="1"/>
           <p:nvPr/>
         </p:nvSpPr>
         <p:spPr>
           <a:xfrm>
             <a:off x="1691640" y="3227832"/>
-            <a:ext cx="9418320" cy="841248"/>
+            <a:ext cx="7132320" cy="841248"/>
           </a:xfrm>
           <a:prstGeom prst="rect">
             <a:avLst/>
@@ -10193,14 +10341,14 @@
       </p:sp>
       <p:sp>
         <p:nvSpPr>
-          <p:cNvPr id="12" name="Rounded Rectangle 11"/>
+          <p:cNvPr id="13" name="Rounded Rectangle 12"/>
           <p:cNvSpPr/>
           <p:nvPr/>
         </p:nvSpPr>
         <p:spPr>
           <a:xfrm>
             <a:off x="822960" y="4050792"/>
-            <a:ext cx="10515600" cy="841248"/>
+            <a:ext cx="8229600" cy="841248"/>
           </a:xfrm>
           <a:prstGeom prst="roundRect">
             <a:avLst>
@@ -10239,7 +10387,7 @@
       </p:sp>
       <p:sp>
         <p:nvSpPr>
-          <p:cNvPr id="13" name="Oval 12"/>
+          <p:cNvPr id="14" name="Oval 13"/>
           <p:cNvSpPr/>
           <p:nvPr/>
         </p:nvSpPr>
@@ -10291,7 +10439,7 @@
       </p:sp>
       <p:sp>
         <p:nvSpPr>
-          <p:cNvPr id="14" name="TextBox 13"/>
+          <p:cNvPr id="15" name="TextBox 14"/>
           <p:cNvSpPr txBox="1"/>
           <p:nvPr/>
         </p:nvSpPr>
@@ -10329,14 +10477,14 @@
       </p:sp>
       <p:sp>
         <p:nvSpPr>
-          <p:cNvPr id="15" name="TextBox 14"/>
+          <p:cNvPr id="16" name="TextBox 15"/>
           <p:cNvSpPr txBox="1"/>
           <p:nvPr/>
         </p:nvSpPr>
         <p:spPr>
           <a:xfrm>
             <a:off x="1691640" y="4270248"/>
-            <a:ext cx="9418320" cy="841248"/>
+            <a:ext cx="7132320" cy="841248"/>
           </a:xfrm>
           <a:prstGeom prst="rect">
             <a:avLst/>
@@ -10367,14 +10515,14 @@
       </p:sp>
       <p:sp>
         <p:nvSpPr>
-          <p:cNvPr id="16" name="Rounded Rectangle 15"/>
+          <p:cNvPr id="17" name="Rounded Rectangle 16"/>
           <p:cNvSpPr/>
           <p:nvPr/>
         </p:nvSpPr>
         <p:spPr>
           <a:xfrm>
             <a:off x="822960" y="5093208"/>
-            <a:ext cx="10515600" cy="841248"/>
+            <a:ext cx="8229600" cy="841248"/>
           </a:xfrm>
           <a:prstGeom prst="roundRect">
             <a:avLst>
@@ -10413,7 +10561,7 @@
       </p:sp>
       <p:sp>
         <p:nvSpPr>
-          <p:cNvPr id="17" name="Oval 16"/>
+          <p:cNvPr id="18" name="Oval 17"/>
           <p:cNvSpPr/>
           <p:nvPr/>
         </p:nvSpPr>
@@ -10465,7 +10613,7 @@
       </p:sp>
       <p:sp>
         <p:nvSpPr>
-          <p:cNvPr id="18" name="TextBox 17"/>
+          <p:cNvPr id="19" name="TextBox 18"/>
           <p:cNvSpPr txBox="1"/>
           <p:nvPr/>
         </p:nvSpPr>
@@ -10503,14 +10651,14 @@
       </p:sp>
       <p:sp>
         <p:nvSpPr>
-          <p:cNvPr id="19" name="TextBox 18"/>
+          <p:cNvPr id="20" name="TextBox 19"/>
           <p:cNvSpPr txBox="1"/>
           <p:nvPr/>
         </p:nvSpPr>
         <p:spPr>
           <a:xfrm>
             <a:off x="1691640" y="5312664"/>
-            <a:ext cx="9418320" cy="841248"/>
+            <a:ext cx="7132320" cy="841248"/>
           </a:xfrm>
           <a:prstGeom prst="rect">
             <a:avLst/>
@@ -10541,7 +10689,7 @@
       </p:sp>
       <p:sp>
         <p:nvSpPr>
-          <p:cNvPr id="20" name="TextBox 19"/>
+          <p:cNvPr id="21" name="TextBox 20"/>
           <p:cNvSpPr txBox="1"/>
           <p:nvPr/>
         </p:nvSpPr>
@@ -10579,7 +10727,7 @@
       </p:sp>
       <p:sp>
         <p:nvSpPr>
-          <p:cNvPr id="21" name="TextBox 20"/>
+          <p:cNvPr id="22" name="TextBox 21"/>
           <p:cNvSpPr txBox="1"/>
           <p:nvPr/>
         </p:nvSpPr>
@@ -10620,6 +10768,18 @@
   <p:clrMapOvr>
     <a:masterClrMapping/>
   </p:clrMapOvr>
+  <mc:AlternateContent xmlns:mc="http://schemas.openxmlformats.org/markup-compatibility/2006">
+    <mc:Choice xmlns:p14="http://schemas.microsoft.com/office/powerpoint/2010/main" Requires="p14">
+      <p:transition spd="slow" p14:dur="600">
+        <p:fade/>
+      </p:transition>
+    </mc:Choice>
+    <mc:Fallback>
+      <p:transition spd="slow">
+        <p:fade/>
+      </p:transition>
+    </mc:Fallback>
+  </mc:AlternateContent>
 </p:sld>
 </file>
 
@@ -10641,9 +10801,33 @@
         <p:nvPr/>
       </p:nvGrpSpPr>
       <p:grpSpPr/>
-      <p:sp>
-        <p:nvSpPr>
-          <p:cNvPr id="2" name="Rounded Rectangle 1"/>
+      <p:pic>
+        <p:nvPicPr>
+          <p:cNvPr id="2" name="Picture 1" descr="s2.png"/>
+          <p:cNvPicPr>
+            <a:picLocks noChangeAspect="1"/>
+          </p:cNvPicPr>
+          <p:nvPr/>
+        </p:nvPicPr>
+        <p:blipFill>
+          <a:blip r:embed="rId2"/>
+          <a:stretch>
+            <a:fillRect/>
+          </a:stretch>
+        </p:blipFill>
+        <p:spPr>
+          <a:xfrm>
+            <a:off x="9418320" y="3657600"/>
+            <a:ext cx="4023360" cy="4023360"/>
+          </a:xfrm>
+          <a:prstGeom prst="rect">
+            <a:avLst/>
+          </a:prstGeom>
+        </p:spPr>
+      </p:pic>
+      <p:sp>
+        <p:nvSpPr>
+          <p:cNvPr id="3" name="Rounded Rectangle 2"/>
           <p:cNvSpPr/>
           <p:nvPr/>
         </p:nvSpPr>
@@ -10697,7 +10881,7 @@
       </p:sp>
       <p:sp>
         <p:nvSpPr>
-          <p:cNvPr id="3" name="TextBox 2"/>
+          <p:cNvPr id="4" name="TextBox 3"/>
           <p:cNvSpPr txBox="1"/>
           <p:nvPr/>
         </p:nvSpPr>
@@ -10735,14 +10919,14 @@
       </p:sp>
       <p:sp>
         <p:nvSpPr>
-          <p:cNvPr id="4" name="Rounded Rectangle 3"/>
+          <p:cNvPr id="5" name="Rounded Rectangle 4"/>
           <p:cNvSpPr/>
           <p:nvPr/>
         </p:nvSpPr>
         <p:spPr>
           <a:xfrm>
             <a:off x="822960" y="1965960"/>
-            <a:ext cx="10515600" cy="841248"/>
+            <a:ext cx="8229600" cy="841248"/>
           </a:xfrm>
           <a:prstGeom prst="roundRect">
             <a:avLst>
@@ -10781,7 +10965,7 @@
       </p:sp>
       <p:sp>
         <p:nvSpPr>
-          <p:cNvPr id="5" name="Oval 4"/>
+          <p:cNvPr id="6" name="Oval 5"/>
           <p:cNvSpPr/>
           <p:nvPr/>
         </p:nvSpPr>
@@ -10833,7 +11017,7 @@
       </p:sp>
       <p:sp>
         <p:nvSpPr>
-          <p:cNvPr id="6" name="TextBox 5"/>
+          <p:cNvPr id="7" name="TextBox 6"/>
           <p:cNvSpPr txBox="1"/>
           <p:nvPr/>
         </p:nvSpPr>
@@ -10871,14 +11055,14 @@
       </p:sp>
       <p:sp>
         <p:nvSpPr>
-          <p:cNvPr id="7" name="TextBox 6"/>
+          <p:cNvPr id="8" name="TextBox 7"/>
           <p:cNvSpPr txBox="1"/>
           <p:nvPr/>
         </p:nvSpPr>
         <p:spPr>
           <a:xfrm>
             <a:off x="1691640" y="2185416"/>
-            <a:ext cx="9418320" cy="841248"/>
+            <a:ext cx="7132320" cy="841248"/>
           </a:xfrm>
           <a:prstGeom prst="rect">
             <a:avLst/>
@@ -10909,14 +11093,14 @@
       </p:sp>
       <p:sp>
         <p:nvSpPr>
-          <p:cNvPr id="8" name="Rounded Rectangle 7"/>
+          <p:cNvPr id="9" name="Rounded Rectangle 8"/>
           <p:cNvSpPr/>
           <p:nvPr/>
         </p:nvSpPr>
         <p:spPr>
           <a:xfrm>
             <a:off x="822960" y="3008376"/>
-            <a:ext cx="10515600" cy="841248"/>
+            <a:ext cx="8229600" cy="841248"/>
           </a:xfrm>
           <a:prstGeom prst="roundRect">
             <a:avLst>
@@ -10955,7 +11139,7 @@
       </p:sp>
       <p:sp>
         <p:nvSpPr>
-          <p:cNvPr id="9" name="Oval 8"/>
+          <p:cNvPr id="10" name="Oval 9"/>
           <p:cNvSpPr/>
           <p:nvPr/>
         </p:nvSpPr>
@@ -11007,7 +11191,7 @@
       </p:sp>
       <p:sp>
         <p:nvSpPr>
-          <p:cNvPr id="10" name="TextBox 9"/>
+          <p:cNvPr id="11" name="TextBox 10"/>
           <p:cNvSpPr txBox="1"/>
           <p:nvPr/>
         </p:nvSpPr>
@@ -11045,14 +11229,14 @@
       </p:sp>
       <p:sp>
         <p:nvSpPr>
-          <p:cNvPr id="11" name="TextBox 10"/>
+          <p:cNvPr id="12" name="TextBox 11"/>
           <p:cNvSpPr txBox="1"/>
           <p:nvPr/>
         </p:nvSpPr>
         <p:spPr>
           <a:xfrm>
             <a:off x="1691640" y="3227832"/>
-            <a:ext cx="9418320" cy="841248"/>
+            <a:ext cx="7132320" cy="841248"/>
           </a:xfrm>
           <a:prstGeom prst="rect">
             <a:avLst/>
@@ -11083,14 +11267,14 @@
       </p:sp>
       <p:sp>
         <p:nvSpPr>
-          <p:cNvPr id="12" name="Rounded Rectangle 11"/>
+          <p:cNvPr id="13" name="Rounded Rectangle 12"/>
           <p:cNvSpPr/>
           <p:nvPr/>
         </p:nvSpPr>
         <p:spPr>
           <a:xfrm>
             <a:off x="822960" y="4050792"/>
-            <a:ext cx="10515600" cy="841248"/>
+            <a:ext cx="8229600" cy="841248"/>
           </a:xfrm>
           <a:prstGeom prst="roundRect">
             <a:avLst>
@@ -11129,7 +11313,7 @@
       </p:sp>
       <p:sp>
         <p:nvSpPr>
-          <p:cNvPr id="13" name="Oval 12"/>
+          <p:cNvPr id="14" name="Oval 13"/>
           <p:cNvSpPr/>
           <p:nvPr/>
         </p:nvSpPr>
@@ -11181,7 +11365,7 @@
       </p:sp>
       <p:sp>
         <p:nvSpPr>
-          <p:cNvPr id="14" name="TextBox 13"/>
+          <p:cNvPr id="15" name="TextBox 14"/>
           <p:cNvSpPr txBox="1"/>
           <p:nvPr/>
         </p:nvSpPr>
@@ -11219,14 +11403,14 @@
       </p:sp>
       <p:sp>
         <p:nvSpPr>
-          <p:cNvPr id="15" name="TextBox 14"/>
+          <p:cNvPr id="16" name="TextBox 15"/>
           <p:cNvSpPr txBox="1"/>
           <p:nvPr/>
         </p:nvSpPr>
         <p:spPr>
           <a:xfrm>
             <a:off x="1691640" y="4270248"/>
-            <a:ext cx="9418320" cy="841248"/>
+            <a:ext cx="7132320" cy="841248"/>
           </a:xfrm>
           <a:prstGeom prst="rect">
             <a:avLst/>
@@ -11257,14 +11441,14 @@
       </p:sp>
       <p:sp>
         <p:nvSpPr>
-          <p:cNvPr id="16" name="Rounded Rectangle 15"/>
+          <p:cNvPr id="17" name="Rounded Rectangle 16"/>
           <p:cNvSpPr/>
           <p:nvPr/>
         </p:nvSpPr>
         <p:spPr>
           <a:xfrm>
             <a:off x="822960" y="5093208"/>
-            <a:ext cx="10515600" cy="841248"/>
+            <a:ext cx="8229600" cy="841248"/>
           </a:xfrm>
           <a:prstGeom prst="roundRect">
             <a:avLst>
@@ -11303,7 +11487,7 @@
       </p:sp>
       <p:sp>
         <p:nvSpPr>
-          <p:cNvPr id="17" name="Oval 16"/>
+          <p:cNvPr id="18" name="Oval 17"/>
           <p:cNvSpPr/>
           <p:nvPr/>
         </p:nvSpPr>
@@ -11355,7 +11539,7 @@
       </p:sp>
       <p:sp>
         <p:nvSpPr>
-          <p:cNvPr id="18" name="TextBox 17"/>
+          <p:cNvPr id="19" name="TextBox 18"/>
           <p:cNvSpPr txBox="1"/>
           <p:nvPr/>
         </p:nvSpPr>
@@ -11393,14 +11577,14 @@
       </p:sp>
       <p:sp>
         <p:nvSpPr>
-          <p:cNvPr id="19" name="TextBox 18"/>
+          <p:cNvPr id="20" name="TextBox 19"/>
           <p:cNvSpPr txBox="1"/>
           <p:nvPr/>
         </p:nvSpPr>
         <p:spPr>
           <a:xfrm>
             <a:off x="1691640" y="5312664"/>
-            <a:ext cx="9418320" cy="841248"/>
+            <a:ext cx="7132320" cy="841248"/>
           </a:xfrm>
           <a:prstGeom prst="rect">
             <a:avLst/>
@@ -11431,7 +11615,7 @@
       </p:sp>
       <p:sp>
         <p:nvSpPr>
-          <p:cNvPr id="20" name="TextBox 19"/>
+          <p:cNvPr id="21" name="TextBox 20"/>
           <p:cNvSpPr txBox="1"/>
           <p:nvPr/>
         </p:nvSpPr>
@@ -11469,7 +11653,7 @@
       </p:sp>
       <p:sp>
         <p:nvSpPr>
-          <p:cNvPr id="21" name="TextBox 20"/>
+          <p:cNvPr id="22" name="TextBox 21"/>
           <p:cNvSpPr txBox="1"/>
           <p:nvPr/>
         </p:nvSpPr>
@@ -11510,6 +11694,18 @@
   <p:clrMapOvr>
     <a:masterClrMapping/>
   </p:clrMapOvr>
+  <mc:AlternateContent xmlns:mc="http://schemas.openxmlformats.org/markup-compatibility/2006">
+    <mc:Choice xmlns:p14="http://schemas.microsoft.com/office/powerpoint/2010/main" Requires="p14">
+      <p:transition spd="slow" p14:dur="600">
+        <p:fade/>
+      </p:transition>
+    </mc:Choice>
+    <mc:Fallback>
+      <p:transition spd="slow">
+        <p:fade/>
+      </p:transition>
+    </mc:Fallback>
+  </mc:AlternateContent>
 </p:sld>
 </file>
 
@@ -11531,9 +11727,33 @@
         <p:nvPr/>
       </p:nvGrpSpPr>
       <p:grpSpPr/>
-      <p:sp>
-        <p:nvSpPr>
-          <p:cNvPr id="2" name="Rounded Rectangle 1"/>
+      <p:pic>
+        <p:nvPicPr>
+          <p:cNvPr id="2" name="Picture 1" descr="cover.png"/>
+          <p:cNvPicPr>
+            <a:picLocks noChangeAspect="1"/>
+          </p:cNvPicPr>
+          <p:nvPr/>
+        </p:nvPicPr>
+        <p:blipFill>
+          <a:blip r:embed="rId2"/>
+          <a:stretch>
+            <a:fillRect/>
+          </a:stretch>
+        </p:blipFill>
+        <p:spPr>
+          <a:xfrm>
+            <a:off x="9418320" y="3657600"/>
+            <a:ext cx="4023360" cy="4023360"/>
+          </a:xfrm>
+          <a:prstGeom prst="rect">
+            <a:avLst/>
+          </a:prstGeom>
+        </p:spPr>
+      </p:pic>
+      <p:sp>
+        <p:nvSpPr>
+          <p:cNvPr id="3" name="Rounded Rectangle 2"/>
           <p:cNvSpPr/>
           <p:nvPr/>
         </p:nvSpPr>
@@ -11587,7 +11807,7 @@
       </p:sp>
       <p:sp>
         <p:nvSpPr>
-          <p:cNvPr id="3" name="TextBox 2"/>
+          <p:cNvPr id="4" name="TextBox 3"/>
           <p:cNvSpPr txBox="1"/>
           <p:nvPr/>
         </p:nvSpPr>
@@ -11625,14 +11845,14 @@
       </p:sp>
       <p:sp>
         <p:nvSpPr>
-          <p:cNvPr id="4" name="Rounded Rectangle 3"/>
+          <p:cNvPr id="5" name="Rounded Rectangle 4"/>
           <p:cNvSpPr/>
           <p:nvPr/>
         </p:nvSpPr>
         <p:spPr>
           <a:xfrm>
             <a:off x="822960" y="1965960"/>
-            <a:ext cx="10515600" cy="841248"/>
+            <a:ext cx="8229600" cy="841248"/>
           </a:xfrm>
           <a:prstGeom prst="roundRect">
             <a:avLst>
@@ -11671,7 +11891,7 @@
       </p:sp>
       <p:sp>
         <p:nvSpPr>
-          <p:cNvPr id="5" name="Oval 4"/>
+          <p:cNvPr id="6" name="Oval 5"/>
           <p:cNvSpPr/>
           <p:nvPr/>
         </p:nvSpPr>
@@ -11723,7 +11943,7 @@
       </p:sp>
       <p:sp>
         <p:nvSpPr>
-          <p:cNvPr id="6" name="TextBox 5"/>
+          <p:cNvPr id="7" name="TextBox 6"/>
           <p:cNvSpPr txBox="1"/>
           <p:nvPr/>
         </p:nvSpPr>
@@ -11761,14 +11981,14 @@
       </p:sp>
       <p:sp>
         <p:nvSpPr>
-          <p:cNvPr id="7" name="TextBox 6"/>
+          <p:cNvPr id="8" name="TextBox 7"/>
           <p:cNvSpPr txBox="1"/>
           <p:nvPr/>
         </p:nvSpPr>
         <p:spPr>
           <a:xfrm>
             <a:off x="1691640" y="2185416"/>
-            <a:ext cx="9418320" cy="841248"/>
+            <a:ext cx="7132320" cy="841248"/>
           </a:xfrm>
           <a:prstGeom prst="rect">
             <a:avLst/>
@@ -11799,14 +12019,14 @@
       </p:sp>
       <p:sp>
         <p:nvSpPr>
-          <p:cNvPr id="8" name="Rounded Rectangle 7"/>
+          <p:cNvPr id="9" name="Rounded Rectangle 8"/>
           <p:cNvSpPr/>
           <p:nvPr/>
         </p:nvSpPr>
         <p:spPr>
           <a:xfrm>
             <a:off x="822960" y="3008376"/>
-            <a:ext cx="10515600" cy="841248"/>
+            <a:ext cx="8229600" cy="841248"/>
           </a:xfrm>
           <a:prstGeom prst="roundRect">
             <a:avLst>
@@ -11845,7 +12065,7 @@
       </p:sp>
       <p:sp>
         <p:nvSpPr>
-          <p:cNvPr id="9" name="Oval 8"/>
+          <p:cNvPr id="10" name="Oval 9"/>
           <p:cNvSpPr/>
           <p:nvPr/>
         </p:nvSpPr>
@@ -11897,7 +12117,7 @@
       </p:sp>
       <p:sp>
         <p:nvSpPr>
-          <p:cNvPr id="10" name="TextBox 9"/>
+          <p:cNvPr id="11" name="TextBox 10"/>
           <p:cNvSpPr txBox="1"/>
           <p:nvPr/>
         </p:nvSpPr>
@@ -11935,14 +12155,14 @@
       </p:sp>
       <p:sp>
         <p:nvSpPr>
-          <p:cNvPr id="11" name="TextBox 10"/>
+          <p:cNvPr id="12" name="TextBox 11"/>
           <p:cNvSpPr txBox="1"/>
           <p:nvPr/>
         </p:nvSpPr>
         <p:spPr>
           <a:xfrm>
             <a:off x="1691640" y="3227832"/>
-            <a:ext cx="9418320" cy="841248"/>
+            <a:ext cx="7132320" cy="841248"/>
           </a:xfrm>
           <a:prstGeom prst="rect">
             <a:avLst/>
@@ -11973,14 +12193,14 @@
       </p:sp>
       <p:sp>
         <p:nvSpPr>
-          <p:cNvPr id="12" name="Rounded Rectangle 11"/>
+          <p:cNvPr id="13" name="Rounded Rectangle 12"/>
           <p:cNvSpPr/>
           <p:nvPr/>
         </p:nvSpPr>
         <p:spPr>
           <a:xfrm>
             <a:off x="822960" y="4050792"/>
-            <a:ext cx="10515600" cy="841248"/>
+            <a:ext cx="8229600" cy="841248"/>
           </a:xfrm>
           <a:prstGeom prst="roundRect">
             <a:avLst>
@@ -12019,7 +12239,7 @@
       </p:sp>
       <p:sp>
         <p:nvSpPr>
-          <p:cNvPr id="13" name="Oval 12"/>
+          <p:cNvPr id="14" name="Oval 13"/>
           <p:cNvSpPr/>
           <p:nvPr/>
         </p:nvSpPr>
@@ -12071,7 +12291,7 @@
       </p:sp>
       <p:sp>
         <p:nvSpPr>
-          <p:cNvPr id="14" name="TextBox 13"/>
+          <p:cNvPr id="15" name="TextBox 14"/>
           <p:cNvSpPr txBox="1"/>
           <p:nvPr/>
         </p:nvSpPr>
@@ -12109,14 +12329,14 @@
       </p:sp>
       <p:sp>
         <p:nvSpPr>
-          <p:cNvPr id="15" name="TextBox 14"/>
+          <p:cNvPr id="16" name="TextBox 15"/>
           <p:cNvSpPr txBox="1"/>
           <p:nvPr/>
         </p:nvSpPr>
         <p:spPr>
           <a:xfrm>
             <a:off x="1691640" y="4270248"/>
-            <a:ext cx="9418320" cy="841248"/>
+            <a:ext cx="7132320" cy="841248"/>
           </a:xfrm>
           <a:prstGeom prst="rect">
             <a:avLst/>
@@ -12147,14 +12367,14 @@
       </p:sp>
       <p:sp>
         <p:nvSpPr>
-          <p:cNvPr id="16" name="Rounded Rectangle 15"/>
+          <p:cNvPr id="17" name="Rounded Rectangle 16"/>
           <p:cNvSpPr/>
           <p:nvPr/>
         </p:nvSpPr>
         <p:spPr>
           <a:xfrm>
             <a:off x="822960" y="5093208"/>
-            <a:ext cx="10515600" cy="841248"/>
+            <a:ext cx="8229600" cy="841248"/>
           </a:xfrm>
           <a:prstGeom prst="roundRect">
             <a:avLst>
@@ -12193,7 +12413,7 @@
       </p:sp>
       <p:sp>
         <p:nvSpPr>
-          <p:cNvPr id="17" name="Oval 16"/>
+          <p:cNvPr id="18" name="Oval 17"/>
           <p:cNvSpPr/>
           <p:nvPr/>
         </p:nvSpPr>
@@ -12245,7 +12465,7 @@
       </p:sp>
       <p:sp>
         <p:nvSpPr>
-          <p:cNvPr id="18" name="TextBox 17"/>
+          <p:cNvPr id="19" name="TextBox 18"/>
           <p:cNvSpPr txBox="1"/>
           <p:nvPr/>
         </p:nvSpPr>
@@ -12283,14 +12503,14 @@
       </p:sp>
       <p:sp>
         <p:nvSpPr>
-          <p:cNvPr id="19" name="TextBox 18"/>
+          <p:cNvPr id="20" name="TextBox 19"/>
           <p:cNvSpPr txBox="1"/>
           <p:nvPr/>
         </p:nvSpPr>
         <p:spPr>
           <a:xfrm>
             <a:off x="1691640" y="5312664"/>
-            <a:ext cx="9418320" cy="841248"/>
+            <a:ext cx="7132320" cy="841248"/>
           </a:xfrm>
           <a:prstGeom prst="rect">
             <a:avLst/>
@@ -12321,7 +12541,7 @@
       </p:sp>
       <p:sp>
         <p:nvSpPr>
-          <p:cNvPr id="20" name="TextBox 19"/>
+          <p:cNvPr id="21" name="TextBox 20"/>
           <p:cNvSpPr txBox="1"/>
           <p:nvPr/>
         </p:nvSpPr>
@@ -12359,7 +12579,7 @@
       </p:sp>
       <p:sp>
         <p:nvSpPr>
-          <p:cNvPr id="21" name="TextBox 20"/>
+          <p:cNvPr id="22" name="TextBox 21"/>
           <p:cNvSpPr txBox="1"/>
           <p:nvPr/>
         </p:nvSpPr>
@@ -12400,6 +12620,18 @@
   <p:clrMapOvr>
     <a:masterClrMapping/>
   </p:clrMapOvr>
+  <mc:AlternateContent xmlns:mc="http://schemas.openxmlformats.org/markup-compatibility/2006">
+    <mc:Choice xmlns:p14="http://schemas.microsoft.com/office/powerpoint/2010/main" Requires="p14">
+      <p:transition spd="slow" p14:dur="600">
+        <p:fade/>
+      </p:transition>
+    </mc:Choice>
+    <mc:Fallback>
+      <p:transition spd="slow">
+        <p:fade/>
+      </p:transition>
+    </mc:Fallback>
+  </mc:AlternateContent>
 </p:sld>
 </file>
 
@@ -12421,9 +12653,33 @@
         <p:nvPr/>
       </p:nvGrpSpPr>
       <p:grpSpPr/>
-      <p:sp>
-        <p:nvSpPr>
-          <p:cNvPr id="2" name="Rounded Rectangle 1"/>
+      <p:pic>
+        <p:nvPicPr>
+          <p:cNvPr id="2" name="Picture 1" descr="s2.png"/>
+          <p:cNvPicPr>
+            <a:picLocks noChangeAspect="1"/>
+          </p:cNvPicPr>
+          <p:nvPr/>
+        </p:nvPicPr>
+        <p:blipFill>
+          <a:blip r:embed="rId2"/>
+          <a:stretch>
+            <a:fillRect/>
+          </a:stretch>
+        </p:blipFill>
+        <p:spPr>
+          <a:xfrm>
+            <a:off x="9418320" y="3657600"/>
+            <a:ext cx="4023360" cy="4023360"/>
+          </a:xfrm>
+          <a:prstGeom prst="rect">
+            <a:avLst/>
+          </a:prstGeom>
+        </p:spPr>
+      </p:pic>
+      <p:sp>
+        <p:nvSpPr>
+          <p:cNvPr id="3" name="Rounded Rectangle 2"/>
           <p:cNvSpPr/>
           <p:nvPr/>
         </p:nvSpPr>
@@ -12477,7 +12733,7 @@
       </p:sp>
       <p:sp>
         <p:nvSpPr>
-          <p:cNvPr id="3" name="TextBox 2"/>
+          <p:cNvPr id="4" name="TextBox 3"/>
           <p:cNvSpPr txBox="1"/>
           <p:nvPr/>
         </p:nvSpPr>
@@ -12515,14 +12771,14 @@
       </p:sp>
       <p:sp>
         <p:nvSpPr>
-          <p:cNvPr id="4" name="Rounded Rectangle 3"/>
+          <p:cNvPr id="5" name="Rounded Rectangle 4"/>
           <p:cNvSpPr/>
           <p:nvPr/>
         </p:nvSpPr>
         <p:spPr>
           <a:xfrm>
             <a:off x="822960" y="1965960"/>
-            <a:ext cx="10515600" cy="841248"/>
+            <a:ext cx="8229600" cy="841248"/>
           </a:xfrm>
           <a:prstGeom prst="roundRect">
             <a:avLst>
@@ -12561,7 +12817,7 @@
       </p:sp>
       <p:sp>
         <p:nvSpPr>
-          <p:cNvPr id="5" name="Oval 4"/>
+          <p:cNvPr id="6" name="Oval 5"/>
           <p:cNvSpPr/>
           <p:nvPr/>
         </p:nvSpPr>
@@ -12613,7 +12869,7 @@
       </p:sp>
       <p:sp>
         <p:nvSpPr>
-          <p:cNvPr id="6" name="TextBox 5"/>
+          <p:cNvPr id="7" name="TextBox 6"/>
           <p:cNvSpPr txBox="1"/>
           <p:nvPr/>
         </p:nvSpPr>
@@ -12651,14 +12907,14 @@
       </p:sp>
       <p:sp>
         <p:nvSpPr>
-          <p:cNvPr id="7" name="TextBox 6"/>
+          <p:cNvPr id="8" name="TextBox 7"/>
           <p:cNvSpPr txBox="1"/>
           <p:nvPr/>
         </p:nvSpPr>
         <p:spPr>
           <a:xfrm>
             <a:off x="1691640" y="2185416"/>
-            <a:ext cx="9418320" cy="841248"/>
+            <a:ext cx="7132320" cy="841248"/>
           </a:xfrm>
           <a:prstGeom prst="rect">
             <a:avLst/>
@@ -12689,14 +12945,14 @@
       </p:sp>
       <p:sp>
         <p:nvSpPr>
-          <p:cNvPr id="8" name="Rounded Rectangle 7"/>
+          <p:cNvPr id="9" name="Rounded Rectangle 8"/>
           <p:cNvSpPr/>
           <p:nvPr/>
         </p:nvSpPr>
         <p:spPr>
           <a:xfrm>
             <a:off x="822960" y="3008376"/>
-            <a:ext cx="10515600" cy="841248"/>
+            <a:ext cx="8229600" cy="841248"/>
           </a:xfrm>
           <a:prstGeom prst="roundRect">
             <a:avLst>
@@ -12735,7 +12991,7 @@
       </p:sp>
       <p:sp>
         <p:nvSpPr>
-          <p:cNvPr id="9" name="Oval 8"/>
+          <p:cNvPr id="10" name="Oval 9"/>
           <p:cNvSpPr/>
           <p:nvPr/>
         </p:nvSpPr>
@@ -12787,7 +13043,7 @@
       </p:sp>
       <p:sp>
         <p:nvSpPr>
-          <p:cNvPr id="10" name="TextBox 9"/>
+          <p:cNvPr id="11" name="TextBox 10"/>
           <p:cNvSpPr txBox="1"/>
           <p:nvPr/>
         </p:nvSpPr>
@@ -12825,14 +13081,14 @@
       </p:sp>
       <p:sp>
         <p:nvSpPr>
-          <p:cNvPr id="11" name="TextBox 10"/>
+          <p:cNvPr id="12" name="TextBox 11"/>
           <p:cNvSpPr txBox="1"/>
           <p:nvPr/>
         </p:nvSpPr>
         <p:spPr>
           <a:xfrm>
             <a:off x="1691640" y="3227832"/>
-            <a:ext cx="9418320" cy="841248"/>
+            <a:ext cx="7132320" cy="841248"/>
           </a:xfrm>
           <a:prstGeom prst="rect">
             <a:avLst/>
@@ -12863,14 +13119,14 @@
       </p:sp>
       <p:sp>
         <p:nvSpPr>
-          <p:cNvPr id="12" name="Rounded Rectangle 11"/>
+          <p:cNvPr id="13" name="Rounded Rectangle 12"/>
           <p:cNvSpPr/>
           <p:nvPr/>
         </p:nvSpPr>
         <p:spPr>
           <a:xfrm>
             <a:off x="822960" y="4050792"/>
-            <a:ext cx="10515600" cy="841248"/>
+            <a:ext cx="8229600" cy="841248"/>
           </a:xfrm>
           <a:prstGeom prst="roundRect">
             <a:avLst>
@@ -12909,7 +13165,7 @@
       </p:sp>
       <p:sp>
         <p:nvSpPr>
-          <p:cNvPr id="13" name="Oval 12"/>
+          <p:cNvPr id="14" name="Oval 13"/>
           <p:cNvSpPr/>
           <p:nvPr/>
         </p:nvSpPr>
@@ -12961,7 +13217,7 @@
       </p:sp>
       <p:sp>
         <p:nvSpPr>
-          <p:cNvPr id="14" name="TextBox 13"/>
+          <p:cNvPr id="15" name="TextBox 14"/>
           <p:cNvSpPr txBox="1"/>
           <p:nvPr/>
         </p:nvSpPr>
@@ -12999,14 +13255,14 @@
       </p:sp>
       <p:sp>
         <p:nvSpPr>
-          <p:cNvPr id="15" name="TextBox 14"/>
+          <p:cNvPr id="16" name="TextBox 15"/>
           <p:cNvSpPr txBox="1"/>
           <p:nvPr/>
         </p:nvSpPr>
         <p:spPr>
           <a:xfrm>
             <a:off x="1691640" y="4270248"/>
-            <a:ext cx="9418320" cy="841248"/>
+            <a:ext cx="7132320" cy="841248"/>
           </a:xfrm>
           <a:prstGeom prst="rect">
             <a:avLst/>
@@ -13037,14 +13293,14 @@
       </p:sp>
       <p:sp>
         <p:nvSpPr>
-          <p:cNvPr id="16" name="Rounded Rectangle 15"/>
+          <p:cNvPr id="17" name="Rounded Rectangle 16"/>
           <p:cNvSpPr/>
           <p:nvPr/>
         </p:nvSpPr>
         <p:spPr>
           <a:xfrm>
             <a:off x="822960" y="5093208"/>
-            <a:ext cx="10515600" cy="841248"/>
+            <a:ext cx="8229600" cy="841248"/>
           </a:xfrm>
           <a:prstGeom prst="roundRect">
             <a:avLst>
@@ -13083,7 +13339,7 @@
       </p:sp>
       <p:sp>
         <p:nvSpPr>
-          <p:cNvPr id="17" name="Oval 16"/>
+          <p:cNvPr id="18" name="Oval 17"/>
           <p:cNvSpPr/>
           <p:nvPr/>
         </p:nvSpPr>
@@ -13135,7 +13391,7 @@
       </p:sp>
       <p:sp>
         <p:nvSpPr>
-          <p:cNvPr id="18" name="TextBox 17"/>
+          <p:cNvPr id="19" name="TextBox 18"/>
           <p:cNvSpPr txBox="1"/>
           <p:nvPr/>
         </p:nvSpPr>
@@ -13173,14 +13429,14 @@
       </p:sp>
       <p:sp>
         <p:nvSpPr>
-          <p:cNvPr id="19" name="TextBox 18"/>
+          <p:cNvPr id="20" name="TextBox 19"/>
           <p:cNvSpPr txBox="1"/>
           <p:nvPr/>
         </p:nvSpPr>
         <p:spPr>
           <a:xfrm>
             <a:off x="1691640" y="5312664"/>
-            <a:ext cx="9418320" cy="841248"/>
+            <a:ext cx="7132320" cy="841248"/>
           </a:xfrm>
           <a:prstGeom prst="rect">
             <a:avLst/>
@@ -13211,7 +13467,7 @@
       </p:sp>
       <p:sp>
         <p:nvSpPr>
-          <p:cNvPr id="20" name="TextBox 19"/>
+          <p:cNvPr id="21" name="TextBox 20"/>
           <p:cNvSpPr txBox="1"/>
           <p:nvPr/>
         </p:nvSpPr>
@@ -13249,7 +13505,7 @@
       </p:sp>
       <p:sp>
         <p:nvSpPr>
-          <p:cNvPr id="21" name="TextBox 20"/>
+          <p:cNvPr id="22" name="TextBox 21"/>
           <p:cNvSpPr txBox="1"/>
           <p:nvPr/>
         </p:nvSpPr>
@@ -13290,6 +13546,18 @@
   <p:clrMapOvr>
     <a:masterClrMapping/>
   </p:clrMapOvr>
+  <mc:AlternateContent xmlns:mc="http://schemas.openxmlformats.org/markup-compatibility/2006">
+    <mc:Choice xmlns:p14="http://schemas.microsoft.com/office/powerpoint/2010/main" Requires="p14">
+      <p:transition spd="slow" p14:dur="600">
+        <p:fade/>
+      </p:transition>
+    </mc:Choice>
+    <mc:Fallback>
+      <p:transition spd="slow">
+        <p:fade/>
+      </p:transition>
+    </mc:Fallback>
+  </mc:AlternateContent>
 </p:sld>
 </file>
 
@@ -13311,9 +13579,33 @@
         <p:nvPr/>
       </p:nvGrpSpPr>
       <p:grpSpPr/>
-      <p:sp>
-        <p:nvSpPr>
-          <p:cNvPr id="2" name="Rounded Rectangle 1"/>
+      <p:pic>
+        <p:nvPicPr>
+          <p:cNvPr id="2" name="Picture 1" descr="s2.png"/>
+          <p:cNvPicPr>
+            <a:picLocks noChangeAspect="1"/>
+          </p:cNvPicPr>
+          <p:nvPr/>
+        </p:nvPicPr>
+        <p:blipFill>
+          <a:blip r:embed="rId2"/>
+          <a:stretch>
+            <a:fillRect/>
+          </a:stretch>
+        </p:blipFill>
+        <p:spPr>
+          <a:xfrm>
+            <a:off x="9418320" y="3657600"/>
+            <a:ext cx="4023360" cy="4023360"/>
+          </a:xfrm>
+          <a:prstGeom prst="rect">
+            <a:avLst/>
+          </a:prstGeom>
+        </p:spPr>
+      </p:pic>
+      <p:sp>
+        <p:nvSpPr>
+          <p:cNvPr id="3" name="Rounded Rectangle 2"/>
           <p:cNvSpPr/>
           <p:nvPr/>
         </p:nvSpPr>
@@ -13367,7 +13659,7 @@
       </p:sp>
       <p:sp>
         <p:nvSpPr>
-          <p:cNvPr id="3" name="TextBox 2"/>
+          <p:cNvPr id="4" name="TextBox 3"/>
           <p:cNvSpPr txBox="1"/>
           <p:nvPr/>
         </p:nvSpPr>
@@ -13405,14 +13697,14 @@
       </p:sp>
       <p:sp>
         <p:nvSpPr>
-          <p:cNvPr id="4" name="Rounded Rectangle 3"/>
+          <p:cNvPr id="5" name="Rounded Rectangle 4"/>
           <p:cNvSpPr/>
           <p:nvPr/>
         </p:nvSpPr>
         <p:spPr>
           <a:xfrm>
             <a:off x="822960" y="1965960"/>
-            <a:ext cx="10515600" cy="841248"/>
+            <a:ext cx="8229600" cy="841248"/>
           </a:xfrm>
           <a:prstGeom prst="roundRect">
             <a:avLst>
@@ -13451,7 +13743,7 @@
       </p:sp>
       <p:sp>
         <p:nvSpPr>
-          <p:cNvPr id="5" name="Oval 4"/>
+          <p:cNvPr id="6" name="Oval 5"/>
           <p:cNvSpPr/>
           <p:nvPr/>
         </p:nvSpPr>
@@ -13503,7 +13795,7 @@
       </p:sp>
       <p:sp>
         <p:nvSpPr>
-          <p:cNvPr id="6" name="TextBox 5"/>
+          <p:cNvPr id="7" name="TextBox 6"/>
           <p:cNvSpPr txBox="1"/>
           <p:nvPr/>
         </p:nvSpPr>
@@ -13541,14 +13833,14 @@
       </p:sp>
       <p:sp>
         <p:nvSpPr>
-          <p:cNvPr id="7" name="TextBox 6"/>
+          <p:cNvPr id="8" name="TextBox 7"/>
           <p:cNvSpPr txBox="1"/>
           <p:nvPr/>
         </p:nvSpPr>
         <p:spPr>
           <a:xfrm>
             <a:off x="1691640" y="2185416"/>
-            <a:ext cx="9418320" cy="841248"/>
+            <a:ext cx="7132320" cy="841248"/>
           </a:xfrm>
           <a:prstGeom prst="rect">
             <a:avLst/>
@@ -13579,14 +13871,14 @@
       </p:sp>
       <p:sp>
         <p:nvSpPr>
-          <p:cNvPr id="8" name="Rounded Rectangle 7"/>
+          <p:cNvPr id="9" name="Rounded Rectangle 8"/>
           <p:cNvSpPr/>
           <p:nvPr/>
         </p:nvSpPr>
         <p:spPr>
           <a:xfrm>
             <a:off x="822960" y="3008376"/>
-            <a:ext cx="10515600" cy="841248"/>
+            <a:ext cx="8229600" cy="841248"/>
           </a:xfrm>
           <a:prstGeom prst="roundRect">
             <a:avLst>
@@ -13625,7 +13917,7 @@
       </p:sp>
       <p:sp>
         <p:nvSpPr>
-          <p:cNvPr id="9" name="Oval 8"/>
+          <p:cNvPr id="10" name="Oval 9"/>
           <p:cNvSpPr/>
           <p:nvPr/>
         </p:nvSpPr>
@@ -13677,7 +13969,7 @@
       </p:sp>
       <p:sp>
         <p:nvSpPr>
-          <p:cNvPr id="10" name="TextBox 9"/>
+          <p:cNvPr id="11" name="TextBox 10"/>
           <p:cNvSpPr txBox="1"/>
           <p:nvPr/>
         </p:nvSpPr>
@@ -13715,14 +14007,14 @@
       </p:sp>
       <p:sp>
         <p:nvSpPr>
-          <p:cNvPr id="11" name="TextBox 10"/>
+          <p:cNvPr id="12" name="TextBox 11"/>
           <p:cNvSpPr txBox="1"/>
           <p:nvPr/>
         </p:nvSpPr>
         <p:spPr>
           <a:xfrm>
             <a:off x="1691640" y="3227832"/>
-            <a:ext cx="9418320" cy="841248"/>
+            <a:ext cx="7132320" cy="841248"/>
           </a:xfrm>
           <a:prstGeom prst="rect">
             <a:avLst/>
@@ -13753,14 +14045,14 @@
       </p:sp>
       <p:sp>
         <p:nvSpPr>
-          <p:cNvPr id="12" name="Rounded Rectangle 11"/>
+          <p:cNvPr id="13" name="Rounded Rectangle 12"/>
           <p:cNvSpPr/>
           <p:nvPr/>
         </p:nvSpPr>
         <p:spPr>
           <a:xfrm>
             <a:off x="822960" y="4050792"/>
-            <a:ext cx="10515600" cy="841248"/>
+            <a:ext cx="8229600" cy="841248"/>
           </a:xfrm>
           <a:prstGeom prst="roundRect">
             <a:avLst>
@@ -13799,7 +14091,7 @@
       </p:sp>
       <p:sp>
         <p:nvSpPr>
-          <p:cNvPr id="13" name="Oval 12"/>
+          <p:cNvPr id="14" name="Oval 13"/>
           <p:cNvSpPr/>
           <p:nvPr/>
         </p:nvSpPr>
@@ -13851,7 +14143,7 @@
       </p:sp>
       <p:sp>
         <p:nvSpPr>
-          <p:cNvPr id="14" name="TextBox 13"/>
+          <p:cNvPr id="15" name="TextBox 14"/>
           <p:cNvSpPr txBox="1"/>
           <p:nvPr/>
         </p:nvSpPr>
@@ -13889,14 +14181,14 @@
       </p:sp>
       <p:sp>
         <p:nvSpPr>
-          <p:cNvPr id="15" name="TextBox 14"/>
+          <p:cNvPr id="16" name="TextBox 15"/>
           <p:cNvSpPr txBox="1"/>
           <p:nvPr/>
         </p:nvSpPr>
         <p:spPr>
           <a:xfrm>
             <a:off x="1691640" y="4270248"/>
-            <a:ext cx="9418320" cy="841248"/>
+            <a:ext cx="7132320" cy="841248"/>
           </a:xfrm>
           <a:prstGeom prst="rect">
             <a:avLst/>
@@ -13927,14 +14219,14 @@
       </p:sp>
       <p:sp>
         <p:nvSpPr>
-          <p:cNvPr id="16" name="Rounded Rectangle 15"/>
+          <p:cNvPr id="17" name="Rounded Rectangle 16"/>
           <p:cNvSpPr/>
           <p:nvPr/>
         </p:nvSpPr>
         <p:spPr>
           <a:xfrm>
             <a:off x="822960" y="5093208"/>
-            <a:ext cx="10515600" cy="841248"/>
+            <a:ext cx="8229600" cy="841248"/>
           </a:xfrm>
           <a:prstGeom prst="roundRect">
             <a:avLst>
@@ -13973,7 +14265,7 @@
       </p:sp>
       <p:sp>
         <p:nvSpPr>
-          <p:cNvPr id="17" name="Oval 16"/>
+          <p:cNvPr id="18" name="Oval 17"/>
           <p:cNvSpPr/>
           <p:nvPr/>
         </p:nvSpPr>
@@ -14025,7 +14317,7 @@
       </p:sp>
       <p:sp>
         <p:nvSpPr>
-          <p:cNvPr id="18" name="TextBox 17"/>
+          <p:cNvPr id="19" name="TextBox 18"/>
           <p:cNvSpPr txBox="1"/>
           <p:nvPr/>
         </p:nvSpPr>
@@ -14063,14 +14355,14 @@
       </p:sp>
       <p:sp>
         <p:nvSpPr>
-          <p:cNvPr id="19" name="TextBox 18"/>
+          <p:cNvPr id="20" name="TextBox 19"/>
           <p:cNvSpPr txBox="1"/>
           <p:nvPr/>
         </p:nvSpPr>
         <p:spPr>
           <a:xfrm>
             <a:off x="1691640" y="5312664"/>
-            <a:ext cx="9418320" cy="841248"/>
+            <a:ext cx="7132320" cy="841248"/>
           </a:xfrm>
           <a:prstGeom prst="rect">
             <a:avLst/>
@@ -14101,7 +14393,7 @@
       </p:sp>
       <p:sp>
         <p:nvSpPr>
-          <p:cNvPr id="20" name="TextBox 19"/>
+          <p:cNvPr id="21" name="TextBox 20"/>
           <p:cNvSpPr txBox="1"/>
           <p:nvPr/>
         </p:nvSpPr>
@@ -14139,7 +14431,7 @@
       </p:sp>
       <p:sp>
         <p:nvSpPr>
-          <p:cNvPr id="21" name="TextBox 20"/>
+          <p:cNvPr id="22" name="TextBox 21"/>
           <p:cNvSpPr txBox="1"/>
           <p:nvPr/>
         </p:nvSpPr>
@@ -14180,6 +14472,18 @@
   <p:clrMapOvr>
     <a:masterClrMapping/>
   </p:clrMapOvr>
+  <mc:AlternateContent xmlns:mc="http://schemas.openxmlformats.org/markup-compatibility/2006">
+    <mc:Choice xmlns:p14="http://schemas.microsoft.com/office/powerpoint/2010/main" Requires="p14">
+      <p:transition spd="slow" p14:dur="600">
+        <p:fade/>
+      </p:transition>
+    </mc:Choice>
+    <mc:Fallback>
+      <p:transition spd="slow">
+        <p:fade/>
+      </p:transition>
+    </mc:Fallback>
+  </mc:AlternateContent>
 </p:sld>
 </file>
 
@@ -14710,6 +15014,18 @@
   <p:clrMapOvr>
     <a:masterClrMapping/>
   </p:clrMapOvr>
+  <mc:AlternateContent xmlns:mc="http://schemas.openxmlformats.org/markup-compatibility/2006">
+    <mc:Choice xmlns:p14="http://schemas.microsoft.com/office/powerpoint/2010/main" Requires="p14">
+      <p:transition spd="slow" p14:dur="600">
+        <p:fade/>
+      </p:transition>
+    </mc:Choice>
+    <mc:Fallback>
+      <p:transition spd="slow">
+        <p:fade/>
+      </p:transition>
+    </mc:Fallback>
+  </mc:AlternateContent>
 </p:sld>
 </file>
 
@@ -14731,9 +15047,33 @@
         <p:nvPr/>
       </p:nvGrpSpPr>
       <p:grpSpPr/>
-      <p:sp>
-        <p:nvSpPr>
-          <p:cNvPr id="2" name="Rounded Rectangle 1"/>
+      <p:pic>
+        <p:nvPicPr>
+          <p:cNvPr id="2" name="Picture 1" descr="s7.png"/>
+          <p:cNvPicPr>
+            <a:picLocks noChangeAspect="1"/>
+          </p:cNvPicPr>
+          <p:nvPr/>
+        </p:nvPicPr>
+        <p:blipFill>
+          <a:blip r:embed="rId2"/>
+          <a:stretch>
+            <a:fillRect/>
+          </a:stretch>
+        </p:blipFill>
+        <p:spPr>
+          <a:xfrm>
+            <a:off x="9418320" y="3657600"/>
+            <a:ext cx="4023360" cy="4023360"/>
+          </a:xfrm>
+          <a:prstGeom prst="rect">
+            <a:avLst/>
+          </a:prstGeom>
+        </p:spPr>
+      </p:pic>
+      <p:sp>
+        <p:nvSpPr>
+          <p:cNvPr id="3" name="Rounded Rectangle 2"/>
           <p:cNvSpPr/>
           <p:nvPr/>
         </p:nvSpPr>
@@ -14787,7 +15127,7 @@
       </p:sp>
       <p:sp>
         <p:nvSpPr>
-          <p:cNvPr id="3" name="TextBox 2"/>
+          <p:cNvPr id="4" name="TextBox 3"/>
           <p:cNvSpPr txBox="1"/>
           <p:nvPr/>
         </p:nvSpPr>
@@ -14825,14 +15165,14 @@
       </p:sp>
       <p:sp>
         <p:nvSpPr>
-          <p:cNvPr id="4" name="Rounded Rectangle 3"/>
+          <p:cNvPr id="5" name="Rounded Rectangle 4"/>
           <p:cNvSpPr/>
           <p:nvPr/>
         </p:nvSpPr>
         <p:spPr>
           <a:xfrm>
             <a:off x="822960" y="1965960"/>
-            <a:ext cx="10515600" cy="841248"/>
+            <a:ext cx="8229600" cy="841248"/>
           </a:xfrm>
           <a:prstGeom prst="roundRect">
             <a:avLst>
@@ -14871,7 +15211,7 @@
       </p:sp>
       <p:sp>
         <p:nvSpPr>
-          <p:cNvPr id="5" name="Oval 4"/>
+          <p:cNvPr id="6" name="Oval 5"/>
           <p:cNvSpPr/>
           <p:nvPr/>
         </p:nvSpPr>
@@ -14923,7 +15263,7 @@
       </p:sp>
       <p:sp>
         <p:nvSpPr>
-          <p:cNvPr id="6" name="TextBox 5"/>
+          <p:cNvPr id="7" name="TextBox 6"/>
           <p:cNvSpPr txBox="1"/>
           <p:nvPr/>
         </p:nvSpPr>
@@ -14961,14 +15301,14 @@
       </p:sp>
       <p:sp>
         <p:nvSpPr>
-          <p:cNvPr id="7" name="TextBox 6"/>
+          <p:cNvPr id="8" name="TextBox 7"/>
           <p:cNvSpPr txBox="1"/>
           <p:nvPr/>
         </p:nvSpPr>
         <p:spPr>
           <a:xfrm>
             <a:off x="1691640" y="2185416"/>
-            <a:ext cx="9418320" cy="841248"/>
+            <a:ext cx="7132320" cy="841248"/>
           </a:xfrm>
           <a:prstGeom prst="rect">
             <a:avLst/>
@@ -14999,14 +15339,14 @@
       </p:sp>
       <p:sp>
         <p:nvSpPr>
-          <p:cNvPr id="8" name="Rounded Rectangle 7"/>
+          <p:cNvPr id="9" name="Rounded Rectangle 8"/>
           <p:cNvSpPr/>
           <p:nvPr/>
         </p:nvSpPr>
         <p:spPr>
           <a:xfrm>
             <a:off x="822960" y="3008376"/>
-            <a:ext cx="10515600" cy="841248"/>
+            <a:ext cx="8229600" cy="841248"/>
           </a:xfrm>
           <a:prstGeom prst="roundRect">
             <a:avLst>
@@ -15045,7 +15385,7 @@
       </p:sp>
       <p:sp>
         <p:nvSpPr>
-          <p:cNvPr id="9" name="Oval 8"/>
+          <p:cNvPr id="10" name="Oval 9"/>
           <p:cNvSpPr/>
           <p:nvPr/>
         </p:nvSpPr>
@@ -15097,7 +15437,7 @@
       </p:sp>
       <p:sp>
         <p:nvSpPr>
-          <p:cNvPr id="10" name="TextBox 9"/>
+          <p:cNvPr id="11" name="TextBox 10"/>
           <p:cNvSpPr txBox="1"/>
           <p:nvPr/>
         </p:nvSpPr>
@@ -15135,14 +15475,14 @@
       </p:sp>
       <p:sp>
         <p:nvSpPr>
-          <p:cNvPr id="11" name="TextBox 10"/>
+          <p:cNvPr id="12" name="TextBox 11"/>
           <p:cNvSpPr txBox="1"/>
           <p:nvPr/>
         </p:nvSpPr>
         <p:spPr>
           <a:xfrm>
             <a:off x="1691640" y="3227832"/>
-            <a:ext cx="9418320" cy="841248"/>
+            <a:ext cx="7132320" cy="841248"/>
           </a:xfrm>
           <a:prstGeom prst="rect">
             <a:avLst/>
@@ -15173,14 +15513,14 @@
       </p:sp>
       <p:sp>
         <p:nvSpPr>
-          <p:cNvPr id="12" name="Rounded Rectangle 11"/>
+          <p:cNvPr id="13" name="Rounded Rectangle 12"/>
           <p:cNvSpPr/>
           <p:nvPr/>
         </p:nvSpPr>
         <p:spPr>
           <a:xfrm>
             <a:off x="822960" y="4050792"/>
-            <a:ext cx="10515600" cy="841248"/>
+            <a:ext cx="8229600" cy="841248"/>
           </a:xfrm>
           <a:prstGeom prst="roundRect">
             <a:avLst>
@@ -15219,7 +15559,7 @@
       </p:sp>
       <p:sp>
         <p:nvSpPr>
-          <p:cNvPr id="13" name="Oval 12"/>
+          <p:cNvPr id="14" name="Oval 13"/>
           <p:cNvSpPr/>
           <p:nvPr/>
         </p:nvSpPr>
@@ -15271,7 +15611,7 @@
       </p:sp>
       <p:sp>
         <p:nvSpPr>
-          <p:cNvPr id="14" name="TextBox 13"/>
+          <p:cNvPr id="15" name="TextBox 14"/>
           <p:cNvSpPr txBox="1"/>
           <p:nvPr/>
         </p:nvSpPr>
@@ -15309,14 +15649,14 @@
       </p:sp>
       <p:sp>
         <p:nvSpPr>
-          <p:cNvPr id="15" name="TextBox 14"/>
+          <p:cNvPr id="16" name="TextBox 15"/>
           <p:cNvSpPr txBox="1"/>
           <p:nvPr/>
         </p:nvSpPr>
         <p:spPr>
           <a:xfrm>
             <a:off x="1691640" y="4270248"/>
-            <a:ext cx="9418320" cy="841248"/>
+            <a:ext cx="7132320" cy="841248"/>
           </a:xfrm>
           <a:prstGeom prst="rect">
             <a:avLst/>
@@ -15347,14 +15687,14 @@
       </p:sp>
       <p:sp>
         <p:nvSpPr>
-          <p:cNvPr id="16" name="Rounded Rectangle 15"/>
+          <p:cNvPr id="17" name="Rounded Rectangle 16"/>
           <p:cNvSpPr/>
           <p:nvPr/>
         </p:nvSpPr>
         <p:spPr>
           <a:xfrm>
             <a:off x="822960" y="5093208"/>
-            <a:ext cx="10515600" cy="841248"/>
+            <a:ext cx="8229600" cy="841248"/>
           </a:xfrm>
           <a:prstGeom prst="roundRect">
             <a:avLst>
@@ -15393,7 +15733,7 @@
       </p:sp>
       <p:sp>
         <p:nvSpPr>
-          <p:cNvPr id="17" name="Oval 16"/>
+          <p:cNvPr id="18" name="Oval 17"/>
           <p:cNvSpPr/>
           <p:nvPr/>
         </p:nvSpPr>
@@ -15445,7 +15785,7 @@
       </p:sp>
       <p:sp>
         <p:nvSpPr>
-          <p:cNvPr id="18" name="TextBox 17"/>
+          <p:cNvPr id="19" name="TextBox 18"/>
           <p:cNvSpPr txBox="1"/>
           <p:nvPr/>
         </p:nvSpPr>
@@ -15483,14 +15823,14 @@
       </p:sp>
       <p:sp>
         <p:nvSpPr>
-          <p:cNvPr id="19" name="TextBox 18"/>
+          <p:cNvPr id="20" name="TextBox 19"/>
           <p:cNvSpPr txBox="1"/>
           <p:nvPr/>
         </p:nvSpPr>
         <p:spPr>
           <a:xfrm>
             <a:off x="1691640" y="5312664"/>
-            <a:ext cx="9418320" cy="841248"/>
+            <a:ext cx="7132320" cy="841248"/>
           </a:xfrm>
           <a:prstGeom prst="rect">
             <a:avLst/>
@@ -15521,7 +15861,7 @@
       </p:sp>
       <p:sp>
         <p:nvSpPr>
-          <p:cNvPr id="20" name="TextBox 19"/>
+          <p:cNvPr id="21" name="TextBox 20"/>
           <p:cNvSpPr txBox="1"/>
           <p:nvPr/>
         </p:nvSpPr>
@@ -15559,7 +15899,7 @@
       </p:sp>
       <p:sp>
         <p:nvSpPr>
-          <p:cNvPr id="21" name="TextBox 20"/>
+          <p:cNvPr id="22" name="TextBox 21"/>
           <p:cNvSpPr txBox="1"/>
           <p:nvPr/>
         </p:nvSpPr>
@@ -15600,6 +15940,18 @@
   <p:clrMapOvr>
     <a:masterClrMapping/>
   </p:clrMapOvr>
+  <mc:AlternateContent xmlns:mc="http://schemas.openxmlformats.org/markup-compatibility/2006">
+    <mc:Choice xmlns:p14="http://schemas.microsoft.com/office/powerpoint/2010/main" Requires="p14">
+      <p:transition spd="slow" p14:dur="600">
+        <p:fade/>
+      </p:transition>
+    </mc:Choice>
+    <mc:Fallback>
+      <p:transition spd="slow">
+        <p:fade/>
+      </p:transition>
+    </mc:Fallback>
+  </mc:AlternateContent>
 </p:sld>
 </file>
 
@@ -16130,6 +16482,18 @@
   <p:clrMapOvr>
     <a:masterClrMapping/>
   </p:clrMapOvr>
+  <mc:AlternateContent xmlns:mc="http://schemas.openxmlformats.org/markup-compatibility/2006">
+    <mc:Choice xmlns:p14="http://schemas.microsoft.com/office/powerpoint/2010/main" Requires="p14">
+      <p:transition spd="slow" p14:dur="600">
+        <p:fade/>
+      </p:transition>
+    </mc:Choice>
+    <mc:Fallback>
+      <p:transition spd="slow">
+        <p:fade/>
+      </p:transition>
+    </mc:Fallback>
+  </mc:AlternateContent>
 </p:sld>
 </file>
 
@@ -16151,9 +16515,33 @@
         <p:nvPr/>
       </p:nvGrpSpPr>
       <p:grpSpPr/>
-      <p:sp>
-        <p:nvSpPr>
-          <p:cNvPr id="2" name="Rounded Rectangle 1"/>
+      <p:pic>
+        <p:nvPicPr>
+          <p:cNvPr id="2" name="Picture 1" descr="cover.png"/>
+          <p:cNvPicPr>
+            <a:picLocks noChangeAspect="1"/>
+          </p:cNvPicPr>
+          <p:nvPr/>
+        </p:nvPicPr>
+        <p:blipFill>
+          <a:blip r:embed="rId2"/>
+          <a:stretch>
+            <a:fillRect/>
+          </a:stretch>
+        </p:blipFill>
+        <p:spPr>
+          <a:xfrm>
+            <a:off x="9418320" y="3657600"/>
+            <a:ext cx="4023360" cy="4023360"/>
+          </a:xfrm>
+          <a:prstGeom prst="rect">
+            <a:avLst/>
+          </a:prstGeom>
+        </p:spPr>
+      </p:pic>
+      <p:sp>
+        <p:nvSpPr>
+          <p:cNvPr id="3" name="Rounded Rectangle 2"/>
           <p:cNvSpPr/>
           <p:nvPr/>
         </p:nvSpPr>
@@ -16207,7 +16595,7 @@
       </p:sp>
       <p:sp>
         <p:nvSpPr>
-          <p:cNvPr id="3" name="TextBox 2"/>
+          <p:cNvPr id="4" name="TextBox 3"/>
           <p:cNvSpPr txBox="1"/>
           <p:nvPr/>
         </p:nvSpPr>
@@ -16245,14 +16633,14 @@
       </p:sp>
       <p:sp>
         <p:nvSpPr>
-          <p:cNvPr id="4" name="Rounded Rectangle 3"/>
+          <p:cNvPr id="5" name="Rounded Rectangle 4"/>
           <p:cNvSpPr/>
           <p:nvPr/>
         </p:nvSpPr>
         <p:spPr>
           <a:xfrm>
             <a:off x="822960" y="1965960"/>
-            <a:ext cx="10515600" cy="841248"/>
+            <a:ext cx="8229600" cy="841248"/>
           </a:xfrm>
           <a:prstGeom prst="roundRect">
             <a:avLst>
@@ -16291,7 +16679,7 @@
       </p:sp>
       <p:sp>
         <p:nvSpPr>
-          <p:cNvPr id="5" name="Oval 4"/>
+          <p:cNvPr id="6" name="Oval 5"/>
           <p:cNvSpPr/>
           <p:nvPr/>
         </p:nvSpPr>
@@ -16343,7 +16731,7 @@
       </p:sp>
       <p:sp>
         <p:nvSpPr>
-          <p:cNvPr id="6" name="TextBox 5"/>
+          <p:cNvPr id="7" name="TextBox 6"/>
           <p:cNvSpPr txBox="1"/>
           <p:nvPr/>
         </p:nvSpPr>
@@ -16381,14 +16769,14 @@
       </p:sp>
       <p:sp>
         <p:nvSpPr>
-          <p:cNvPr id="7" name="TextBox 6"/>
+          <p:cNvPr id="8" name="TextBox 7"/>
           <p:cNvSpPr txBox="1"/>
           <p:nvPr/>
         </p:nvSpPr>
         <p:spPr>
           <a:xfrm>
             <a:off x="1691640" y="2185416"/>
-            <a:ext cx="9418320" cy="841248"/>
+            <a:ext cx="7132320" cy="841248"/>
           </a:xfrm>
           <a:prstGeom prst="rect">
             <a:avLst/>
@@ -16419,14 +16807,14 @@
       </p:sp>
       <p:sp>
         <p:nvSpPr>
-          <p:cNvPr id="8" name="Rounded Rectangle 7"/>
+          <p:cNvPr id="9" name="Rounded Rectangle 8"/>
           <p:cNvSpPr/>
           <p:nvPr/>
         </p:nvSpPr>
         <p:spPr>
           <a:xfrm>
             <a:off x="822960" y="3008376"/>
-            <a:ext cx="10515600" cy="841248"/>
+            <a:ext cx="8229600" cy="841248"/>
           </a:xfrm>
           <a:prstGeom prst="roundRect">
             <a:avLst>
@@ -16465,7 +16853,7 @@
       </p:sp>
       <p:sp>
         <p:nvSpPr>
-          <p:cNvPr id="9" name="Oval 8"/>
+          <p:cNvPr id="10" name="Oval 9"/>
           <p:cNvSpPr/>
           <p:nvPr/>
         </p:nvSpPr>
@@ -16517,7 +16905,7 @@
       </p:sp>
       <p:sp>
         <p:nvSpPr>
-          <p:cNvPr id="10" name="TextBox 9"/>
+          <p:cNvPr id="11" name="TextBox 10"/>
           <p:cNvSpPr txBox="1"/>
           <p:nvPr/>
         </p:nvSpPr>
@@ -16555,14 +16943,14 @@
       </p:sp>
       <p:sp>
         <p:nvSpPr>
-          <p:cNvPr id="11" name="TextBox 10"/>
+          <p:cNvPr id="12" name="TextBox 11"/>
           <p:cNvSpPr txBox="1"/>
           <p:nvPr/>
         </p:nvSpPr>
         <p:spPr>
           <a:xfrm>
             <a:off x="1691640" y="3227832"/>
-            <a:ext cx="9418320" cy="841248"/>
+            <a:ext cx="7132320" cy="841248"/>
           </a:xfrm>
           <a:prstGeom prst="rect">
             <a:avLst/>
@@ -16593,14 +16981,14 @@
       </p:sp>
       <p:sp>
         <p:nvSpPr>
-          <p:cNvPr id="12" name="Rounded Rectangle 11"/>
+          <p:cNvPr id="13" name="Rounded Rectangle 12"/>
           <p:cNvSpPr/>
           <p:nvPr/>
         </p:nvSpPr>
         <p:spPr>
           <a:xfrm>
             <a:off x="822960" y="4050792"/>
-            <a:ext cx="10515600" cy="841248"/>
+            <a:ext cx="8229600" cy="841248"/>
           </a:xfrm>
           <a:prstGeom prst="roundRect">
             <a:avLst>
@@ -16639,7 +17027,7 @@
       </p:sp>
       <p:sp>
         <p:nvSpPr>
-          <p:cNvPr id="13" name="Oval 12"/>
+          <p:cNvPr id="14" name="Oval 13"/>
           <p:cNvSpPr/>
           <p:nvPr/>
         </p:nvSpPr>
@@ -16691,7 +17079,7 @@
       </p:sp>
       <p:sp>
         <p:nvSpPr>
-          <p:cNvPr id="14" name="TextBox 13"/>
+          <p:cNvPr id="15" name="TextBox 14"/>
           <p:cNvSpPr txBox="1"/>
           <p:nvPr/>
         </p:nvSpPr>
@@ -16729,14 +17117,14 @@
       </p:sp>
       <p:sp>
         <p:nvSpPr>
-          <p:cNvPr id="15" name="TextBox 14"/>
+          <p:cNvPr id="16" name="TextBox 15"/>
           <p:cNvSpPr txBox="1"/>
           <p:nvPr/>
         </p:nvSpPr>
         <p:spPr>
           <a:xfrm>
             <a:off x="1691640" y="4270248"/>
-            <a:ext cx="9418320" cy="841248"/>
+            <a:ext cx="7132320" cy="841248"/>
           </a:xfrm>
           <a:prstGeom prst="rect">
             <a:avLst/>
@@ -16767,14 +17155,14 @@
       </p:sp>
       <p:sp>
         <p:nvSpPr>
-          <p:cNvPr id="16" name="Rounded Rectangle 15"/>
+          <p:cNvPr id="17" name="Rounded Rectangle 16"/>
           <p:cNvSpPr/>
           <p:nvPr/>
         </p:nvSpPr>
         <p:spPr>
           <a:xfrm>
             <a:off x="822960" y="5093208"/>
-            <a:ext cx="10515600" cy="841248"/>
+            <a:ext cx="8229600" cy="841248"/>
           </a:xfrm>
           <a:prstGeom prst="roundRect">
             <a:avLst>
@@ -16813,7 +17201,7 @@
       </p:sp>
       <p:sp>
         <p:nvSpPr>
-          <p:cNvPr id="17" name="Oval 16"/>
+          <p:cNvPr id="18" name="Oval 17"/>
           <p:cNvSpPr/>
           <p:nvPr/>
         </p:nvSpPr>
@@ -16865,7 +17253,7 @@
       </p:sp>
       <p:sp>
         <p:nvSpPr>
-          <p:cNvPr id="18" name="TextBox 17"/>
+          <p:cNvPr id="19" name="TextBox 18"/>
           <p:cNvSpPr txBox="1"/>
           <p:nvPr/>
         </p:nvSpPr>
@@ -16903,14 +17291,14 @@
       </p:sp>
       <p:sp>
         <p:nvSpPr>
-          <p:cNvPr id="19" name="TextBox 18"/>
+          <p:cNvPr id="20" name="TextBox 19"/>
           <p:cNvSpPr txBox="1"/>
           <p:nvPr/>
         </p:nvSpPr>
         <p:spPr>
           <a:xfrm>
             <a:off x="1691640" y="5312664"/>
-            <a:ext cx="9418320" cy="841248"/>
+            <a:ext cx="7132320" cy="841248"/>
           </a:xfrm>
           <a:prstGeom prst="rect">
             <a:avLst/>
@@ -16941,7 +17329,7 @@
       </p:sp>
       <p:sp>
         <p:nvSpPr>
-          <p:cNvPr id="20" name="TextBox 19"/>
+          <p:cNvPr id="21" name="TextBox 20"/>
           <p:cNvSpPr txBox="1"/>
           <p:nvPr/>
         </p:nvSpPr>
@@ -16979,7 +17367,7 @@
       </p:sp>
       <p:sp>
         <p:nvSpPr>
-          <p:cNvPr id="21" name="TextBox 20"/>
+          <p:cNvPr id="22" name="TextBox 21"/>
           <p:cNvSpPr txBox="1"/>
           <p:nvPr/>
         </p:nvSpPr>
@@ -17020,6 +17408,18 @@
   <p:clrMapOvr>
     <a:masterClrMapping/>
   </p:clrMapOvr>
+  <mc:AlternateContent xmlns:mc="http://schemas.openxmlformats.org/markup-compatibility/2006">
+    <mc:Choice xmlns:p14="http://schemas.microsoft.com/office/powerpoint/2010/main" Requires="p14">
+      <p:transition spd="slow" p14:dur="600">
+        <p:fade/>
+      </p:transition>
+    </mc:Choice>
+    <mc:Fallback>
+      <p:transition spd="slow">
+        <p:fade/>
+      </p:transition>
+    </mc:Fallback>
+  </mc:AlternateContent>
 </p:sld>
 </file>
 

--- a/presentation-limonad/presentation.pptx
+++ b/presentation-limonad/presentation.pptx
@@ -4527,8 +4527,8 @@
         </p:blipFill>
         <p:spPr>
           <a:xfrm>
-            <a:off x="6949440" y="-548640"/>
-            <a:ext cx="6035040" cy="6035040"/>
+            <a:off x="0" y="0"/>
+            <a:ext cx="12191695" cy="6858000"/>
           </a:xfrm>
           <a:prstGeom prst="rect">
             <a:avLst/>
@@ -4705,22 +4705,24 @@
       <p:grpSpPr/>
       <p:pic>
         <p:nvPicPr>
-          <p:cNvPr id="2" name="Picture 1" descr="s10.png"/>
+          <p:cNvPr id="2" name="Picture 1" descr="aurora.png"/>
           <p:cNvPicPr>
             <a:picLocks noChangeAspect="1"/>
           </p:cNvPicPr>
           <p:nvPr/>
         </p:nvPicPr>
         <p:blipFill>
-          <a:blip r:embed="rId2"/>
+          <a:blip r:embed="rId2">
+            <a:alphaModFix amt="42000"/>
+          </a:blip>
           <a:stretch>
             <a:fillRect/>
           </a:stretch>
         </p:blipFill>
         <p:spPr>
           <a:xfrm>
-            <a:off x="9418320" y="3657600"/>
-            <a:ext cx="4023360" cy="4023360"/>
+            <a:off x="0" y="0"/>
+            <a:ext cx="12191695" cy="6858000"/>
           </a:xfrm>
           <a:prstGeom prst="rect">
             <a:avLst/>
@@ -4828,7 +4830,7 @@
         <p:spPr>
           <a:xfrm>
             <a:off x="822960" y="1965960"/>
-            <a:ext cx="8229600" cy="841248"/>
+            <a:ext cx="10515600" cy="841248"/>
           </a:xfrm>
           <a:prstGeom prst="roundRect">
             <a:avLst>
@@ -4964,7 +4966,7 @@
         <p:spPr>
           <a:xfrm>
             <a:off x="1691640" y="2185416"/>
-            <a:ext cx="7132320" cy="841248"/>
+            <a:ext cx="9326880" cy="841248"/>
           </a:xfrm>
           <a:prstGeom prst="rect">
             <a:avLst/>
@@ -5002,7 +5004,7 @@
         <p:spPr>
           <a:xfrm>
             <a:off x="822960" y="3008376"/>
-            <a:ext cx="8229600" cy="841248"/>
+            <a:ext cx="10515600" cy="841248"/>
           </a:xfrm>
           <a:prstGeom prst="roundRect">
             <a:avLst>
@@ -5138,7 +5140,7 @@
         <p:spPr>
           <a:xfrm>
             <a:off x="1691640" y="3227832"/>
-            <a:ext cx="7132320" cy="841248"/>
+            <a:ext cx="9326880" cy="841248"/>
           </a:xfrm>
           <a:prstGeom prst="rect">
             <a:avLst/>
@@ -5176,7 +5178,7 @@
         <p:spPr>
           <a:xfrm>
             <a:off x="822960" y="4050792"/>
-            <a:ext cx="8229600" cy="841248"/>
+            <a:ext cx="10515600" cy="841248"/>
           </a:xfrm>
           <a:prstGeom prst="roundRect">
             <a:avLst>
@@ -5312,7 +5314,7 @@
         <p:spPr>
           <a:xfrm>
             <a:off x="1691640" y="4270248"/>
-            <a:ext cx="7132320" cy="841248"/>
+            <a:ext cx="9326880" cy="841248"/>
           </a:xfrm>
           <a:prstGeom prst="rect">
             <a:avLst/>
@@ -5350,7 +5352,7 @@
         <p:spPr>
           <a:xfrm>
             <a:off x="822960" y="5093208"/>
-            <a:ext cx="8229600" cy="841248"/>
+            <a:ext cx="10515600" cy="841248"/>
           </a:xfrm>
           <a:prstGeom prst="roundRect">
             <a:avLst>
@@ -5486,7 +5488,7 @@
         <p:spPr>
           <a:xfrm>
             <a:off x="1691640" y="5312664"/>
-            <a:ext cx="7132320" cy="841248"/>
+            <a:ext cx="9326880" cy="841248"/>
           </a:xfrm>
           <a:prstGeom prst="rect">
             <a:avLst/>
@@ -5631,22 +5633,24 @@
       <p:grpSpPr/>
       <p:pic>
         <p:nvPicPr>
-          <p:cNvPr id="2" name="Picture 1" descr="s11.png"/>
+          <p:cNvPr id="2" name="Picture 1" descr="bars.png"/>
           <p:cNvPicPr>
             <a:picLocks noChangeAspect="1"/>
           </p:cNvPicPr>
           <p:nvPr/>
         </p:nvPicPr>
         <p:blipFill>
-          <a:blip r:embed="rId2"/>
+          <a:blip r:embed="rId2">
+            <a:alphaModFix amt="42000"/>
+          </a:blip>
           <a:stretch>
             <a:fillRect/>
           </a:stretch>
         </p:blipFill>
         <p:spPr>
           <a:xfrm>
-            <a:off x="9418320" y="3657600"/>
-            <a:ext cx="4023360" cy="4023360"/>
+            <a:off x="0" y="0"/>
+            <a:ext cx="12191695" cy="6858000"/>
           </a:xfrm>
           <a:prstGeom prst="rect">
             <a:avLst/>
@@ -5754,7 +5758,7 @@
         <p:spPr>
           <a:xfrm>
             <a:off x="822960" y="1965960"/>
-            <a:ext cx="8229600" cy="841248"/>
+            <a:ext cx="10515600" cy="841248"/>
           </a:xfrm>
           <a:prstGeom prst="roundRect">
             <a:avLst>
@@ -5890,7 +5894,7 @@
         <p:spPr>
           <a:xfrm>
             <a:off x="1691640" y="2185416"/>
-            <a:ext cx="7132320" cy="841248"/>
+            <a:ext cx="9326880" cy="841248"/>
           </a:xfrm>
           <a:prstGeom prst="rect">
             <a:avLst/>
@@ -5928,7 +5932,7 @@
         <p:spPr>
           <a:xfrm>
             <a:off x="822960" y="3008376"/>
-            <a:ext cx="8229600" cy="841248"/>
+            <a:ext cx="10515600" cy="841248"/>
           </a:xfrm>
           <a:prstGeom prst="roundRect">
             <a:avLst>
@@ -6064,7 +6068,7 @@
         <p:spPr>
           <a:xfrm>
             <a:off x="1691640" y="3227832"/>
-            <a:ext cx="7132320" cy="841248"/>
+            <a:ext cx="9326880" cy="841248"/>
           </a:xfrm>
           <a:prstGeom prst="rect">
             <a:avLst/>
@@ -6102,7 +6106,7 @@
         <p:spPr>
           <a:xfrm>
             <a:off x="822960" y="4050792"/>
-            <a:ext cx="8229600" cy="841248"/>
+            <a:ext cx="10515600" cy="841248"/>
           </a:xfrm>
           <a:prstGeom prst="roundRect">
             <a:avLst>
@@ -6238,7 +6242,7 @@
         <p:spPr>
           <a:xfrm>
             <a:off x="1691640" y="4270248"/>
-            <a:ext cx="7132320" cy="841248"/>
+            <a:ext cx="9326880" cy="841248"/>
           </a:xfrm>
           <a:prstGeom prst="rect">
             <a:avLst/>
@@ -6276,7 +6280,7 @@
         <p:spPr>
           <a:xfrm>
             <a:off x="822960" y="5093208"/>
-            <a:ext cx="8229600" cy="841248"/>
+            <a:ext cx="10515600" cy="841248"/>
           </a:xfrm>
           <a:prstGeom prst="roundRect">
             <a:avLst>
@@ -6412,7 +6416,7 @@
         <p:spPr>
           <a:xfrm>
             <a:off x="1691640" y="5312664"/>
-            <a:ext cx="7132320" cy="841248"/>
+            <a:ext cx="9326880" cy="841248"/>
           </a:xfrm>
           <a:prstGeom prst="rect">
             <a:avLst/>
@@ -6557,22 +6561,24 @@
       <p:grpSpPr/>
       <p:pic>
         <p:nvPicPr>
-          <p:cNvPr id="2" name="Picture 1" descr="cover.png"/>
+          <p:cNvPr id="2" name="Picture 1" descr="mesh.png"/>
           <p:cNvPicPr>
             <a:picLocks noChangeAspect="1"/>
           </p:cNvPicPr>
           <p:nvPr/>
         </p:nvPicPr>
         <p:blipFill>
-          <a:blip r:embed="rId2"/>
+          <a:blip r:embed="rId2">
+            <a:alphaModFix amt="42000"/>
+          </a:blip>
           <a:stretch>
             <a:fillRect/>
           </a:stretch>
         </p:blipFill>
         <p:spPr>
           <a:xfrm>
-            <a:off x="9418320" y="3657600"/>
-            <a:ext cx="4023360" cy="4023360"/>
+            <a:off x="0" y="0"/>
+            <a:ext cx="12191695" cy="6858000"/>
           </a:xfrm>
           <a:prstGeom prst="rect">
             <a:avLst/>
@@ -6680,7 +6686,7 @@
         <p:spPr>
           <a:xfrm>
             <a:off x="822960" y="1965960"/>
-            <a:ext cx="8229600" cy="841248"/>
+            <a:ext cx="10515600" cy="841248"/>
           </a:xfrm>
           <a:prstGeom prst="roundRect">
             <a:avLst>
@@ -6816,7 +6822,7 @@
         <p:spPr>
           <a:xfrm>
             <a:off x="1691640" y="2185416"/>
-            <a:ext cx="7132320" cy="841248"/>
+            <a:ext cx="9326880" cy="841248"/>
           </a:xfrm>
           <a:prstGeom prst="rect">
             <a:avLst/>
@@ -6854,7 +6860,7 @@
         <p:spPr>
           <a:xfrm>
             <a:off x="822960" y="3008376"/>
-            <a:ext cx="8229600" cy="841248"/>
+            <a:ext cx="10515600" cy="841248"/>
           </a:xfrm>
           <a:prstGeom prst="roundRect">
             <a:avLst>
@@ -6990,7 +6996,7 @@
         <p:spPr>
           <a:xfrm>
             <a:off x="1691640" y="3227832"/>
-            <a:ext cx="7132320" cy="841248"/>
+            <a:ext cx="9326880" cy="841248"/>
           </a:xfrm>
           <a:prstGeom prst="rect">
             <a:avLst/>
@@ -7028,7 +7034,7 @@
         <p:spPr>
           <a:xfrm>
             <a:off x="822960" y="4050792"/>
-            <a:ext cx="8229600" cy="841248"/>
+            <a:ext cx="10515600" cy="841248"/>
           </a:xfrm>
           <a:prstGeom prst="roundRect">
             <a:avLst>
@@ -7164,7 +7170,7 @@
         <p:spPr>
           <a:xfrm>
             <a:off x="1691640" y="4270248"/>
-            <a:ext cx="7132320" cy="841248"/>
+            <a:ext cx="9326880" cy="841248"/>
           </a:xfrm>
           <a:prstGeom prst="rect">
             <a:avLst/>
@@ -7202,7 +7208,7 @@
         <p:spPr>
           <a:xfrm>
             <a:off x="822960" y="5093208"/>
-            <a:ext cx="8229600" cy="841248"/>
+            <a:ext cx="10515600" cy="841248"/>
           </a:xfrm>
           <a:prstGeom prst="roundRect">
             <a:avLst>
@@ -7338,7 +7344,7 @@
         <p:spPr>
           <a:xfrm>
             <a:off x="1691640" y="5312664"/>
-            <a:ext cx="7132320" cy="841248"/>
+            <a:ext cx="9326880" cy="841248"/>
           </a:xfrm>
           <a:prstGeom prst="rect">
             <a:avLst/>
@@ -7483,22 +7489,24 @@
       <p:grpSpPr/>
       <p:pic>
         <p:nvPicPr>
-          <p:cNvPr id="2" name="Picture 1" descr="s10.png"/>
+          <p:cNvPr id="2" name="Picture 1" descr="grid.png"/>
           <p:cNvPicPr>
             <a:picLocks noChangeAspect="1"/>
           </p:cNvPicPr>
           <p:nvPr/>
         </p:nvPicPr>
         <p:blipFill>
-          <a:blip r:embed="rId2"/>
+          <a:blip r:embed="rId2">
+            <a:alphaModFix amt="42000"/>
+          </a:blip>
           <a:stretch>
             <a:fillRect/>
           </a:stretch>
         </p:blipFill>
         <p:spPr>
           <a:xfrm>
-            <a:off x="9418320" y="3657600"/>
-            <a:ext cx="4023360" cy="4023360"/>
+            <a:off x="0" y="0"/>
+            <a:ext cx="12191695" cy="6858000"/>
           </a:xfrm>
           <a:prstGeom prst="rect">
             <a:avLst/>
@@ -7606,7 +7614,7 @@
         <p:spPr>
           <a:xfrm>
             <a:off x="822960" y="1965960"/>
-            <a:ext cx="8229600" cy="841248"/>
+            <a:ext cx="10515600" cy="841248"/>
           </a:xfrm>
           <a:prstGeom prst="roundRect">
             <a:avLst>
@@ -7742,7 +7750,7 @@
         <p:spPr>
           <a:xfrm>
             <a:off x="1691640" y="2185416"/>
-            <a:ext cx="7132320" cy="841248"/>
+            <a:ext cx="9326880" cy="841248"/>
           </a:xfrm>
           <a:prstGeom prst="rect">
             <a:avLst/>
@@ -7780,7 +7788,7 @@
         <p:spPr>
           <a:xfrm>
             <a:off x="822960" y="3008376"/>
-            <a:ext cx="8229600" cy="841248"/>
+            <a:ext cx="10515600" cy="841248"/>
           </a:xfrm>
           <a:prstGeom prst="roundRect">
             <a:avLst>
@@ -7916,7 +7924,7 @@
         <p:spPr>
           <a:xfrm>
             <a:off x="1691640" y="3227832"/>
-            <a:ext cx="7132320" cy="841248"/>
+            <a:ext cx="9326880" cy="841248"/>
           </a:xfrm>
           <a:prstGeom prst="rect">
             <a:avLst/>
@@ -7954,7 +7962,7 @@
         <p:spPr>
           <a:xfrm>
             <a:off x="822960" y="4050792"/>
-            <a:ext cx="8229600" cy="841248"/>
+            <a:ext cx="10515600" cy="841248"/>
           </a:xfrm>
           <a:prstGeom prst="roundRect">
             <a:avLst>
@@ -8090,7 +8098,7 @@
         <p:spPr>
           <a:xfrm>
             <a:off x="1691640" y="4270248"/>
-            <a:ext cx="7132320" cy="841248"/>
+            <a:ext cx="9326880" cy="841248"/>
           </a:xfrm>
           <a:prstGeom prst="rect">
             <a:avLst/>
@@ -8128,7 +8136,7 @@
         <p:spPr>
           <a:xfrm>
             <a:off x="822960" y="5093208"/>
-            <a:ext cx="8229600" cy="841248"/>
+            <a:ext cx="10515600" cy="841248"/>
           </a:xfrm>
           <a:prstGeom prst="roundRect">
             <a:avLst>
@@ -8264,7 +8272,7 @@
         <p:spPr>
           <a:xfrm>
             <a:off x="1691640" y="5312664"/>
-            <a:ext cx="7132320" cy="841248"/>
+            <a:ext cx="9326880" cy="841248"/>
           </a:xfrm>
           <a:prstGeom prst="rect">
             <a:avLst/>
@@ -8407,9 +8415,35 @@
         <p:nvPr/>
       </p:nvGrpSpPr>
       <p:grpSpPr/>
-      <p:sp>
-        <p:nvSpPr>
-          <p:cNvPr id="2" name="Rounded Rectangle 1"/>
+      <p:pic>
+        <p:nvPicPr>
+          <p:cNvPr id="2" name="Picture 1" descr="bars.png"/>
+          <p:cNvPicPr>
+            <a:picLocks noChangeAspect="1"/>
+          </p:cNvPicPr>
+          <p:nvPr/>
+        </p:nvPicPr>
+        <p:blipFill>
+          <a:blip r:embed="rId2">
+            <a:alphaModFix amt="42000"/>
+          </a:blip>
+          <a:stretch>
+            <a:fillRect/>
+          </a:stretch>
+        </p:blipFill>
+        <p:spPr>
+          <a:xfrm>
+            <a:off x="0" y="0"/>
+            <a:ext cx="12191695" cy="6858000"/>
+          </a:xfrm>
+          <a:prstGeom prst="rect">
+            <a:avLst/>
+          </a:prstGeom>
+        </p:spPr>
+      </p:pic>
+      <p:sp>
+        <p:nvSpPr>
+          <p:cNvPr id="3" name="Rounded Rectangle 2"/>
           <p:cNvSpPr/>
           <p:nvPr/>
         </p:nvSpPr>
@@ -8463,7 +8497,7 @@
       </p:sp>
       <p:sp>
         <p:nvSpPr>
-          <p:cNvPr id="3" name="TextBox 2"/>
+          <p:cNvPr id="4" name="TextBox 3"/>
           <p:cNvSpPr txBox="1"/>
           <p:nvPr/>
         </p:nvSpPr>
@@ -8501,7 +8535,7 @@
       </p:sp>
       <p:sp>
         <p:nvSpPr>
-          <p:cNvPr id="4" name="Rounded Rectangle 3"/>
+          <p:cNvPr id="5" name="Rounded Rectangle 4"/>
           <p:cNvSpPr/>
           <p:nvPr/>
         </p:nvSpPr>
@@ -8547,7 +8581,7 @@
       </p:sp>
       <p:sp>
         <p:nvSpPr>
-          <p:cNvPr id="5" name="TextBox 4"/>
+          <p:cNvPr id="6" name="TextBox 5"/>
           <p:cNvSpPr txBox="1"/>
           <p:nvPr/>
         </p:nvSpPr>
@@ -8585,7 +8619,7 @@
       </p:sp>
       <p:sp>
         <p:nvSpPr>
-          <p:cNvPr id="6" name="Rounded Rectangle 5"/>
+          <p:cNvPr id="7" name="Rounded Rectangle 6"/>
           <p:cNvSpPr/>
           <p:nvPr/>
         </p:nvSpPr>
@@ -8631,7 +8665,7 @@
       </p:sp>
       <p:sp>
         <p:nvSpPr>
-          <p:cNvPr id="7" name="TextBox 6"/>
+          <p:cNvPr id="8" name="TextBox 7"/>
           <p:cNvSpPr txBox="1"/>
           <p:nvPr/>
         </p:nvSpPr>
@@ -8669,7 +8703,7 @@
       </p:sp>
       <p:sp>
         <p:nvSpPr>
-          <p:cNvPr id="8" name="Rounded Rectangle 7"/>
+          <p:cNvPr id="9" name="Rounded Rectangle 8"/>
           <p:cNvSpPr/>
           <p:nvPr/>
         </p:nvSpPr>
@@ -8715,7 +8749,7 @@
       </p:sp>
       <p:sp>
         <p:nvSpPr>
-          <p:cNvPr id="9" name="TextBox 8"/>
+          <p:cNvPr id="10" name="TextBox 9"/>
           <p:cNvSpPr txBox="1"/>
           <p:nvPr/>
         </p:nvSpPr>
@@ -8753,7 +8787,7 @@
       </p:sp>
       <p:sp>
         <p:nvSpPr>
-          <p:cNvPr id="10" name="Rounded Rectangle 9"/>
+          <p:cNvPr id="11" name="Rounded Rectangle 10"/>
           <p:cNvSpPr/>
           <p:nvPr/>
         </p:nvSpPr>
@@ -8799,7 +8833,7 @@
       </p:sp>
       <p:sp>
         <p:nvSpPr>
-          <p:cNvPr id="11" name="TextBox 10"/>
+          <p:cNvPr id="12" name="TextBox 11"/>
           <p:cNvSpPr txBox="1"/>
           <p:nvPr/>
         </p:nvSpPr>
@@ -8837,7 +8871,7 @@
       </p:sp>
       <p:sp>
         <p:nvSpPr>
-          <p:cNvPr id="12" name="TextBox 11"/>
+          <p:cNvPr id="13" name="TextBox 12"/>
           <p:cNvSpPr txBox="1"/>
           <p:nvPr/>
         </p:nvSpPr>
@@ -8875,7 +8909,7 @@
       </p:sp>
       <p:sp>
         <p:nvSpPr>
-          <p:cNvPr id="13" name="TextBox 12"/>
+          <p:cNvPr id="14" name="TextBox 13"/>
           <p:cNvSpPr txBox="1"/>
           <p:nvPr/>
         </p:nvSpPr>
@@ -8951,22 +8985,24 @@
       <p:grpSpPr/>
       <p:pic>
         <p:nvPicPr>
-          <p:cNvPr id="2" name="Picture 1" descr="s10.png"/>
+          <p:cNvPr id="2" name="Picture 1" descr="rings.png"/>
           <p:cNvPicPr>
             <a:picLocks noChangeAspect="1"/>
           </p:cNvPicPr>
           <p:nvPr/>
         </p:nvPicPr>
         <p:blipFill>
-          <a:blip r:embed="rId2"/>
+          <a:blip r:embed="rId2">
+            <a:alphaModFix amt="42000"/>
+          </a:blip>
           <a:stretch>
             <a:fillRect/>
           </a:stretch>
         </p:blipFill>
         <p:spPr>
           <a:xfrm>
-            <a:off x="9418320" y="3657600"/>
-            <a:ext cx="4023360" cy="4023360"/>
+            <a:off x="0" y="0"/>
+            <a:ext cx="12191695" cy="6858000"/>
           </a:xfrm>
           <a:prstGeom prst="rect">
             <a:avLst/>
@@ -9074,7 +9110,7 @@
         <p:spPr>
           <a:xfrm>
             <a:off x="822960" y="1965960"/>
-            <a:ext cx="8229600" cy="841248"/>
+            <a:ext cx="10515600" cy="841248"/>
           </a:xfrm>
           <a:prstGeom prst="roundRect">
             <a:avLst>
@@ -9210,7 +9246,7 @@
         <p:spPr>
           <a:xfrm>
             <a:off x="1691640" y="2185416"/>
-            <a:ext cx="7132320" cy="841248"/>
+            <a:ext cx="9326880" cy="841248"/>
           </a:xfrm>
           <a:prstGeom prst="rect">
             <a:avLst/>
@@ -9248,7 +9284,7 @@
         <p:spPr>
           <a:xfrm>
             <a:off x="822960" y="3008376"/>
-            <a:ext cx="8229600" cy="841248"/>
+            <a:ext cx="10515600" cy="841248"/>
           </a:xfrm>
           <a:prstGeom prst="roundRect">
             <a:avLst>
@@ -9384,7 +9420,7 @@
         <p:spPr>
           <a:xfrm>
             <a:off x="1691640" y="3227832"/>
-            <a:ext cx="7132320" cy="841248"/>
+            <a:ext cx="9326880" cy="841248"/>
           </a:xfrm>
           <a:prstGeom prst="rect">
             <a:avLst/>
@@ -9422,7 +9458,7 @@
         <p:spPr>
           <a:xfrm>
             <a:off x="822960" y="4050792"/>
-            <a:ext cx="8229600" cy="841248"/>
+            <a:ext cx="10515600" cy="841248"/>
           </a:xfrm>
           <a:prstGeom prst="roundRect">
             <a:avLst>
@@ -9558,7 +9594,7 @@
         <p:spPr>
           <a:xfrm>
             <a:off x="1691640" y="4270248"/>
-            <a:ext cx="7132320" cy="841248"/>
+            <a:ext cx="9326880" cy="841248"/>
           </a:xfrm>
           <a:prstGeom prst="rect">
             <a:avLst/>
@@ -9596,7 +9632,7 @@
         <p:spPr>
           <a:xfrm>
             <a:off x="822960" y="5093208"/>
-            <a:ext cx="8229600" cy="841248"/>
+            <a:ext cx="10515600" cy="841248"/>
           </a:xfrm>
           <a:prstGeom prst="roundRect">
             <a:avLst>
@@ -9732,7 +9768,7 @@
         <p:spPr>
           <a:xfrm>
             <a:off x="1691640" y="5312664"/>
-            <a:ext cx="7132320" cy="841248"/>
+            <a:ext cx="9326880" cy="841248"/>
           </a:xfrm>
           <a:prstGeom prst="rect">
             <a:avLst/>
@@ -9877,22 +9913,24 @@
       <p:grpSpPr/>
       <p:pic>
         <p:nvPicPr>
-          <p:cNvPr id="2" name="Picture 1" descr="cover.png"/>
+          <p:cNvPr id="2" name="Picture 1" descr="mesh.png"/>
           <p:cNvPicPr>
             <a:picLocks noChangeAspect="1"/>
           </p:cNvPicPr>
           <p:nvPr/>
         </p:nvPicPr>
         <p:blipFill>
-          <a:blip r:embed="rId2"/>
+          <a:blip r:embed="rId2">
+            <a:alphaModFix amt="42000"/>
+          </a:blip>
           <a:stretch>
             <a:fillRect/>
           </a:stretch>
         </p:blipFill>
         <p:spPr>
           <a:xfrm>
-            <a:off x="9418320" y="3657600"/>
-            <a:ext cx="4023360" cy="4023360"/>
+            <a:off x="0" y="0"/>
+            <a:ext cx="12191695" cy="6858000"/>
           </a:xfrm>
           <a:prstGeom prst="rect">
             <a:avLst/>
@@ -10000,7 +10038,7 @@
         <p:spPr>
           <a:xfrm>
             <a:off x="822960" y="1965960"/>
-            <a:ext cx="8229600" cy="841248"/>
+            <a:ext cx="10515600" cy="841248"/>
           </a:xfrm>
           <a:prstGeom prst="roundRect">
             <a:avLst>
@@ -10136,7 +10174,7 @@
         <p:spPr>
           <a:xfrm>
             <a:off x="1691640" y="2185416"/>
-            <a:ext cx="7132320" cy="841248"/>
+            <a:ext cx="9326880" cy="841248"/>
           </a:xfrm>
           <a:prstGeom prst="rect">
             <a:avLst/>
@@ -10174,7 +10212,7 @@
         <p:spPr>
           <a:xfrm>
             <a:off x="822960" y="3008376"/>
-            <a:ext cx="8229600" cy="841248"/>
+            <a:ext cx="10515600" cy="841248"/>
           </a:xfrm>
           <a:prstGeom prst="roundRect">
             <a:avLst>
@@ -10310,7 +10348,7 @@
         <p:spPr>
           <a:xfrm>
             <a:off x="1691640" y="3227832"/>
-            <a:ext cx="7132320" cy="841248"/>
+            <a:ext cx="9326880" cy="841248"/>
           </a:xfrm>
           <a:prstGeom prst="rect">
             <a:avLst/>
@@ -10348,7 +10386,7 @@
         <p:spPr>
           <a:xfrm>
             <a:off x="822960" y="4050792"/>
-            <a:ext cx="8229600" cy="841248"/>
+            <a:ext cx="10515600" cy="841248"/>
           </a:xfrm>
           <a:prstGeom prst="roundRect">
             <a:avLst>
@@ -10484,7 +10522,7 @@
         <p:spPr>
           <a:xfrm>
             <a:off x="1691640" y="4270248"/>
-            <a:ext cx="7132320" cy="841248"/>
+            <a:ext cx="9326880" cy="841248"/>
           </a:xfrm>
           <a:prstGeom prst="rect">
             <a:avLst/>
@@ -10522,7 +10560,7 @@
         <p:spPr>
           <a:xfrm>
             <a:off x="822960" y="5093208"/>
-            <a:ext cx="8229600" cy="841248"/>
+            <a:ext cx="10515600" cy="841248"/>
           </a:xfrm>
           <a:prstGeom prst="roundRect">
             <a:avLst>
@@ -10658,7 +10696,7 @@
         <p:spPr>
           <a:xfrm>
             <a:off x="1691640" y="5312664"/>
-            <a:ext cx="7132320" cy="841248"/>
+            <a:ext cx="9326880" cy="841248"/>
           </a:xfrm>
           <a:prstGeom prst="rect">
             <a:avLst/>
@@ -10803,22 +10841,24 @@
       <p:grpSpPr/>
       <p:pic>
         <p:nvPicPr>
-          <p:cNvPr id="2" name="Picture 1" descr="s2.png"/>
+          <p:cNvPr id="2" name="Picture 1" descr="mesh.png"/>
           <p:cNvPicPr>
             <a:picLocks noChangeAspect="1"/>
           </p:cNvPicPr>
           <p:nvPr/>
         </p:nvPicPr>
         <p:blipFill>
-          <a:blip r:embed="rId2"/>
+          <a:blip r:embed="rId2">
+            <a:alphaModFix amt="42000"/>
+          </a:blip>
           <a:stretch>
             <a:fillRect/>
           </a:stretch>
         </p:blipFill>
         <p:spPr>
           <a:xfrm>
-            <a:off x="9418320" y="3657600"/>
-            <a:ext cx="4023360" cy="4023360"/>
+            <a:off x="0" y="0"/>
+            <a:ext cx="12191695" cy="6858000"/>
           </a:xfrm>
           <a:prstGeom prst="rect">
             <a:avLst/>
@@ -10926,7 +10966,7 @@
         <p:spPr>
           <a:xfrm>
             <a:off x="822960" y="1965960"/>
-            <a:ext cx="8229600" cy="841248"/>
+            <a:ext cx="10515600" cy="841248"/>
           </a:xfrm>
           <a:prstGeom prst="roundRect">
             <a:avLst>
@@ -11062,7 +11102,7 @@
         <p:spPr>
           <a:xfrm>
             <a:off x="1691640" y="2185416"/>
-            <a:ext cx="7132320" cy="841248"/>
+            <a:ext cx="9326880" cy="841248"/>
           </a:xfrm>
           <a:prstGeom prst="rect">
             <a:avLst/>
@@ -11100,7 +11140,7 @@
         <p:spPr>
           <a:xfrm>
             <a:off x="822960" y="3008376"/>
-            <a:ext cx="8229600" cy="841248"/>
+            <a:ext cx="10515600" cy="841248"/>
           </a:xfrm>
           <a:prstGeom prst="roundRect">
             <a:avLst>
@@ -11236,7 +11276,7 @@
         <p:spPr>
           <a:xfrm>
             <a:off x="1691640" y="3227832"/>
-            <a:ext cx="7132320" cy="841248"/>
+            <a:ext cx="9326880" cy="841248"/>
           </a:xfrm>
           <a:prstGeom prst="rect">
             <a:avLst/>
@@ -11274,7 +11314,7 @@
         <p:spPr>
           <a:xfrm>
             <a:off x="822960" y="4050792"/>
-            <a:ext cx="8229600" cy="841248"/>
+            <a:ext cx="10515600" cy="841248"/>
           </a:xfrm>
           <a:prstGeom prst="roundRect">
             <a:avLst>
@@ -11410,7 +11450,7 @@
         <p:spPr>
           <a:xfrm>
             <a:off x="1691640" y="4270248"/>
-            <a:ext cx="7132320" cy="841248"/>
+            <a:ext cx="9326880" cy="841248"/>
           </a:xfrm>
           <a:prstGeom prst="rect">
             <a:avLst/>
@@ -11448,7 +11488,7 @@
         <p:spPr>
           <a:xfrm>
             <a:off x="822960" y="5093208"/>
-            <a:ext cx="8229600" cy="841248"/>
+            <a:ext cx="10515600" cy="841248"/>
           </a:xfrm>
           <a:prstGeom prst="roundRect">
             <a:avLst>
@@ -11584,7 +11624,7 @@
         <p:spPr>
           <a:xfrm>
             <a:off x="1691640" y="5312664"/>
-            <a:ext cx="7132320" cy="841248"/>
+            <a:ext cx="9326880" cy="841248"/>
           </a:xfrm>
           <a:prstGeom prst="rect">
             <a:avLst/>
@@ -11729,22 +11769,24 @@
       <p:grpSpPr/>
       <p:pic>
         <p:nvPicPr>
-          <p:cNvPr id="2" name="Picture 1" descr="cover.png"/>
+          <p:cNvPr id="2" name="Picture 1" descr="waves.png"/>
           <p:cNvPicPr>
             <a:picLocks noChangeAspect="1"/>
           </p:cNvPicPr>
           <p:nvPr/>
         </p:nvPicPr>
         <p:blipFill>
-          <a:blip r:embed="rId2"/>
+          <a:blip r:embed="rId2">
+            <a:alphaModFix amt="42000"/>
+          </a:blip>
           <a:stretch>
             <a:fillRect/>
           </a:stretch>
         </p:blipFill>
         <p:spPr>
           <a:xfrm>
-            <a:off x="9418320" y="3657600"/>
-            <a:ext cx="4023360" cy="4023360"/>
+            <a:off x="0" y="0"/>
+            <a:ext cx="12191695" cy="6858000"/>
           </a:xfrm>
           <a:prstGeom prst="rect">
             <a:avLst/>
@@ -11852,7 +11894,7 @@
         <p:spPr>
           <a:xfrm>
             <a:off x="822960" y="1965960"/>
-            <a:ext cx="8229600" cy="841248"/>
+            <a:ext cx="10515600" cy="841248"/>
           </a:xfrm>
           <a:prstGeom prst="roundRect">
             <a:avLst>
@@ -11988,7 +12030,7 @@
         <p:spPr>
           <a:xfrm>
             <a:off x="1691640" y="2185416"/>
-            <a:ext cx="7132320" cy="841248"/>
+            <a:ext cx="9326880" cy="841248"/>
           </a:xfrm>
           <a:prstGeom prst="rect">
             <a:avLst/>
@@ -12026,7 +12068,7 @@
         <p:spPr>
           <a:xfrm>
             <a:off x="822960" y="3008376"/>
-            <a:ext cx="8229600" cy="841248"/>
+            <a:ext cx="10515600" cy="841248"/>
           </a:xfrm>
           <a:prstGeom prst="roundRect">
             <a:avLst>
@@ -12162,7 +12204,7 @@
         <p:spPr>
           <a:xfrm>
             <a:off x="1691640" y="3227832"/>
-            <a:ext cx="7132320" cy="841248"/>
+            <a:ext cx="9326880" cy="841248"/>
           </a:xfrm>
           <a:prstGeom prst="rect">
             <a:avLst/>
@@ -12200,7 +12242,7 @@
         <p:spPr>
           <a:xfrm>
             <a:off x="822960" y="4050792"/>
-            <a:ext cx="8229600" cy="841248"/>
+            <a:ext cx="10515600" cy="841248"/>
           </a:xfrm>
           <a:prstGeom prst="roundRect">
             <a:avLst>
@@ -12336,7 +12378,7 @@
         <p:spPr>
           <a:xfrm>
             <a:off x="1691640" y="4270248"/>
-            <a:ext cx="7132320" cy="841248"/>
+            <a:ext cx="9326880" cy="841248"/>
           </a:xfrm>
           <a:prstGeom prst="rect">
             <a:avLst/>
@@ -12374,7 +12416,7 @@
         <p:spPr>
           <a:xfrm>
             <a:off x="822960" y="5093208"/>
-            <a:ext cx="8229600" cy="841248"/>
+            <a:ext cx="10515600" cy="841248"/>
           </a:xfrm>
           <a:prstGeom prst="roundRect">
             <a:avLst>
@@ -12510,7 +12552,7 @@
         <p:spPr>
           <a:xfrm>
             <a:off x="1691640" y="5312664"/>
-            <a:ext cx="7132320" cy="841248"/>
+            <a:ext cx="9326880" cy="841248"/>
           </a:xfrm>
           <a:prstGeom prst="rect">
             <a:avLst/>
@@ -12655,22 +12697,24 @@
       <p:grpSpPr/>
       <p:pic>
         <p:nvPicPr>
-          <p:cNvPr id="2" name="Picture 1" descr="s2.png"/>
+          <p:cNvPr id="2" name="Picture 1" descr="rings.png"/>
           <p:cNvPicPr>
             <a:picLocks noChangeAspect="1"/>
           </p:cNvPicPr>
           <p:nvPr/>
         </p:nvPicPr>
         <p:blipFill>
-          <a:blip r:embed="rId2"/>
+          <a:blip r:embed="rId2">
+            <a:alphaModFix amt="42000"/>
+          </a:blip>
           <a:stretch>
             <a:fillRect/>
           </a:stretch>
         </p:blipFill>
         <p:spPr>
           <a:xfrm>
-            <a:off x="9418320" y="3657600"/>
-            <a:ext cx="4023360" cy="4023360"/>
+            <a:off x="0" y="0"/>
+            <a:ext cx="12191695" cy="6858000"/>
           </a:xfrm>
           <a:prstGeom prst="rect">
             <a:avLst/>
@@ -12778,7 +12822,7 @@
         <p:spPr>
           <a:xfrm>
             <a:off x="822960" y="1965960"/>
-            <a:ext cx="8229600" cy="841248"/>
+            <a:ext cx="10515600" cy="841248"/>
           </a:xfrm>
           <a:prstGeom prst="roundRect">
             <a:avLst>
@@ -12914,7 +12958,7 @@
         <p:spPr>
           <a:xfrm>
             <a:off x="1691640" y="2185416"/>
-            <a:ext cx="7132320" cy="841248"/>
+            <a:ext cx="9326880" cy="841248"/>
           </a:xfrm>
           <a:prstGeom prst="rect">
             <a:avLst/>
@@ -12952,7 +12996,7 @@
         <p:spPr>
           <a:xfrm>
             <a:off x="822960" y="3008376"/>
-            <a:ext cx="8229600" cy="841248"/>
+            <a:ext cx="10515600" cy="841248"/>
           </a:xfrm>
           <a:prstGeom prst="roundRect">
             <a:avLst>
@@ -13088,7 +13132,7 @@
         <p:spPr>
           <a:xfrm>
             <a:off x="1691640" y="3227832"/>
-            <a:ext cx="7132320" cy="841248"/>
+            <a:ext cx="9326880" cy="841248"/>
           </a:xfrm>
           <a:prstGeom prst="rect">
             <a:avLst/>
@@ -13126,7 +13170,7 @@
         <p:spPr>
           <a:xfrm>
             <a:off x="822960" y="4050792"/>
-            <a:ext cx="8229600" cy="841248"/>
+            <a:ext cx="10515600" cy="841248"/>
           </a:xfrm>
           <a:prstGeom prst="roundRect">
             <a:avLst>
@@ -13262,7 +13306,7 @@
         <p:spPr>
           <a:xfrm>
             <a:off x="1691640" y="4270248"/>
-            <a:ext cx="7132320" cy="841248"/>
+            <a:ext cx="9326880" cy="841248"/>
           </a:xfrm>
           <a:prstGeom prst="rect">
             <a:avLst/>
@@ -13300,7 +13344,7 @@
         <p:spPr>
           <a:xfrm>
             <a:off x="822960" y="5093208"/>
-            <a:ext cx="8229600" cy="841248"/>
+            <a:ext cx="10515600" cy="841248"/>
           </a:xfrm>
           <a:prstGeom prst="roundRect">
             <a:avLst>
@@ -13436,7 +13480,7 @@
         <p:spPr>
           <a:xfrm>
             <a:off x="1691640" y="5312664"/>
-            <a:ext cx="7132320" cy="841248"/>
+            <a:ext cx="9326880" cy="841248"/>
           </a:xfrm>
           <a:prstGeom prst="rect">
             <a:avLst/>
@@ -13581,22 +13625,24 @@
       <p:grpSpPr/>
       <p:pic>
         <p:nvPicPr>
-          <p:cNvPr id="2" name="Picture 1" descr="s2.png"/>
+          <p:cNvPr id="2" name="Picture 1" descr="aurora.png"/>
           <p:cNvPicPr>
             <a:picLocks noChangeAspect="1"/>
           </p:cNvPicPr>
           <p:nvPr/>
         </p:nvPicPr>
         <p:blipFill>
-          <a:blip r:embed="rId2"/>
+          <a:blip r:embed="rId2">
+            <a:alphaModFix amt="42000"/>
+          </a:blip>
           <a:stretch>
             <a:fillRect/>
           </a:stretch>
         </p:blipFill>
         <p:spPr>
           <a:xfrm>
-            <a:off x="9418320" y="3657600"/>
-            <a:ext cx="4023360" cy="4023360"/>
+            <a:off x="0" y="0"/>
+            <a:ext cx="12191695" cy="6858000"/>
           </a:xfrm>
           <a:prstGeom prst="rect">
             <a:avLst/>
@@ -13704,7 +13750,7 @@
         <p:spPr>
           <a:xfrm>
             <a:off x="822960" y="1965960"/>
-            <a:ext cx="8229600" cy="841248"/>
+            <a:ext cx="10515600" cy="841248"/>
           </a:xfrm>
           <a:prstGeom prst="roundRect">
             <a:avLst>
@@ -13840,7 +13886,7 @@
         <p:spPr>
           <a:xfrm>
             <a:off x="1691640" y="2185416"/>
-            <a:ext cx="7132320" cy="841248"/>
+            <a:ext cx="9326880" cy="841248"/>
           </a:xfrm>
           <a:prstGeom prst="rect">
             <a:avLst/>
@@ -13878,7 +13924,7 @@
         <p:spPr>
           <a:xfrm>
             <a:off x="822960" y="3008376"/>
-            <a:ext cx="8229600" cy="841248"/>
+            <a:ext cx="10515600" cy="841248"/>
           </a:xfrm>
           <a:prstGeom prst="roundRect">
             <a:avLst>
@@ -14014,7 +14060,7 @@
         <p:spPr>
           <a:xfrm>
             <a:off x="1691640" y="3227832"/>
-            <a:ext cx="7132320" cy="841248"/>
+            <a:ext cx="9326880" cy="841248"/>
           </a:xfrm>
           <a:prstGeom prst="rect">
             <a:avLst/>
@@ -14052,7 +14098,7 @@
         <p:spPr>
           <a:xfrm>
             <a:off x="822960" y="4050792"/>
-            <a:ext cx="8229600" cy="841248"/>
+            <a:ext cx="10515600" cy="841248"/>
           </a:xfrm>
           <a:prstGeom prst="roundRect">
             <a:avLst>
@@ -14188,7 +14234,7 @@
         <p:spPr>
           <a:xfrm>
             <a:off x="1691640" y="4270248"/>
-            <a:ext cx="7132320" cy="841248"/>
+            <a:ext cx="9326880" cy="841248"/>
           </a:xfrm>
           <a:prstGeom prst="rect">
             <a:avLst/>
@@ -14226,7 +14272,7 @@
         <p:spPr>
           <a:xfrm>
             <a:off x="822960" y="5093208"/>
-            <a:ext cx="8229600" cy="841248"/>
+            <a:ext cx="10515600" cy="841248"/>
           </a:xfrm>
           <a:prstGeom prst="roundRect">
             <a:avLst>
@@ -14362,7 +14408,7 @@
         <p:spPr>
           <a:xfrm>
             <a:off x="1691640" y="5312664"/>
-            <a:ext cx="7132320" cy="841248"/>
+            <a:ext cx="9326880" cy="841248"/>
           </a:xfrm>
           <a:prstGeom prst="rect">
             <a:avLst/>
@@ -14505,9 +14551,35 @@
         <p:nvPr/>
       </p:nvGrpSpPr>
       <p:grpSpPr/>
-      <p:sp>
-        <p:nvSpPr>
-          <p:cNvPr id="2" name="Rounded Rectangle 1"/>
+      <p:pic>
+        <p:nvPicPr>
+          <p:cNvPr id="2" name="Picture 1" descr="bars.png"/>
+          <p:cNvPicPr>
+            <a:picLocks noChangeAspect="1"/>
+          </p:cNvPicPr>
+          <p:nvPr/>
+        </p:nvPicPr>
+        <p:blipFill>
+          <a:blip r:embed="rId2">
+            <a:alphaModFix amt="42000"/>
+          </a:blip>
+          <a:stretch>
+            <a:fillRect/>
+          </a:stretch>
+        </p:blipFill>
+        <p:spPr>
+          <a:xfrm>
+            <a:off x="0" y="0"/>
+            <a:ext cx="12191695" cy="6858000"/>
+          </a:xfrm>
+          <a:prstGeom prst="rect">
+            <a:avLst/>
+          </a:prstGeom>
+        </p:spPr>
+      </p:pic>
+      <p:sp>
+        <p:nvSpPr>
+          <p:cNvPr id="3" name="Rounded Rectangle 2"/>
           <p:cNvSpPr/>
           <p:nvPr/>
         </p:nvSpPr>
@@ -14561,7 +14633,7 @@
       </p:sp>
       <p:sp>
         <p:nvSpPr>
-          <p:cNvPr id="3" name="TextBox 2"/>
+          <p:cNvPr id="4" name="TextBox 3"/>
           <p:cNvSpPr txBox="1"/>
           <p:nvPr/>
         </p:nvSpPr>
@@ -14599,7 +14671,7 @@
       </p:sp>
       <p:sp>
         <p:nvSpPr>
-          <p:cNvPr id="4" name="Rounded Rectangle 3"/>
+          <p:cNvPr id="5" name="Rounded Rectangle 4"/>
           <p:cNvSpPr/>
           <p:nvPr/>
         </p:nvSpPr>
@@ -14645,7 +14717,7 @@
       </p:sp>
       <p:sp>
         <p:nvSpPr>
-          <p:cNvPr id="5" name="TextBox 4"/>
+          <p:cNvPr id="6" name="TextBox 5"/>
           <p:cNvSpPr txBox="1"/>
           <p:nvPr/>
         </p:nvSpPr>
@@ -14683,7 +14755,7 @@
       </p:sp>
       <p:sp>
         <p:nvSpPr>
-          <p:cNvPr id="6" name="Rounded Rectangle 5"/>
+          <p:cNvPr id="7" name="Rounded Rectangle 6"/>
           <p:cNvSpPr/>
           <p:nvPr/>
         </p:nvSpPr>
@@ -14729,7 +14801,7 @@
       </p:sp>
       <p:sp>
         <p:nvSpPr>
-          <p:cNvPr id="7" name="TextBox 6"/>
+          <p:cNvPr id="8" name="TextBox 7"/>
           <p:cNvSpPr txBox="1"/>
           <p:nvPr/>
         </p:nvSpPr>
@@ -14767,7 +14839,7 @@
       </p:sp>
       <p:sp>
         <p:nvSpPr>
-          <p:cNvPr id="8" name="Rounded Rectangle 7"/>
+          <p:cNvPr id="9" name="Rounded Rectangle 8"/>
           <p:cNvSpPr/>
           <p:nvPr/>
         </p:nvSpPr>
@@ -14813,7 +14885,7 @@
       </p:sp>
       <p:sp>
         <p:nvSpPr>
-          <p:cNvPr id="9" name="TextBox 8"/>
+          <p:cNvPr id="10" name="TextBox 9"/>
           <p:cNvSpPr txBox="1"/>
           <p:nvPr/>
         </p:nvSpPr>
@@ -14851,7 +14923,7 @@
       </p:sp>
       <p:sp>
         <p:nvSpPr>
-          <p:cNvPr id="10" name="Rounded Rectangle 9"/>
+          <p:cNvPr id="11" name="Rounded Rectangle 10"/>
           <p:cNvSpPr/>
           <p:nvPr/>
         </p:nvSpPr>
@@ -14897,7 +14969,7 @@
       </p:sp>
       <p:sp>
         <p:nvSpPr>
-          <p:cNvPr id="11" name="TextBox 10"/>
+          <p:cNvPr id="12" name="TextBox 11"/>
           <p:cNvSpPr txBox="1"/>
           <p:nvPr/>
         </p:nvSpPr>
@@ -14935,7 +15007,7 @@
       </p:sp>
       <p:sp>
         <p:nvSpPr>
-          <p:cNvPr id="12" name="TextBox 11"/>
+          <p:cNvPr id="13" name="TextBox 12"/>
           <p:cNvSpPr txBox="1"/>
           <p:nvPr/>
         </p:nvSpPr>
@@ -14973,7 +15045,7 @@
       </p:sp>
       <p:sp>
         <p:nvSpPr>
-          <p:cNvPr id="13" name="TextBox 12"/>
+          <p:cNvPr id="14" name="TextBox 13"/>
           <p:cNvSpPr txBox="1"/>
           <p:nvPr/>
         </p:nvSpPr>
@@ -15049,22 +15121,24 @@
       <p:grpSpPr/>
       <p:pic>
         <p:nvPicPr>
-          <p:cNvPr id="2" name="Picture 1" descr="s7.png"/>
+          <p:cNvPr id="2" name="Picture 1" descr="aurora.png"/>
           <p:cNvPicPr>
             <a:picLocks noChangeAspect="1"/>
           </p:cNvPicPr>
           <p:nvPr/>
         </p:nvPicPr>
         <p:blipFill>
-          <a:blip r:embed="rId2"/>
+          <a:blip r:embed="rId2">
+            <a:alphaModFix amt="42000"/>
+          </a:blip>
           <a:stretch>
             <a:fillRect/>
           </a:stretch>
         </p:blipFill>
         <p:spPr>
           <a:xfrm>
-            <a:off x="9418320" y="3657600"/>
-            <a:ext cx="4023360" cy="4023360"/>
+            <a:off x="0" y="0"/>
+            <a:ext cx="12191695" cy="6858000"/>
           </a:xfrm>
           <a:prstGeom prst="rect">
             <a:avLst/>
@@ -15172,7 +15246,7 @@
         <p:spPr>
           <a:xfrm>
             <a:off x="822960" y="1965960"/>
-            <a:ext cx="8229600" cy="841248"/>
+            <a:ext cx="10515600" cy="841248"/>
           </a:xfrm>
           <a:prstGeom prst="roundRect">
             <a:avLst>
@@ -15308,7 +15382,7 @@
         <p:spPr>
           <a:xfrm>
             <a:off x="1691640" y="2185416"/>
-            <a:ext cx="7132320" cy="841248"/>
+            <a:ext cx="9326880" cy="841248"/>
           </a:xfrm>
           <a:prstGeom prst="rect">
             <a:avLst/>
@@ -15346,7 +15420,7 @@
         <p:spPr>
           <a:xfrm>
             <a:off x="822960" y="3008376"/>
-            <a:ext cx="8229600" cy="841248"/>
+            <a:ext cx="10515600" cy="841248"/>
           </a:xfrm>
           <a:prstGeom prst="roundRect">
             <a:avLst>
@@ -15482,7 +15556,7 @@
         <p:spPr>
           <a:xfrm>
             <a:off x="1691640" y="3227832"/>
-            <a:ext cx="7132320" cy="841248"/>
+            <a:ext cx="9326880" cy="841248"/>
           </a:xfrm>
           <a:prstGeom prst="rect">
             <a:avLst/>
@@ -15520,7 +15594,7 @@
         <p:spPr>
           <a:xfrm>
             <a:off x="822960" y="4050792"/>
-            <a:ext cx="8229600" cy="841248"/>
+            <a:ext cx="10515600" cy="841248"/>
           </a:xfrm>
           <a:prstGeom prst="roundRect">
             <a:avLst>
@@ -15656,7 +15730,7 @@
         <p:spPr>
           <a:xfrm>
             <a:off x="1691640" y="4270248"/>
-            <a:ext cx="7132320" cy="841248"/>
+            <a:ext cx="9326880" cy="841248"/>
           </a:xfrm>
           <a:prstGeom prst="rect">
             <a:avLst/>
@@ -15694,7 +15768,7 @@
         <p:spPr>
           <a:xfrm>
             <a:off x="822960" y="5093208"/>
-            <a:ext cx="8229600" cy="841248"/>
+            <a:ext cx="10515600" cy="841248"/>
           </a:xfrm>
           <a:prstGeom prst="roundRect">
             <a:avLst>
@@ -15830,7 +15904,7 @@
         <p:spPr>
           <a:xfrm>
             <a:off x="1691640" y="5312664"/>
-            <a:ext cx="7132320" cy="841248"/>
+            <a:ext cx="9326880" cy="841248"/>
           </a:xfrm>
           <a:prstGeom prst="rect">
             <a:avLst/>
@@ -15973,9 +16047,35 @@
         <p:nvPr/>
       </p:nvGrpSpPr>
       <p:grpSpPr/>
-      <p:sp>
-        <p:nvSpPr>
-          <p:cNvPr id="2" name="Rounded Rectangle 1"/>
+      <p:pic>
+        <p:nvPicPr>
+          <p:cNvPr id="2" name="Picture 1" descr="bars.png"/>
+          <p:cNvPicPr>
+            <a:picLocks noChangeAspect="1"/>
+          </p:cNvPicPr>
+          <p:nvPr/>
+        </p:nvPicPr>
+        <p:blipFill>
+          <a:blip r:embed="rId2">
+            <a:alphaModFix amt="42000"/>
+          </a:blip>
+          <a:stretch>
+            <a:fillRect/>
+          </a:stretch>
+        </p:blipFill>
+        <p:spPr>
+          <a:xfrm>
+            <a:off x="0" y="0"/>
+            <a:ext cx="12191695" cy="6858000"/>
+          </a:xfrm>
+          <a:prstGeom prst="rect">
+            <a:avLst/>
+          </a:prstGeom>
+        </p:spPr>
+      </p:pic>
+      <p:sp>
+        <p:nvSpPr>
+          <p:cNvPr id="3" name="Rounded Rectangle 2"/>
           <p:cNvSpPr/>
           <p:nvPr/>
         </p:nvSpPr>
@@ -16029,7 +16129,7 @@
       </p:sp>
       <p:sp>
         <p:nvSpPr>
-          <p:cNvPr id="3" name="TextBox 2"/>
+          <p:cNvPr id="4" name="TextBox 3"/>
           <p:cNvSpPr txBox="1"/>
           <p:nvPr/>
         </p:nvSpPr>
@@ -16067,7 +16167,7 @@
       </p:sp>
       <p:sp>
         <p:nvSpPr>
-          <p:cNvPr id="4" name="Rounded Rectangle 3"/>
+          <p:cNvPr id="5" name="Rounded Rectangle 4"/>
           <p:cNvSpPr/>
           <p:nvPr/>
         </p:nvSpPr>
@@ -16113,7 +16213,7 @@
       </p:sp>
       <p:sp>
         <p:nvSpPr>
-          <p:cNvPr id="5" name="TextBox 4"/>
+          <p:cNvPr id="6" name="TextBox 5"/>
           <p:cNvSpPr txBox="1"/>
           <p:nvPr/>
         </p:nvSpPr>
@@ -16151,7 +16251,7 @@
       </p:sp>
       <p:sp>
         <p:nvSpPr>
-          <p:cNvPr id="6" name="Rounded Rectangle 5"/>
+          <p:cNvPr id="7" name="Rounded Rectangle 6"/>
           <p:cNvSpPr/>
           <p:nvPr/>
         </p:nvSpPr>
@@ -16197,7 +16297,7 @@
       </p:sp>
       <p:sp>
         <p:nvSpPr>
-          <p:cNvPr id="7" name="TextBox 6"/>
+          <p:cNvPr id="8" name="TextBox 7"/>
           <p:cNvSpPr txBox="1"/>
           <p:nvPr/>
         </p:nvSpPr>
@@ -16235,7 +16335,7 @@
       </p:sp>
       <p:sp>
         <p:nvSpPr>
-          <p:cNvPr id="8" name="Rounded Rectangle 7"/>
+          <p:cNvPr id="9" name="Rounded Rectangle 8"/>
           <p:cNvSpPr/>
           <p:nvPr/>
         </p:nvSpPr>
@@ -16281,7 +16381,7 @@
       </p:sp>
       <p:sp>
         <p:nvSpPr>
-          <p:cNvPr id="9" name="TextBox 8"/>
+          <p:cNvPr id="10" name="TextBox 9"/>
           <p:cNvSpPr txBox="1"/>
           <p:nvPr/>
         </p:nvSpPr>
@@ -16319,7 +16419,7 @@
       </p:sp>
       <p:sp>
         <p:nvSpPr>
-          <p:cNvPr id="10" name="Rounded Rectangle 9"/>
+          <p:cNvPr id="11" name="Rounded Rectangle 10"/>
           <p:cNvSpPr/>
           <p:nvPr/>
         </p:nvSpPr>
@@ -16365,7 +16465,7 @@
       </p:sp>
       <p:sp>
         <p:nvSpPr>
-          <p:cNvPr id="11" name="TextBox 10"/>
+          <p:cNvPr id="12" name="TextBox 11"/>
           <p:cNvSpPr txBox="1"/>
           <p:nvPr/>
         </p:nvSpPr>
@@ -16403,7 +16503,7 @@
       </p:sp>
       <p:sp>
         <p:nvSpPr>
-          <p:cNvPr id="12" name="TextBox 11"/>
+          <p:cNvPr id="13" name="TextBox 12"/>
           <p:cNvSpPr txBox="1"/>
           <p:nvPr/>
         </p:nvSpPr>
@@ -16441,7 +16541,7 @@
       </p:sp>
       <p:sp>
         <p:nvSpPr>
-          <p:cNvPr id="13" name="TextBox 12"/>
+          <p:cNvPr id="14" name="TextBox 13"/>
           <p:cNvSpPr txBox="1"/>
           <p:nvPr/>
         </p:nvSpPr>
@@ -16517,22 +16617,24 @@
       <p:grpSpPr/>
       <p:pic>
         <p:nvPicPr>
-          <p:cNvPr id="2" name="Picture 1" descr="cover.png"/>
+          <p:cNvPr id="2" name="Picture 1" descr="waves.png"/>
           <p:cNvPicPr>
             <a:picLocks noChangeAspect="1"/>
           </p:cNvPicPr>
           <p:nvPr/>
         </p:nvPicPr>
         <p:blipFill>
-          <a:blip r:embed="rId2"/>
+          <a:blip r:embed="rId2">
+            <a:alphaModFix amt="42000"/>
+          </a:blip>
           <a:stretch>
             <a:fillRect/>
           </a:stretch>
         </p:blipFill>
         <p:spPr>
           <a:xfrm>
-            <a:off x="9418320" y="3657600"/>
-            <a:ext cx="4023360" cy="4023360"/>
+            <a:off x="0" y="0"/>
+            <a:ext cx="12191695" cy="6858000"/>
           </a:xfrm>
           <a:prstGeom prst="rect">
             <a:avLst/>
@@ -16640,7 +16742,7 @@
         <p:spPr>
           <a:xfrm>
             <a:off x="822960" y="1965960"/>
-            <a:ext cx="8229600" cy="841248"/>
+            <a:ext cx="10515600" cy="841248"/>
           </a:xfrm>
           <a:prstGeom prst="roundRect">
             <a:avLst>
@@ -16776,7 +16878,7 @@
         <p:spPr>
           <a:xfrm>
             <a:off x="1691640" y="2185416"/>
-            <a:ext cx="7132320" cy="841248"/>
+            <a:ext cx="9326880" cy="841248"/>
           </a:xfrm>
           <a:prstGeom prst="rect">
             <a:avLst/>
@@ -16814,7 +16916,7 @@
         <p:spPr>
           <a:xfrm>
             <a:off x="822960" y="3008376"/>
-            <a:ext cx="8229600" cy="841248"/>
+            <a:ext cx="10515600" cy="841248"/>
           </a:xfrm>
           <a:prstGeom prst="roundRect">
             <a:avLst>
@@ -16950,7 +17052,7 @@
         <p:spPr>
           <a:xfrm>
             <a:off x="1691640" y="3227832"/>
-            <a:ext cx="7132320" cy="841248"/>
+            <a:ext cx="9326880" cy="841248"/>
           </a:xfrm>
           <a:prstGeom prst="rect">
             <a:avLst/>
@@ -16988,7 +17090,7 @@
         <p:spPr>
           <a:xfrm>
             <a:off x="822960" y="4050792"/>
-            <a:ext cx="8229600" cy="841248"/>
+            <a:ext cx="10515600" cy="841248"/>
           </a:xfrm>
           <a:prstGeom prst="roundRect">
             <a:avLst>
@@ -17124,7 +17226,7 @@
         <p:spPr>
           <a:xfrm>
             <a:off x="1691640" y="4270248"/>
-            <a:ext cx="7132320" cy="841248"/>
+            <a:ext cx="9326880" cy="841248"/>
           </a:xfrm>
           <a:prstGeom prst="rect">
             <a:avLst/>
@@ -17162,7 +17264,7 @@
         <p:spPr>
           <a:xfrm>
             <a:off x="822960" y="5093208"/>
-            <a:ext cx="8229600" cy="841248"/>
+            <a:ext cx="10515600" cy="841248"/>
           </a:xfrm>
           <a:prstGeom prst="roundRect">
             <a:avLst>
@@ -17298,7 +17400,7 @@
         <p:spPr>
           <a:xfrm>
             <a:off x="1691640" y="5312664"/>
-            <a:ext cx="7132320" cy="841248"/>
+            <a:ext cx="9326880" cy="841248"/>
           </a:xfrm>
           <a:prstGeom prst="rect">
             <a:avLst/>

--- a/presentation-limonad/presentation.pptx
+++ b/presentation-limonad/presentation.pptx
@@ -4499,7 +4499,7 @@
     <p:bg>
       <p:bgPr>
         <a:solidFill>
-          <a:srgbClr val="141820"/>
+          <a:srgbClr val="141A12"/>
         </a:solidFill>
         <a:effectLst/>
       </p:bgPr>
@@ -4513,7 +4513,7 @@
       <p:grpSpPr/>
       <p:pic>
         <p:nvPicPr>
-          <p:cNvPr id="2" name="Picture 1" descr="cover.png"/>
+          <p:cNvPr id="2" name="Picture 1" descr="cover-bubbles-D8E04A.png"/>
           <p:cNvPicPr>
             <a:picLocks noChangeAspect="1"/>
           </p:cNvPicPr>
@@ -4554,10 +4554,10 @@
           <a:gradFill rotWithShape="1">
             <a:gsLst>
               <a:gs pos="0">
-                <a:srgbClr val="4C9AFF"/>
+                <a:srgbClr val="D8E04A"/>
               </a:gs>
               <a:gs pos="100000">
-                <a:srgbClr val="7B61FF"/>
+                <a:srgbClr val="F2B705"/>
               </a:gs>
             </a:gsLst>
             <a:lin scaled="0" ang="18900000"/>
@@ -4567,7 +4567,7 @@
           </a:ln>
           <a:effectLst>
             <a:glow rad="177800">
-              <a:srgbClr val="4C9AFF">
+              <a:srgbClr val="D8E04A">
                 <a:alpha val="55000"/>
               </a:srgbClr>
             </a:glow>
@@ -4625,7 +4625,7 @@
             <a:r>
               <a:rPr sz="4600" b="1">
                 <a:solidFill>
-                  <a:srgbClr val="F2F4F8"/>
+                  <a:srgbClr val="F4F7EE"/>
                 </a:solidFill>
               </a:rPr>
               <a:t>Лимонады на натуральном составе</a:t>
@@ -4663,7 +4663,7 @@
             <a:r>
               <a:rPr sz="2000" b="0">
                 <a:solidFill>
-                  <a:srgbClr val="9AA4B2"/>
+                  <a:srgbClr val="A9B49B"/>
                 </a:solidFill>
               </a:rPr>
               <a:t>Предложение для торговых сетей и дистрибьюторов</a:t>
@@ -4697,7 +4697,7 @@
     <p:bg>
       <p:bgPr>
         <a:solidFill>
-          <a:srgbClr val="141820"/>
+          <a:srgbClr val="141A12"/>
         </a:solidFill>
         <a:effectLst/>
       </p:bgPr>
@@ -4711,7 +4711,7 @@
       <p:grpSpPr/>
       <p:pic>
         <p:nvPicPr>
-          <p:cNvPr id="2" name="Picture 1" descr="aurora.png"/>
+          <p:cNvPr id="2" name="Picture 1" descr="grid-D8E04A.png"/>
           <p:cNvPicPr>
             <a:picLocks noChangeAspect="1"/>
           </p:cNvPicPr>
@@ -4754,10 +4754,10 @@
           <a:gradFill rotWithShape="1">
             <a:gsLst>
               <a:gs pos="0">
-                <a:srgbClr val="4C9AFF"/>
+                <a:srgbClr val="D8E04A"/>
               </a:gs>
               <a:gs pos="100000">
-                <a:srgbClr val="7B61FF"/>
+                <a:srgbClr val="F2B705"/>
               </a:gs>
             </a:gsLst>
             <a:lin scaled="0" ang="18900000"/>
@@ -4767,7 +4767,7 @@
           </a:ln>
           <a:effectLst>
             <a:glow rad="127000">
-              <a:srgbClr val="4C9AFF">
+              <a:srgbClr val="D8E04A">
                 <a:alpha val="55000"/>
               </a:srgbClr>
             </a:glow>
@@ -4825,7 +4825,7 @@
             <a:r>
               <a:rPr sz="3200" b="1">
                 <a:solidFill>
-                  <a:srgbClr val="F2F4F8"/>
+                  <a:srgbClr val="F4F7EE"/>
                 </a:solidFill>
               </a:rPr>
               <a:t>Мы не отбираем покупателя у ваших СТМ</a:t>
@@ -4852,10 +4852,10 @@
           <a:gradFill rotWithShape="1">
             <a:gsLst>
               <a:gs pos="0">
-                <a:srgbClr val="1E2430"/>
+                <a:srgbClr val="1D2519"/>
               </a:gs>
               <a:gs pos="100000">
-                <a:srgbClr val="2C3442"/>
+                <a:srgbClr val="2A331F"/>
               </a:gs>
             </a:gsLst>
             <a:lin scaled="0" ang="18900000"/>
@@ -4912,10 +4912,10 @@
           <a:gradFill rotWithShape="1">
             <a:gsLst>
               <a:gs pos="0">
-                <a:srgbClr val="4C9AFF"/>
+                <a:srgbClr val="D8E04A"/>
               </a:gs>
               <a:gs pos="100000">
-                <a:srgbClr val="7B61FF"/>
+                <a:srgbClr val="F2B705"/>
               </a:gs>
             </a:gsLst>
             <a:lin scaled="0" ang="18900000"/>
@@ -4964,10 +4964,10 @@
           <a:gradFill rotWithShape="1">
             <a:gsLst>
               <a:gs pos="0">
-                <a:srgbClr val="4C9AFF"/>
+                <a:srgbClr val="D8E04A"/>
               </a:gs>
               <a:gs pos="100000">
-                <a:srgbClr val="7B61FF"/>
+                <a:srgbClr val="F2B705"/>
               </a:gs>
             </a:gsLst>
             <a:lin scaled="0" ang="19800000"/>
@@ -4977,7 +4977,7 @@
           </a:ln>
           <a:effectLst>
             <a:glow rad="88900">
-              <a:srgbClr val="4C9AFF">
+              <a:srgbClr val="D8E04A">
                 <a:alpha val="38000"/>
               </a:srgbClr>
             </a:glow>
@@ -5035,7 +5035,7 @@
             <a:r>
               <a:rPr sz="1400" b="1">
                 <a:solidFill>
-                  <a:srgbClr val="141820"/>
+                  <a:srgbClr val="141A12"/>
                 </a:solidFill>
               </a:rPr>
               <a:t>1</a:t>
@@ -5073,7 +5073,7 @@
             <a:r>
               <a:rPr sz="1800" b="0">
                 <a:solidFill>
-                  <a:srgbClr val="F2F4F8"/>
+                  <a:srgbClr val="F4F7EE"/>
                 </a:solidFill>
               </a:rPr>
               <a:t>Ценовой сегмент выше эконом-полки</a:t>
@@ -5100,10 +5100,10 @@
           <a:gradFill rotWithShape="1">
             <a:gsLst>
               <a:gs pos="0">
-                <a:srgbClr val="1E2430"/>
+                <a:srgbClr val="1D2519"/>
               </a:gs>
               <a:gs pos="100000">
-                <a:srgbClr val="2C3442"/>
+                <a:srgbClr val="2A331F"/>
               </a:gs>
             </a:gsLst>
             <a:lin scaled="0" ang="18900000"/>
@@ -5160,10 +5160,10 @@
           <a:gradFill rotWithShape="1">
             <a:gsLst>
               <a:gs pos="0">
-                <a:srgbClr val="4C9AFF"/>
+                <a:srgbClr val="D8E04A"/>
               </a:gs>
               <a:gs pos="100000">
-                <a:srgbClr val="7B61FF"/>
+                <a:srgbClr val="F2B705"/>
               </a:gs>
             </a:gsLst>
             <a:lin scaled="0" ang="18900000"/>
@@ -5212,10 +5212,10 @@
           <a:gradFill rotWithShape="1">
             <a:gsLst>
               <a:gs pos="0">
-                <a:srgbClr val="4C9AFF"/>
+                <a:srgbClr val="D8E04A"/>
               </a:gs>
               <a:gs pos="100000">
-                <a:srgbClr val="7B61FF"/>
+                <a:srgbClr val="F2B705"/>
               </a:gs>
             </a:gsLst>
             <a:lin scaled="0" ang="19800000"/>
@@ -5225,7 +5225,7 @@
           </a:ln>
           <a:effectLst>
             <a:glow rad="88900">
-              <a:srgbClr val="4C9AFF">
+              <a:srgbClr val="D8E04A">
                 <a:alpha val="38000"/>
               </a:srgbClr>
             </a:glow>
@@ -5283,7 +5283,7 @@
             <a:r>
               <a:rPr sz="1400" b="1">
                 <a:solidFill>
-                  <a:srgbClr val="141820"/>
+                  <a:srgbClr val="141A12"/>
                 </a:solidFill>
               </a:rPr>
               <a:t>2</a:t>
@@ -5321,7 +5321,7 @@
             <a:r>
               <a:rPr sz="1800" b="0">
                 <a:solidFill>
-                  <a:srgbClr val="F2F4F8"/>
+                  <a:srgbClr val="F4F7EE"/>
                 </a:solidFill>
               </a:rPr>
               <a:t>Прямых аналогов по составу в категории мало</a:t>
@@ -5348,10 +5348,10 @@
           <a:gradFill rotWithShape="1">
             <a:gsLst>
               <a:gs pos="0">
-                <a:srgbClr val="1E2430"/>
+                <a:srgbClr val="1D2519"/>
               </a:gs>
               <a:gs pos="100000">
-                <a:srgbClr val="2C3442"/>
+                <a:srgbClr val="2A331F"/>
               </a:gs>
             </a:gsLst>
             <a:lin scaled="0" ang="18900000"/>
@@ -5408,10 +5408,10 @@
           <a:gradFill rotWithShape="1">
             <a:gsLst>
               <a:gs pos="0">
-                <a:srgbClr val="4C9AFF"/>
+                <a:srgbClr val="D8E04A"/>
               </a:gs>
               <a:gs pos="100000">
-                <a:srgbClr val="7B61FF"/>
+                <a:srgbClr val="F2B705"/>
               </a:gs>
             </a:gsLst>
             <a:lin scaled="0" ang="18900000"/>
@@ -5460,10 +5460,10 @@
           <a:gradFill rotWithShape="1">
             <a:gsLst>
               <a:gs pos="0">
-                <a:srgbClr val="4C9AFF"/>
+                <a:srgbClr val="D8E04A"/>
               </a:gs>
               <a:gs pos="100000">
-                <a:srgbClr val="7B61FF"/>
+                <a:srgbClr val="F2B705"/>
               </a:gs>
             </a:gsLst>
             <a:lin scaled="0" ang="19800000"/>
@@ -5473,7 +5473,7 @@
           </a:ln>
           <a:effectLst>
             <a:glow rad="88900">
-              <a:srgbClr val="4C9AFF">
+              <a:srgbClr val="D8E04A">
                 <a:alpha val="38000"/>
               </a:srgbClr>
             </a:glow>
@@ -5531,7 +5531,7 @@
             <a:r>
               <a:rPr sz="1400" b="1">
                 <a:solidFill>
-                  <a:srgbClr val="141820"/>
+                  <a:srgbClr val="141A12"/>
                 </a:solidFill>
               </a:rPr>
               <a:t>3</a:t>
@@ -5569,7 +5569,7 @@
             <a:r>
               <a:rPr sz="1800" b="0">
                 <a:solidFill>
-                  <a:srgbClr val="F2F4F8"/>
+                  <a:srgbClr val="F4F7EE"/>
                 </a:solidFill>
               </a:rPr>
               <a:t>Дополняем ассортимент, а не дублируем</a:t>
@@ -5596,10 +5596,10 @@
           <a:gradFill rotWithShape="1">
             <a:gsLst>
               <a:gs pos="0">
-                <a:srgbClr val="1E2430"/>
+                <a:srgbClr val="1D2519"/>
               </a:gs>
               <a:gs pos="100000">
-                <a:srgbClr val="2C3442"/>
+                <a:srgbClr val="2A331F"/>
               </a:gs>
             </a:gsLst>
             <a:lin scaled="0" ang="18900000"/>
@@ -5656,10 +5656,10 @@
           <a:gradFill rotWithShape="1">
             <a:gsLst>
               <a:gs pos="0">
-                <a:srgbClr val="4C9AFF"/>
+                <a:srgbClr val="D8E04A"/>
               </a:gs>
               <a:gs pos="100000">
-                <a:srgbClr val="7B61FF"/>
+                <a:srgbClr val="F2B705"/>
               </a:gs>
             </a:gsLst>
             <a:lin scaled="0" ang="18900000"/>
@@ -5708,10 +5708,10 @@
           <a:gradFill rotWithShape="1">
             <a:gsLst>
               <a:gs pos="0">
-                <a:srgbClr val="4C9AFF"/>
+                <a:srgbClr val="D8E04A"/>
               </a:gs>
               <a:gs pos="100000">
-                <a:srgbClr val="7B61FF"/>
+                <a:srgbClr val="F2B705"/>
               </a:gs>
             </a:gsLst>
             <a:lin scaled="0" ang="19800000"/>
@@ -5721,7 +5721,7 @@
           </a:ln>
           <a:effectLst>
             <a:glow rad="88900">
-              <a:srgbClr val="4C9AFF">
+              <a:srgbClr val="D8E04A">
                 <a:alpha val="38000"/>
               </a:srgbClr>
             </a:glow>
@@ -5779,7 +5779,7 @@
             <a:r>
               <a:rPr sz="1400" b="1">
                 <a:solidFill>
-                  <a:srgbClr val="141820"/>
+                  <a:srgbClr val="141A12"/>
                 </a:solidFill>
               </a:rPr>
               <a:t>4</a:t>
@@ -5817,7 +5817,7 @@
             <a:r>
               <a:rPr sz="1800" b="0">
                 <a:solidFill>
-                  <a:srgbClr val="F2F4F8"/>
+                  <a:srgbClr val="F4F7EE"/>
                 </a:solidFill>
               </a:rPr>
               <a:t>Приводим покупателя из соседних категорий</a:t>
@@ -6191,7 +6191,7 @@
     <p:bg>
       <p:bgPr>
         <a:solidFill>
-          <a:srgbClr val="141820"/>
+          <a:srgbClr val="141A12"/>
         </a:solidFill>
         <a:effectLst/>
       </p:bgPr>
@@ -6205,7 +6205,7 @@
       <p:grpSpPr/>
       <p:pic>
         <p:nvPicPr>
-          <p:cNvPr id="2" name="Picture 1" descr="bars.png"/>
+          <p:cNvPr id="2" name="Picture 1" descr="rings-D8E04A.png"/>
           <p:cNvPicPr>
             <a:picLocks noChangeAspect="1"/>
           </p:cNvPicPr>
@@ -6248,10 +6248,10 @@
           <a:gradFill rotWithShape="1">
             <a:gsLst>
               <a:gs pos="0">
-                <a:srgbClr val="4C9AFF"/>
+                <a:srgbClr val="D8E04A"/>
               </a:gs>
               <a:gs pos="100000">
-                <a:srgbClr val="7B61FF"/>
+                <a:srgbClr val="F2B705"/>
               </a:gs>
             </a:gsLst>
             <a:lin scaled="0" ang="18900000"/>
@@ -6261,7 +6261,7 @@
           </a:ln>
           <a:effectLst>
             <a:glow rad="127000">
-              <a:srgbClr val="4C9AFF">
+              <a:srgbClr val="D8E04A">
                 <a:alpha val="55000"/>
               </a:srgbClr>
             </a:glow>
@@ -6319,7 +6319,7 @@
             <a:r>
               <a:rPr sz="3200" b="1">
                 <a:solidFill>
-                  <a:srgbClr val="F2F4F8"/>
+                  <a:srgbClr val="F4F7EE"/>
                 </a:solidFill>
               </a:rPr>
               <a:t>Логистика без сюрпризов</a:t>
@@ -6346,10 +6346,10 @@
           <a:gradFill rotWithShape="1">
             <a:gsLst>
               <a:gs pos="0">
-                <a:srgbClr val="1E2430"/>
+                <a:srgbClr val="1D2519"/>
               </a:gs>
               <a:gs pos="100000">
-                <a:srgbClr val="2C3442"/>
+                <a:srgbClr val="2A331F"/>
               </a:gs>
             </a:gsLst>
             <a:lin scaled="0" ang="18900000"/>
@@ -6406,10 +6406,10 @@
           <a:gradFill rotWithShape="1">
             <a:gsLst>
               <a:gs pos="0">
-                <a:srgbClr val="4C9AFF"/>
+                <a:srgbClr val="D8E04A"/>
               </a:gs>
               <a:gs pos="100000">
-                <a:srgbClr val="7B61FF"/>
+                <a:srgbClr val="F2B705"/>
               </a:gs>
             </a:gsLst>
             <a:lin scaled="0" ang="18900000"/>
@@ -6458,10 +6458,10 @@
           <a:gradFill rotWithShape="1">
             <a:gsLst>
               <a:gs pos="0">
-                <a:srgbClr val="4C9AFF"/>
+                <a:srgbClr val="D8E04A"/>
               </a:gs>
               <a:gs pos="100000">
-                <a:srgbClr val="7B61FF"/>
+                <a:srgbClr val="F2B705"/>
               </a:gs>
             </a:gsLst>
             <a:lin scaled="0" ang="19800000"/>
@@ -6471,7 +6471,7 @@
           </a:ln>
           <a:effectLst>
             <a:glow rad="88900">
-              <a:srgbClr val="4C9AFF">
+              <a:srgbClr val="D8E04A">
                 <a:alpha val="38000"/>
               </a:srgbClr>
             </a:glow>
@@ -6529,7 +6529,7 @@
             <a:r>
               <a:rPr sz="1400" b="1">
                 <a:solidFill>
-                  <a:srgbClr val="141820"/>
+                  <a:srgbClr val="141A12"/>
                 </a:solidFill>
               </a:rPr>
               <a:t>1</a:t>
@@ -6567,7 +6567,7 @@
             <a:r>
               <a:rPr sz="1800" b="0">
                 <a:solidFill>
-                  <a:srgbClr val="F2F4F8"/>
+                  <a:srgbClr val="F4F7EE"/>
                 </a:solidFill>
               </a:rPr>
               <a:t>Собственное производство, контроль объёмов</a:t>
@@ -6594,10 +6594,10 @@
           <a:gradFill rotWithShape="1">
             <a:gsLst>
               <a:gs pos="0">
-                <a:srgbClr val="1E2430"/>
+                <a:srgbClr val="1D2519"/>
               </a:gs>
               <a:gs pos="100000">
-                <a:srgbClr val="2C3442"/>
+                <a:srgbClr val="2A331F"/>
               </a:gs>
             </a:gsLst>
             <a:lin scaled="0" ang="18900000"/>
@@ -6654,10 +6654,10 @@
           <a:gradFill rotWithShape="1">
             <a:gsLst>
               <a:gs pos="0">
-                <a:srgbClr val="4C9AFF"/>
+                <a:srgbClr val="D8E04A"/>
               </a:gs>
               <a:gs pos="100000">
-                <a:srgbClr val="7B61FF"/>
+                <a:srgbClr val="F2B705"/>
               </a:gs>
             </a:gsLst>
             <a:lin scaled="0" ang="18900000"/>
@@ -6706,10 +6706,10 @@
           <a:gradFill rotWithShape="1">
             <a:gsLst>
               <a:gs pos="0">
-                <a:srgbClr val="4C9AFF"/>
+                <a:srgbClr val="D8E04A"/>
               </a:gs>
               <a:gs pos="100000">
-                <a:srgbClr val="7B61FF"/>
+                <a:srgbClr val="F2B705"/>
               </a:gs>
             </a:gsLst>
             <a:lin scaled="0" ang="19800000"/>
@@ -6719,7 +6719,7 @@
           </a:ln>
           <a:effectLst>
             <a:glow rad="88900">
-              <a:srgbClr val="4C9AFF">
+              <a:srgbClr val="D8E04A">
                 <a:alpha val="38000"/>
               </a:srgbClr>
             </a:glow>
@@ -6777,7 +6777,7 @@
             <a:r>
               <a:rPr sz="1400" b="1">
                 <a:solidFill>
-                  <a:srgbClr val="141820"/>
+                  <a:srgbClr val="141A12"/>
                 </a:solidFill>
               </a:rPr>
               <a:t>2</a:t>
@@ -6815,7 +6815,7 @@
             <a:r>
               <a:rPr sz="1800" b="0">
                 <a:solidFill>
-                  <a:srgbClr val="F2F4F8"/>
+                  <a:srgbClr val="F4F7EE"/>
                 </a:solidFill>
               </a:rPr>
               <a:t>Отгрузка от паллеты, срок поставки 5 дней</a:t>
@@ -6842,10 +6842,10 @@
           <a:gradFill rotWithShape="1">
             <a:gsLst>
               <a:gs pos="0">
-                <a:srgbClr val="1E2430"/>
+                <a:srgbClr val="1D2519"/>
               </a:gs>
               <a:gs pos="100000">
-                <a:srgbClr val="2C3442"/>
+                <a:srgbClr val="2A331F"/>
               </a:gs>
             </a:gsLst>
             <a:lin scaled="0" ang="18900000"/>
@@ -6902,10 +6902,10 @@
           <a:gradFill rotWithShape="1">
             <a:gsLst>
               <a:gs pos="0">
-                <a:srgbClr val="4C9AFF"/>
+                <a:srgbClr val="D8E04A"/>
               </a:gs>
               <a:gs pos="100000">
-                <a:srgbClr val="7B61FF"/>
+                <a:srgbClr val="F2B705"/>
               </a:gs>
             </a:gsLst>
             <a:lin scaled="0" ang="18900000"/>
@@ -6954,10 +6954,10 @@
           <a:gradFill rotWithShape="1">
             <a:gsLst>
               <a:gs pos="0">
-                <a:srgbClr val="4C9AFF"/>
+                <a:srgbClr val="D8E04A"/>
               </a:gs>
               <a:gs pos="100000">
-                <a:srgbClr val="7B61FF"/>
+                <a:srgbClr val="F2B705"/>
               </a:gs>
             </a:gsLst>
             <a:lin scaled="0" ang="19800000"/>
@@ -6967,7 +6967,7 @@
           </a:ln>
           <a:effectLst>
             <a:glow rad="88900">
-              <a:srgbClr val="4C9AFF">
+              <a:srgbClr val="D8E04A">
                 <a:alpha val="38000"/>
               </a:srgbClr>
             </a:glow>
@@ -7025,7 +7025,7 @@
             <a:r>
               <a:rPr sz="1400" b="1">
                 <a:solidFill>
-                  <a:srgbClr val="141820"/>
+                  <a:srgbClr val="141A12"/>
                 </a:solidFill>
               </a:rPr>
               <a:t>3</a:t>
@@ -7063,7 +7063,7 @@
             <a:r>
               <a:rPr sz="1800" b="0">
                 <a:solidFill>
-                  <a:srgbClr val="F2F4F8"/>
+                  <a:srgbClr val="F4F7EE"/>
                 </a:solidFill>
               </a:rPr>
               <a:t>Резерв мощностей под сезонный пик</a:t>
@@ -7090,10 +7090,10 @@
           <a:gradFill rotWithShape="1">
             <a:gsLst>
               <a:gs pos="0">
-                <a:srgbClr val="1E2430"/>
+                <a:srgbClr val="1D2519"/>
               </a:gs>
               <a:gs pos="100000">
-                <a:srgbClr val="2C3442"/>
+                <a:srgbClr val="2A331F"/>
               </a:gs>
             </a:gsLst>
             <a:lin scaled="0" ang="18900000"/>
@@ -7150,10 +7150,10 @@
           <a:gradFill rotWithShape="1">
             <a:gsLst>
               <a:gs pos="0">
-                <a:srgbClr val="4C9AFF"/>
+                <a:srgbClr val="D8E04A"/>
               </a:gs>
               <a:gs pos="100000">
-                <a:srgbClr val="7B61FF"/>
+                <a:srgbClr val="F2B705"/>
               </a:gs>
             </a:gsLst>
             <a:lin scaled="0" ang="18900000"/>
@@ -7202,10 +7202,10 @@
           <a:gradFill rotWithShape="1">
             <a:gsLst>
               <a:gs pos="0">
-                <a:srgbClr val="4C9AFF"/>
+                <a:srgbClr val="D8E04A"/>
               </a:gs>
               <a:gs pos="100000">
-                <a:srgbClr val="7B61FF"/>
+                <a:srgbClr val="F2B705"/>
               </a:gs>
             </a:gsLst>
             <a:lin scaled="0" ang="19800000"/>
@@ -7215,7 +7215,7 @@
           </a:ln>
           <a:effectLst>
             <a:glow rad="88900">
-              <a:srgbClr val="4C9AFF">
+              <a:srgbClr val="D8E04A">
                 <a:alpha val="38000"/>
               </a:srgbClr>
             </a:glow>
@@ -7273,7 +7273,7 @@
             <a:r>
               <a:rPr sz="1400" b="1">
                 <a:solidFill>
-                  <a:srgbClr val="141820"/>
+                  <a:srgbClr val="141A12"/>
                 </a:solidFill>
               </a:rPr>
               <a:t>4</a:t>
@@ -7311,7 +7311,7 @@
             <a:r>
               <a:rPr sz="1800" b="0">
                 <a:solidFill>
-                  <a:srgbClr val="F2F4F8"/>
+                  <a:srgbClr val="F4F7EE"/>
                 </a:solidFill>
               </a:rPr>
               <a:t>Работа через РЦ или прямые поставки</a:t>
@@ -7685,7 +7685,7 @@
     <p:bg>
       <p:bgPr>
         <a:solidFill>
-          <a:srgbClr val="141820"/>
+          <a:srgbClr val="141A12"/>
         </a:solidFill>
         <a:effectLst/>
       </p:bgPr>
@@ -7699,7 +7699,7 @@
       <p:grpSpPr/>
       <p:pic>
         <p:nvPicPr>
-          <p:cNvPr id="2" name="Picture 1" descr="mesh.png"/>
+          <p:cNvPr id="2" name="Picture 1" descr="aurora-D8E04A.png"/>
           <p:cNvPicPr>
             <a:picLocks noChangeAspect="1"/>
           </p:cNvPicPr>
@@ -7742,10 +7742,10 @@
           <a:gradFill rotWithShape="1">
             <a:gsLst>
               <a:gs pos="0">
-                <a:srgbClr val="4C9AFF"/>
+                <a:srgbClr val="D8E04A"/>
               </a:gs>
               <a:gs pos="100000">
-                <a:srgbClr val="7B61FF"/>
+                <a:srgbClr val="F2B705"/>
               </a:gs>
             </a:gsLst>
             <a:lin scaled="0" ang="18900000"/>
@@ -7755,7 +7755,7 @@
           </a:ln>
           <a:effectLst>
             <a:glow rad="127000">
-              <a:srgbClr val="4C9AFF">
+              <a:srgbClr val="D8E04A">
                 <a:alpha val="55000"/>
               </a:srgbClr>
             </a:glow>
@@ -7813,7 +7813,7 @@
             <a:r>
               <a:rPr sz="3200" b="1">
                 <a:solidFill>
-                  <a:srgbClr val="F2F4F8"/>
+                  <a:srgbClr val="F4F7EE"/>
                 </a:solidFill>
               </a:rPr>
               <a:t>Маркетинг, который мы берём на себя</a:t>
@@ -7840,10 +7840,10 @@
           <a:gradFill rotWithShape="1">
             <a:gsLst>
               <a:gs pos="0">
-                <a:srgbClr val="1E2430"/>
+                <a:srgbClr val="1D2519"/>
               </a:gs>
               <a:gs pos="100000">
-                <a:srgbClr val="2C3442"/>
+                <a:srgbClr val="2A331F"/>
               </a:gs>
             </a:gsLst>
             <a:lin scaled="0" ang="18900000"/>
@@ -7900,10 +7900,10 @@
           <a:gradFill rotWithShape="1">
             <a:gsLst>
               <a:gs pos="0">
-                <a:srgbClr val="4C9AFF"/>
+                <a:srgbClr val="D8E04A"/>
               </a:gs>
               <a:gs pos="100000">
-                <a:srgbClr val="7B61FF"/>
+                <a:srgbClr val="F2B705"/>
               </a:gs>
             </a:gsLst>
             <a:lin scaled="0" ang="18900000"/>
@@ -7952,10 +7952,10 @@
           <a:gradFill rotWithShape="1">
             <a:gsLst>
               <a:gs pos="0">
-                <a:srgbClr val="4C9AFF"/>
+                <a:srgbClr val="D8E04A"/>
               </a:gs>
               <a:gs pos="100000">
-                <a:srgbClr val="7B61FF"/>
+                <a:srgbClr val="F2B705"/>
               </a:gs>
             </a:gsLst>
             <a:lin scaled="0" ang="19800000"/>
@@ -7965,7 +7965,7 @@
           </a:ln>
           <a:effectLst>
             <a:glow rad="88900">
-              <a:srgbClr val="4C9AFF">
+              <a:srgbClr val="D8E04A">
                 <a:alpha val="38000"/>
               </a:srgbClr>
             </a:glow>
@@ -8023,7 +8023,7 @@
             <a:r>
               <a:rPr sz="1400" b="1">
                 <a:solidFill>
-                  <a:srgbClr val="141820"/>
+                  <a:srgbClr val="141A12"/>
                 </a:solidFill>
               </a:rPr>
               <a:t>1</a:t>
@@ -8061,7 +8061,7 @@
             <a:r>
               <a:rPr sz="1800" b="0">
                 <a:solidFill>
-                  <a:srgbClr val="F2F4F8"/>
+                  <a:srgbClr val="F4F7EE"/>
                 </a:solidFill>
               </a:rPr>
               <a:t>Дегустации в первый месяц запуска</a:t>
@@ -8088,10 +8088,10 @@
           <a:gradFill rotWithShape="1">
             <a:gsLst>
               <a:gs pos="0">
-                <a:srgbClr val="1E2430"/>
+                <a:srgbClr val="1D2519"/>
               </a:gs>
               <a:gs pos="100000">
-                <a:srgbClr val="2C3442"/>
+                <a:srgbClr val="2A331F"/>
               </a:gs>
             </a:gsLst>
             <a:lin scaled="0" ang="18900000"/>
@@ -8148,10 +8148,10 @@
           <a:gradFill rotWithShape="1">
             <a:gsLst>
               <a:gs pos="0">
-                <a:srgbClr val="4C9AFF"/>
+                <a:srgbClr val="D8E04A"/>
               </a:gs>
               <a:gs pos="100000">
-                <a:srgbClr val="7B61FF"/>
+                <a:srgbClr val="F2B705"/>
               </a:gs>
             </a:gsLst>
             <a:lin scaled="0" ang="18900000"/>
@@ -8200,10 +8200,10 @@
           <a:gradFill rotWithShape="1">
             <a:gsLst>
               <a:gs pos="0">
-                <a:srgbClr val="4C9AFF"/>
+                <a:srgbClr val="D8E04A"/>
               </a:gs>
               <a:gs pos="100000">
-                <a:srgbClr val="7B61FF"/>
+                <a:srgbClr val="F2B705"/>
               </a:gs>
             </a:gsLst>
             <a:lin scaled="0" ang="19800000"/>
@@ -8213,7 +8213,7 @@
           </a:ln>
           <a:effectLst>
             <a:glow rad="88900">
-              <a:srgbClr val="4C9AFF">
+              <a:srgbClr val="D8E04A">
                 <a:alpha val="38000"/>
               </a:srgbClr>
             </a:glow>
@@ -8271,7 +8271,7 @@
             <a:r>
               <a:rPr sz="1400" b="1">
                 <a:solidFill>
-                  <a:srgbClr val="141820"/>
+                  <a:srgbClr val="141A12"/>
                 </a:solidFill>
               </a:rPr>
               <a:t>2</a:t>
@@ -8309,7 +8309,7 @@
             <a:r>
               <a:rPr sz="1800" b="0">
                 <a:solidFill>
-                  <a:srgbClr val="F2F4F8"/>
+                  <a:srgbClr val="F4F7EE"/>
                 </a:solidFill>
               </a:rPr>
               <a:t>Промо-поддержка и брендированные POS-материалы</a:t>
@@ -8336,10 +8336,10 @@
           <a:gradFill rotWithShape="1">
             <a:gsLst>
               <a:gs pos="0">
-                <a:srgbClr val="1E2430"/>
+                <a:srgbClr val="1D2519"/>
               </a:gs>
               <a:gs pos="100000">
-                <a:srgbClr val="2C3442"/>
+                <a:srgbClr val="2A331F"/>
               </a:gs>
             </a:gsLst>
             <a:lin scaled="0" ang="18900000"/>
@@ -8396,10 +8396,10 @@
           <a:gradFill rotWithShape="1">
             <a:gsLst>
               <a:gs pos="0">
-                <a:srgbClr val="4C9AFF"/>
+                <a:srgbClr val="D8E04A"/>
               </a:gs>
               <a:gs pos="100000">
-                <a:srgbClr val="7B61FF"/>
+                <a:srgbClr val="F2B705"/>
               </a:gs>
             </a:gsLst>
             <a:lin scaled="0" ang="18900000"/>
@@ -8448,10 +8448,10 @@
           <a:gradFill rotWithShape="1">
             <a:gsLst>
               <a:gs pos="0">
-                <a:srgbClr val="4C9AFF"/>
+                <a:srgbClr val="D8E04A"/>
               </a:gs>
               <a:gs pos="100000">
-                <a:srgbClr val="7B61FF"/>
+                <a:srgbClr val="F2B705"/>
               </a:gs>
             </a:gsLst>
             <a:lin scaled="0" ang="19800000"/>
@@ -8461,7 +8461,7 @@
           </a:ln>
           <a:effectLst>
             <a:glow rad="88900">
-              <a:srgbClr val="4C9AFF">
+              <a:srgbClr val="D8E04A">
                 <a:alpha val="38000"/>
               </a:srgbClr>
             </a:glow>
@@ -8519,7 +8519,7 @@
             <a:r>
               <a:rPr sz="1400" b="1">
                 <a:solidFill>
-                  <a:srgbClr val="141820"/>
+                  <a:srgbClr val="141A12"/>
                 </a:solidFill>
               </a:rPr>
               <a:t>3</a:t>
@@ -8557,7 +8557,7 @@
             <a:r>
               <a:rPr sz="1800" b="0">
                 <a:solidFill>
-                  <a:srgbClr val="F2F4F8"/>
+                  <a:srgbClr val="F4F7EE"/>
                 </a:solidFill>
               </a:rPr>
               <a:t>Digital-кампания с гео на города присутствия</a:t>
@@ -8584,10 +8584,10 @@
           <a:gradFill rotWithShape="1">
             <a:gsLst>
               <a:gs pos="0">
-                <a:srgbClr val="1E2430"/>
+                <a:srgbClr val="1D2519"/>
               </a:gs>
               <a:gs pos="100000">
-                <a:srgbClr val="2C3442"/>
+                <a:srgbClr val="2A331F"/>
               </a:gs>
             </a:gsLst>
             <a:lin scaled="0" ang="18900000"/>
@@ -8644,10 +8644,10 @@
           <a:gradFill rotWithShape="1">
             <a:gsLst>
               <a:gs pos="0">
-                <a:srgbClr val="4C9AFF"/>
+                <a:srgbClr val="D8E04A"/>
               </a:gs>
               <a:gs pos="100000">
-                <a:srgbClr val="7B61FF"/>
+                <a:srgbClr val="F2B705"/>
               </a:gs>
             </a:gsLst>
             <a:lin scaled="0" ang="18900000"/>
@@ -8696,10 +8696,10 @@
           <a:gradFill rotWithShape="1">
             <a:gsLst>
               <a:gs pos="0">
-                <a:srgbClr val="4C9AFF"/>
+                <a:srgbClr val="D8E04A"/>
               </a:gs>
               <a:gs pos="100000">
-                <a:srgbClr val="7B61FF"/>
+                <a:srgbClr val="F2B705"/>
               </a:gs>
             </a:gsLst>
             <a:lin scaled="0" ang="19800000"/>
@@ -8709,7 +8709,7 @@
           </a:ln>
           <a:effectLst>
             <a:glow rad="88900">
-              <a:srgbClr val="4C9AFF">
+              <a:srgbClr val="D8E04A">
                 <a:alpha val="38000"/>
               </a:srgbClr>
             </a:glow>
@@ -8767,7 +8767,7 @@
             <a:r>
               <a:rPr sz="1400" b="1">
                 <a:solidFill>
-                  <a:srgbClr val="141820"/>
+                  <a:srgbClr val="141A12"/>
                 </a:solidFill>
               </a:rPr>
               <a:t>4</a:t>
@@ -8805,7 +8805,7 @@
             <a:r>
               <a:rPr sz="1800" b="0">
                 <a:solidFill>
-                  <a:srgbClr val="F2F4F8"/>
+                  <a:srgbClr val="F4F7EE"/>
                 </a:solidFill>
               </a:rPr>
               <a:t>Совместные акции под календарь сети</a:t>
@@ -9179,7 +9179,7 @@
     <p:bg>
       <p:bgPr>
         <a:solidFill>
-          <a:srgbClr val="141820"/>
+          <a:srgbClr val="141A12"/>
         </a:solidFill>
         <a:effectLst/>
       </p:bgPr>
@@ -9193,7 +9193,7 @@
       <p:grpSpPr/>
       <p:pic>
         <p:nvPicPr>
-          <p:cNvPr id="2" name="Picture 1" descr="grid.png"/>
+          <p:cNvPr id="2" name="Picture 1" descr="waves-D8E04A.png"/>
           <p:cNvPicPr>
             <a:picLocks noChangeAspect="1"/>
           </p:cNvPicPr>
@@ -9236,10 +9236,10 @@
           <a:gradFill rotWithShape="1">
             <a:gsLst>
               <a:gs pos="0">
-                <a:srgbClr val="4C9AFF"/>
+                <a:srgbClr val="D8E04A"/>
               </a:gs>
               <a:gs pos="100000">
-                <a:srgbClr val="7B61FF"/>
+                <a:srgbClr val="F2B705"/>
               </a:gs>
             </a:gsLst>
             <a:lin scaled="0" ang="18900000"/>
@@ -9249,7 +9249,7 @@
           </a:ln>
           <a:effectLst>
             <a:glow rad="127000">
-              <a:srgbClr val="4C9AFF">
+              <a:srgbClr val="D8E04A">
                 <a:alpha val="55000"/>
               </a:srgbClr>
             </a:glow>
@@ -9307,7 +9307,7 @@
             <a:r>
               <a:rPr sz="3200" b="1">
                 <a:solidFill>
-                  <a:srgbClr val="F2F4F8"/>
+                  <a:srgbClr val="F4F7EE"/>
                 </a:solidFill>
               </a:rPr>
               <a:t>Упаковка работает как реклама на полке</a:t>
@@ -9334,10 +9334,10 @@
           <a:gradFill rotWithShape="1">
             <a:gsLst>
               <a:gs pos="0">
-                <a:srgbClr val="1E2430"/>
+                <a:srgbClr val="1D2519"/>
               </a:gs>
               <a:gs pos="100000">
-                <a:srgbClr val="2C3442"/>
+                <a:srgbClr val="2A331F"/>
               </a:gs>
             </a:gsLst>
             <a:lin scaled="0" ang="18900000"/>
@@ -9394,10 +9394,10 @@
           <a:gradFill rotWithShape="1">
             <a:gsLst>
               <a:gs pos="0">
-                <a:srgbClr val="4C9AFF"/>
+                <a:srgbClr val="D8E04A"/>
               </a:gs>
               <a:gs pos="100000">
-                <a:srgbClr val="7B61FF"/>
+                <a:srgbClr val="F2B705"/>
               </a:gs>
             </a:gsLst>
             <a:lin scaled="0" ang="18900000"/>
@@ -9446,10 +9446,10 @@
           <a:gradFill rotWithShape="1">
             <a:gsLst>
               <a:gs pos="0">
-                <a:srgbClr val="4C9AFF"/>
+                <a:srgbClr val="D8E04A"/>
               </a:gs>
               <a:gs pos="100000">
-                <a:srgbClr val="7B61FF"/>
+                <a:srgbClr val="F2B705"/>
               </a:gs>
             </a:gsLst>
             <a:lin scaled="0" ang="19800000"/>
@@ -9459,7 +9459,7 @@
           </a:ln>
           <a:effectLst>
             <a:glow rad="88900">
-              <a:srgbClr val="4C9AFF">
+              <a:srgbClr val="D8E04A">
                 <a:alpha val="38000"/>
               </a:srgbClr>
             </a:glow>
@@ -9517,7 +9517,7 @@
             <a:r>
               <a:rPr sz="1400" b="1">
                 <a:solidFill>
-                  <a:srgbClr val="141820"/>
+                  <a:srgbClr val="141A12"/>
                 </a:solidFill>
               </a:rPr>
               <a:t>1</a:t>
@@ -9555,7 +9555,7 @@
             <a:r>
               <a:rPr sz="1800" b="0">
                 <a:solidFill>
-                  <a:srgbClr val="F2F4F8"/>
+                  <a:srgbClr val="F4F7EE"/>
                 </a:solidFill>
               </a:rPr>
               <a:t>Яркий цветовой код по каждому вкусу</a:t>
@@ -9582,10 +9582,10 @@
           <a:gradFill rotWithShape="1">
             <a:gsLst>
               <a:gs pos="0">
-                <a:srgbClr val="1E2430"/>
+                <a:srgbClr val="1D2519"/>
               </a:gs>
               <a:gs pos="100000">
-                <a:srgbClr val="2C3442"/>
+                <a:srgbClr val="2A331F"/>
               </a:gs>
             </a:gsLst>
             <a:lin scaled="0" ang="18900000"/>
@@ -9642,10 +9642,10 @@
           <a:gradFill rotWithShape="1">
             <a:gsLst>
               <a:gs pos="0">
-                <a:srgbClr val="4C9AFF"/>
+                <a:srgbClr val="D8E04A"/>
               </a:gs>
               <a:gs pos="100000">
-                <a:srgbClr val="7B61FF"/>
+                <a:srgbClr val="F2B705"/>
               </a:gs>
             </a:gsLst>
             <a:lin scaled="0" ang="18900000"/>
@@ -9694,10 +9694,10 @@
           <a:gradFill rotWithShape="1">
             <a:gsLst>
               <a:gs pos="0">
-                <a:srgbClr val="4C9AFF"/>
+                <a:srgbClr val="D8E04A"/>
               </a:gs>
               <a:gs pos="100000">
-                <a:srgbClr val="7B61FF"/>
+                <a:srgbClr val="F2B705"/>
               </a:gs>
             </a:gsLst>
             <a:lin scaled="0" ang="19800000"/>
@@ -9707,7 +9707,7 @@
           </a:ln>
           <a:effectLst>
             <a:glow rad="88900">
-              <a:srgbClr val="4C9AFF">
+              <a:srgbClr val="D8E04A">
                 <a:alpha val="38000"/>
               </a:srgbClr>
             </a:glow>
@@ -9765,7 +9765,7 @@
             <a:r>
               <a:rPr sz="1400" b="1">
                 <a:solidFill>
-                  <a:srgbClr val="141820"/>
+                  <a:srgbClr val="141A12"/>
                 </a:solidFill>
               </a:rPr>
               <a:t>2</a:t>
@@ -9803,7 +9803,7 @@
             <a:r>
               <a:rPr sz="1800" b="0">
                 <a:solidFill>
-                  <a:srgbClr val="F2F4F8"/>
+                  <a:srgbClr val="F4F7EE"/>
                 </a:solidFill>
               </a:rPr>
               <a:t>Состав вынесен на лицевую сторону</a:t>
@@ -9830,10 +9830,10 @@
           <a:gradFill rotWithShape="1">
             <a:gsLst>
               <a:gs pos="0">
-                <a:srgbClr val="1E2430"/>
+                <a:srgbClr val="1D2519"/>
               </a:gs>
               <a:gs pos="100000">
-                <a:srgbClr val="2C3442"/>
+                <a:srgbClr val="2A331F"/>
               </a:gs>
             </a:gsLst>
             <a:lin scaled="0" ang="18900000"/>
@@ -9890,10 +9890,10 @@
           <a:gradFill rotWithShape="1">
             <a:gsLst>
               <a:gs pos="0">
-                <a:srgbClr val="4C9AFF"/>
+                <a:srgbClr val="D8E04A"/>
               </a:gs>
               <a:gs pos="100000">
-                <a:srgbClr val="7B61FF"/>
+                <a:srgbClr val="F2B705"/>
               </a:gs>
             </a:gsLst>
             <a:lin scaled="0" ang="18900000"/>
@@ -9942,10 +9942,10 @@
           <a:gradFill rotWithShape="1">
             <a:gsLst>
               <a:gs pos="0">
-                <a:srgbClr val="4C9AFF"/>
+                <a:srgbClr val="D8E04A"/>
               </a:gs>
               <a:gs pos="100000">
-                <a:srgbClr val="7B61FF"/>
+                <a:srgbClr val="F2B705"/>
               </a:gs>
             </a:gsLst>
             <a:lin scaled="0" ang="19800000"/>
@@ -9955,7 +9955,7 @@
           </a:ln>
           <a:effectLst>
             <a:glow rad="88900">
-              <a:srgbClr val="4C9AFF">
+              <a:srgbClr val="D8E04A">
                 <a:alpha val="38000"/>
               </a:srgbClr>
             </a:glow>
@@ -10013,7 +10013,7 @@
             <a:r>
               <a:rPr sz="1400" b="1">
                 <a:solidFill>
-                  <a:srgbClr val="141820"/>
+                  <a:srgbClr val="141A12"/>
                 </a:solidFill>
               </a:rPr>
               <a:t>3</a:t>
@@ -10051,7 +10051,7 @@
             <a:r>
               <a:rPr sz="1800" b="0">
                 <a:solidFill>
-                  <a:srgbClr val="F2F4F8"/>
+                  <a:srgbClr val="F4F7EE"/>
                 </a:solidFill>
               </a:rPr>
               <a:t>Стекло 0.33 выглядит дороже своей цены</a:t>
@@ -10078,10 +10078,10 @@
           <a:gradFill rotWithShape="1">
             <a:gsLst>
               <a:gs pos="0">
-                <a:srgbClr val="1E2430"/>
+                <a:srgbClr val="1D2519"/>
               </a:gs>
               <a:gs pos="100000">
-                <a:srgbClr val="2C3442"/>
+                <a:srgbClr val="2A331F"/>
               </a:gs>
             </a:gsLst>
             <a:lin scaled="0" ang="18900000"/>
@@ -10138,10 +10138,10 @@
           <a:gradFill rotWithShape="1">
             <a:gsLst>
               <a:gs pos="0">
-                <a:srgbClr val="4C9AFF"/>
+                <a:srgbClr val="D8E04A"/>
               </a:gs>
               <a:gs pos="100000">
-                <a:srgbClr val="7B61FF"/>
+                <a:srgbClr val="F2B705"/>
               </a:gs>
             </a:gsLst>
             <a:lin scaled="0" ang="18900000"/>
@@ -10190,10 +10190,10 @@
           <a:gradFill rotWithShape="1">
             <a:gsLst>
               <a:gs pos="0">
-                <a:srgbClr val="4C9AFF"/>
+                <a:srgbClr val="D8E04A"/>
               </a:gs>
               <a:gs pos="100000">
-                <a:srgbClr val="7B61FF"/>
+                <a:srgbClr val="F2B705"/>
               </a:gs>
             </a:gsLst>
             <a:lin scaled="0" ang="19800000"/>
@@ -10203,7 +10203,7 @@
           </a:ln>
           <a:effectLst>
             <a:glow rad="88900">
-              <a:srgbClr val="4C9AFF">
+              <a:srgbClr val="D8E04A">
                 <a:alpha val="38000"/>
               </a:srgbClr>
             </a:glow>
@@ -10261,7 +10261,7 @@
             <a:r>
               <a:rPr sz="1400" b="1">
                 <a:solidFill>
-                  <a:srgbClr val="141820"/>
+                  <a:srgbClr val="141A12"/>
                 </a:solidFill>
               </a:rPr>
               <a:t>4</a:t>
@@ -10299,7 +10299,7 @@
             <a:r>
               <a:rPr sz="1800" b="0">
                 <a:solidFill>
-                  <a:srgbClr val="F2F4F8"/>
+                  <a:srgbClr val="F4F7EE"/>
                 </a:solidFill>
               </a:rPr>
               <a:t>Тестировали дизайн на фокус-группах</a:t>
@@ -10673,7 +10673,7 @@
     <p:bg>
       <p:bgPr>
         <a:solidFill>
-          <a:srgbClr val="141820"/>
+          <a:srgbClr val="141A12"/>
         </a:solidFill>
         <a:effectLst/>
       </p:bgPr>
@@ -10687,7 +10687,7 @@
       <p:grpSpPr/>
       <p:pic>
         <p:nvPicPr>
-          <p:cNvPr id="2" name="Picture 1" descr="bars.png"/>
+          <p:cNvPr id="2" name="Picture 1" descr="bars-D8E04A.png"/>
           <p:cNvPicPr>
             <a:picLocks noChangeAspect="1"/>
           </p:cNvPicPr>
@@ -10730,10 +10730,10 @@
           <a:gradFill rotWithShape="1">
             <a:gsLst>
               <a:gs pos="0">
-                <a:srgbClr val="4C9AFF"/>
+                <a:srgbClr val="D8E04A"/>
               </a:gs>
               <a:gs pos="100000">
-                <a:srgbClr val="7B61FF"/>
+                <a:srgbClr val="F2B705"/>
               </a:gs>
             </a:gsLst>
             <a:lin scaled="0" ang="18900000"/>
@@ -10743,7 +10743,7 @@
           </a:ln>
           <a:effectLst>
             <a:glow rad="127000">
-              <a:srgbClr val="4C9AFF">
+              <a:srgbClr val="D8E04A">
                 <a:alpha val="55000"/>
               </a:srgbClr>
             </a:glow>
@@ -10801,7 +10801,7 @@
             <a:r>
               <a:rPr sz="3200" b="1">
                 <a:solidFill>
-                  <a:srgbClr val="F2F4F8"/>
+                  <a:srgbClr val="F4F7EE"/>
                 </a:solidFill>
               </a:rPr>
               <a:t>Экономика полки в цифрах</a:t>
@@ -10828,10 +10828,10 @@
           <a:gradFill rotWithShape="1">
             <a:gsLst>
               <a:gs pos="0">
-                <a:srgbClr val="1E2430"/>
+                <a:srgbClr val="1D2519"/>
               </a:gs>
               <a:gs pos="100000">
-                <a:srgbClr val="2C3442"/>
+                <a:srgbClr val="2A331F"/>
               </a:gs>
             </a:gsLst>
             <a:lin scaled="0" ang="18900000"/>
@@ -10899,7 +10899,7 @@
             <a:r>
               <a:rPr sz="3400" b="1">
                 <a:solidFill>
-                  <a:srgbClr val="4C9AFF"/>
+                  <a:srgbClr val="D8E04A"/>
                 </a:solidFill>
               </a:rPr>
               <a:t>35% наценка сети</a:t>
@@ -10926,10 +10926,10 @@
           <a:gradFill rotWithShape="1">
             <a:gsLst>
               <a:gs pos="0">
-                <a:srgbClr val="1E2430"/>
+                <a:srgbClr val="1D2519"/>
               </a:gs>
               <a:gs pos="100000">
-                <a:srgbClr val="2C3442"/>
+                <a:srgbClr val="2A331F"/>
               </a:gs>
             </a:gsLst>
             <a:lin scaled="0" ang="18900000"/>
@@ -10997,7 +10997,7 @@
             <a:r>
               <a:rPr sz="3400" b="1">
                 <a:solidFill>
-                  <a:srgbClr val="4C9AFF"/>
+                  <a:srgbClr val="D8E04A"/>
                 </a:solidFill>
               </a:rPr>
               <a:t>30 упаковок минимальная партия отгрузки</a:t>
@@ -11024,10 +11024,10 @@
           <a:gradFill rotWithShape="1">
             <a:gsLst>
               <a:gs pos="0">
-                <a:srgbClr val="1E2430"/>
+                <a:srgbClr val="1D2519"/>
               </a:gs>
               <a:gs pos="100000">
-                <a:srgbClr val="2C3442"/>
+                <a:srgbClr val="2A331F"/>
               </a:gs>
             </a:gsLst>
             <a:lin scaled="0" ang="18900000"/>
@@ -11095,7 +11095,7 @@
             <a:r>
               <a:rPr sz="3400" b="1">
                 <a:solidFill>
-                  <a:srgbClr val="4C9AFF"/>
+                  <a:srgbClr val="D8E04A"/>
                 </a:solidFill>
               </a:rPr>
               <a:t>6 SKU на 1 полкометр</a:t>
@@ -11122,10 +11122,10 @@
           <a:gradFill rotWithShape="1">
             <a:gsLst>
               <a:gs pos="0">
-                <a:srgbClr val="1E2430"/>
+                <a:srgbClr val="1D2519"/>
               </a:gs>
               <a:gs pos="100000">
-                <a:srgbClr val="2C3442"/>
+                <a:srgbClr val="2A331F"/>
               </a:gs>
             </a:gsLst>
             <a:lin scaled="0" ang="18900000"/>
@@ -11193,7 +11193,7 @@
             <a:r>
               <a:rPr sz="3400" b="1">
                 <a:solidFill>
-                  <a:srgbClr val="4C9AFF"/>
+                  <a:srgbClr val="D8E04A"/>
                 </a:solidFill>
               </a:rPr>
               <a:t>5 дней срок поставки</a:t>
@@ -11567,7 +11567,7 @@
     <p:bg>
       <p:bgPr>
         <a:solidFill>
-          <a:srgbClr val="141820"/>
+          <a:srgbClr val="141A12"/>
         </a:solidFill>
         <a:effectLst/>
       </p:bgPr>
@@ -11581,7 +11581,7 @@
       <p:grpSpPr/>
       <p:pic>
         <p:nvPicPr>
-          <p:cNvPr id="2" name="Picture 1" descr="rings.png"/>
+          <p:cNvPr id="2" name="Picture 1" descr="rings-D8E04A.png"/>
           <p:cNvPicPr>
             <a:picLocks noChangeAspect="1"/>
           </p:cNvPicPr>
@@ -11624,10 +11624,10 @@
           <a:gradFill rotWithShape="1">
             <a:gsLst>
               <a:gs pos="0">
-                <a:srgbClr val="4C9AFF"/>
+                <a:srgbClr val="D8E04A"/>
               </a:gs>
               <a:gs pos="100000">
-                <a:srgbClr val="7B61FF"/>
+                <a:srgbClr val="F2B705"/>
               </a:gs>
             </a:gsLst>
             <a:lin scaled="0" ang="18900000"/>
@@ -11637,7 +11637,7 @@
           </a:ln>
           <a:effectLst>
             <a:glow rad="127000">
-              <a:srgbClr val="4C9AFF">
+              <a:srgbClr val="D8E04A">
                 <a:alpha val="55000"/>
               </a:srgbClr>
             </a:glow>
@@ -11695,7 +11695,7 @@
             <a:r>
               <a:rPr sz="3200" b="1">
                 <a:solidFill>
-                  <a:srgbClr val="F2F4F8"/>
+                  <a:srgbClr val="F4F7EE"/>
                 </a:solidFill>
               </a:rPr>
               <a:t>Три шага до первой отгрузки</a:t>
@@ -11722,10 +11722,10 @@
           <a:gradFill rotWithShape="1">
             <a:gsLst>
               <a:gs pos="0">
-                <a:srgbClr val="1E2430"/>
+                <a:srgbClr val="1D2519"/>
               </a:gs>
               <a:gs pos="100000">
-                <a:srgbClr val="2C3442"/>
+                <a:srgbClr val="2A331F"/>
               </a:gs>
             </a:gsLst>
             <a:lin scaled="0" ang="18900000"/>
@@ -11782,10 +11782,10 @@
           <a:gradFill rotWithShape="1">
             <a:gsLst>
               <a:gs pos="0">
-                <a:srgbClr val="4C9AFF"/>
+                <a:srgbClr val="D8E04A"/>
               </a:gs>
               <a:gs pos="100000">
-                <a:srgbClr val="7B61FF"/>
+                <a:srgbClr val="F2B705"/>
               </a:gs>
             </a:gsLst>
             <a:lin scaled="0" ang="18900000"/>
@@ -11834,10 +11834,10 @@
           <a:gradFill rotWithShape="1">
             <a:gsLst>
               <a:gs pos="0">
-                <a:srgbClr val="4C9AFF"/>
+                <a:srgbClr val="D8E04A"/>
               </a:gs>
               <a:gs pos="100000">
-                <a:srgbClr val="7B61FF"/>
+                <a:srgbClr val="F2B705"/>
               </a:gs>
             </a:gsLst>
             <a:lin scaled="0" ang="19800000"/>
@@ -11847,7 +11847,7 @@
           </a:ln>
           <a:effectLst>
             <a:glow rad="88900">
-              <a:srgbClr val="4C9AFF">
+              <a:srgbClr val="D8E04A">
                 <a:alpha val="38000"/>
               </a:srgbClr>
             </a:glow>
@@ -11905,7 +11905,7 @@
             <a:r>
               <a:rPr sz="1400" b="1">
                 <a:solidFill>
-                  <a:srgbClr val="141820"/>
+                  <a:srgbClr val="141A12"/>
                 </a:solidFill>
               </a:rPr>
               <a:t>1</a:t>
@@ -11943,7 +11943,7 @@
             <a:r>
               <a:rPr sz="1800" b="0">
                 <a:solidFill>
-                  <a:srgbClr val="F2F4F8"/>
+                  <a:srgbClr val="F4F7EE"/>
                 </a:solidFill>
               </a:rPr>
               <a:t>Запрос образцов - отправим в течение 3 дней</a:t>
@@ -11970,10 +11970,10 @@
           <a:gradFill rotWithShape="1">
             <a:gsLst>
               <a:gs pos="0">
-                <a:srgbClr val="1E2430"/>
+                <a:srgbClr val="1D2519"/>
               </a:gs>
               <a:gs pos="100000">
-                <a:srgbClr val="2C3442"/>
+                <a:srgbClr val="2A331F"/>
               </a:gs>
             </a:gsLst>
             <a:lin scaled="0" ang="18900000"/>
@@ -12030,10 +12030,10 @@
           <a:gradFill rotWithShape="1">
             <a:gsLst>
               <a:gs pos="0">
-                <a:srgbClr val="4C9AFF"/>
+                <a:srgbClr val="D8E04A"/>
               </a:gs>
               <a:gs pos="100000">
-                <a:srgbClr val="7B61FF"/>
+                <a:srgbClr val="F2B705"/>
               </a:gs>
             </a:gsLst>
             <a:lin scaled="0" ang="18900000"/>
@@ -12082,10 +12082,10 @@
           <a:gradFill rotWithShape="1">
             <a:gsLst>
               <a:gs pos="0">
-                <a:srgbClr val="4C9AFF"/>
+                <a:srgbClr val="D8E04A"/>
               </a:gs>
               <a:gs pos="100000">
-                <a:srgbClr val="7B61FF"/>
+                <a:srgbClr val="F2B705"/>
               </a:gs>
             </a:gsLst>
             <a:lin scaled="0" ang="19800000"/>
@@ -12095,7 +12095,7 @@
           </a:ln>
           <a:effectLst>
             <a:glow rad="88900">
-              <a:srgbClr val="4C9AFF">
+              <a:srgbClr val="D8E04A">
                 <a:alpha val="38000"/>
               </a:srgbClr>
             </a:glow>
@@ -12153,7 +12153,7 @@
             <a:r>
               <a:rPr sz="1400" b="1">
                 <a:solidFill>
-                  <a:srgbClr val="141820"/>
+                  <a:srgbClr val="141A12"/>
                 </a:solidFill>
               </a:rPr>
               <a:t>2</a:t>
@@ -12191,7 +12191,7 @@
             <a:r>
               <a:rPr sz="1800" b="0">
                 <a:solidFill>
-                  <a:srgbClr val="F2F4F8"/>
+                  <a:srgbClr val="F4F7EE"/>
                 </a:solidFill>
               </a:rPr>
               <a:t>Согласование условий и матрицы</a:t>
@@ -12218,10 +12218,10 @@
           <a:gradFill rotWithShape="1">
             <a:gsLst>
               <a:gs pos="0">
-                <a:srgbClr val="1E2430"/>
+                <a:srgbClr val="1D2519"/>
               </a:gs>
               <a:gs pos="100000">
-                <a:srgbClr val="2C3442"/>
+                <a:srgbClr val="2A331F"/>
               </a:gs>
             </a:gsLst>
             <a:lin scaled="0" ang="18900000"/>
@@ -12278,10 +12278,10 @@
           <a:gradFill rotWithShape="1">
             <a:gsLst>
               <a:gs pos="0">
-                <a:srgbClr val="4C9AFF"/>
+                <a:srgbClr val="D8E04A"/>
               </a:gs>
               <a:gs pos="100000">
-                <a:srgbClr val="7B61FF"/>
+                <a:srgbClr val="F2B705"/>
               </a:gs>
             </a:gsLst>
             <a:lin scaled="0" ang="18900000"/>
@@ -12330,10 +12330,10 @@
           <a:gradFill rotWithShape="1">
             <a:gsLst>
               <a:gs pos="0">
-                <a:srgbClr val="4C9AFF"/>
+                <a:srgbClr val="D8E04A"/>
               </a:gs>
               <a:gs pos="100000">
-                <a:srgbClr val="7B61FF"/>
+                <a:srgbClr val="F2B705"/>
               </a:gs>
             </a:gsLst>
             <a:lin scaled="0" ang="19800000"/>
@@ -12343,7 +12343,7 @@
           </a:ln>
           <a:effectLst>
             <a:glow rad="88900">
-              <a:srgbClr val="4C9AFF">
+              <a:srgbClr val="D8E04A">
                 <a:alpha val="38000"/>
               </a:srgbClr>
             </a:glow>
@@ -12401,7 +12401,7 @@
             <a:r>
               <a:rPr sz="1400" b="1">
                 <a:solidFill>
-                  <a:srgbClr val="141820"/>
+                  <a:srgbClr val="141A12"/>
                 </a:solidFill>
               </a:rPr>
               <a:t>3</a:t>
@@ -12439,7 +12439,7 @@
             <a:r>
               <a:rPr sz="1800" b="0">
                 <a:solidFill>
-                  <a:srgbClr val="F2F4F8"/>
+                  <a:srgbClr val="F4F7EE"/>
                 </a:solidFill>
               </a:rPr>
               <a:t>Тестовый запуск в 10-20 магазинах</a:t>
@@ -12466,10 +12466,10 @@
           <a:gradFill rotWithShape="1">
             <a:gsLst>
               <a:gs pos="0">
-                <a:srgbClr val="1E2430"/>
+                <a:srgbClr val="1D2519"/>
               </a:gs>
               <a:gs pos="100000">
-                <a:srgbClr val="2C3442"/>
+                <a:srgbClr val="2A331F"/>
               </a:gs>
             </a:gsLst>
             <a:lin scaled="0" ang="18900000"/>
@@ -12526,10 +12526,10 @@
           <a:gradFill rotWithShape="1">
             <a:gsLst>
               <a:gs pos="0">
-                <a:srgbClr val="4C9AFF"/>
+                <a:srgbClr val="D8E04A"/>
               </a:gs>
               <a:gs pos="100000">
-                <a:srgbClr val="7B61FF"/>
+                <a:srgbClr val="F2B705"/>
               </a:gs>
             </a:gsLst>
             <a:lin scaled="0" ang="18900000"/>
@@ -12578,10 +12578,10 @@
           <a:gradFill rotWithShape="1">
             <a:gsLst>
               <a:gs pos="0">
-                <a:srgbClr val="4C9AFF"/>
+                <a:srgbClr val="D8E04A"/>
               </a:gs>
               <a:gs pos="100000">
-                <a:srgbClr val="7B61FF"/>
+                <a:srgbClr val="F2B705"/>
               </a:gs>
             </a:gsLst>
             <a:lin scaled="0" ang="19800000"/>
@@ -12591,7 +12591,7 @@
           </a:ln>
           <a:effectLst>
             <a:glow rad="88900">
-              <a:srgbClr val="4C9AFF">
+              <a:srgbClr val="D8E04A">
                 <a:alpha val="38000"/>
               </a:srgbClr>
             </a:glow>
@@ -12649,7 +12649,7 @@
             <a:r>
               <a:rPr sz="1400" b="1">
                 <a:solidFill>
-                  <a:srgbClr val="141820"/>
+                  <a:srgbClr val="141A12"/>
                 </a:solidFill>
               </a:rPr>
               <a:t>4</a:t>
@@ -12687,7 +12687,7 @@
             <a:r>
               <a:rPr sz="1800" b="0">
                 <a:solidFill>
-                  <a:srgbClr val="F2F4F8"/>
+                  <a:srgbClr val="F4F7EE"/>
                 </a:solidFill>
               </a:rPr>
               <a:t>Расширение на сеть по результатам теста</a:t>
@@ -13061,7 +13061,7 @@
     <p:bg>
       <p:bgPr>
         <a:solidFill>
-          <a:srgbClr val="141820"/>
+          <a:srgbClr val="141A12"/>
         </a:solidFill>
         <a:effectLst/>
       </p:bgPr>
@@ -13075,7 +13075,7 @@
       <p:grpSpPr/>
       <p:pic>
         <p:nvPicPr>
-          <p:cNvPr id="2" name="Picture 1" descr="mesh.png"/>
+          <p:cNvPr id="2" name="Picture 1" descr="bubbles-D8E04A.png"/>
           <p:cNvPicPr>
             <a:picLocks noChangeAspect="1"/>
           </p:cNvPicPr>
@@ -13118,10 +13118,10 @@
           <a:gradFill rotWithShape="1">
             <a:gsLst>
               <a:gs pos="0">
-                <a:srgbClr val="4C9AFF"/>
+                <a:srgbClr val="D8E04A"/>
               </a:gs>
               <a:gs pos="100000">
-                <a:srgbClr val="7B61FF"/>
+                <a:srgbClr val="F2B705"/>
               </a:gs>
             </a:gsLst>
             <a:lin scaled="0" ang="18900000"/>
@@ -13131,7 +13131,7 @@
           </a:ln>
           <a:effectLst>
             <a:glow rad="127000">
-              <a:srgbClr val="4C9AFF">
+              <a:srgbClr val="D8E04A">
                 <a:alpha val="55000"/>
               </a:srgbClr>
             </a:glow>
@@ -13189,7 +13189,7 @@
             <a:r>
               <a:rPr sz="3200" b="1">
                 <a:solidFill>
-                  <a:srgbClr val="F2F4F8"/>
+                  <a:srgbClr val="F4F7EE"/>
                 </a:solidFill>
               </a:rPr>
               <a:t>Давайте начнём с образцов</a:t>
@@ -13216,10 +13216,10 @@
           <a:gradFill rotWithShape="1">
             <a:gsLst>
               <a:gs pos="0">
-                <a:srgbClr val="1E2430"/>
+                <a:srgbClr val="1D2519"/>
               </a:gs>
               <a:gs pos="100000">
-                <a:srgbClr val="2C3442"/>
+                <a:srgbClr val="2A331F"/>
               </a:gs>
             </a:gsLst>
             <a:lin scaled="0" ang="18900000"/>
@@ -13276,10 +13276,10 @@
           <a:gradFill rotWithShape="1">
             <a:gsLst>
               <a:gs pos="0">
-                <a:srgbClr val="4C9AFF"/>
+                <a:srgbClr val="D8E04A"/>
               </a:gs>
               <a:gs pos="100000">
-                <a:srgbClr val="7B61FF"/>
+                <a:srgbClr val="F2B705"/>
               </a:gs>
             </a:gsLst>
             <a:lin scaled="0" ang="18900000"/>
@@ -13328,10 +13328,10 @@
           <a:gradFill rotWithShape="1">
             <a:gsLst>
               <a:gs pos="0">
-                <a:srgbClr val="4C9AFF"/>
+                <a:srgbClr val="D8E04A"/>
               </a:gs>
               <a:gs pos="100000">
-                <a:srgbClr val="7B61FF"/>
+                <a:srgbClr val="F2B705"/>
               </a:gs>
             </a:gsLst>
             <a:lin scaled="0" ang="19800000"/>
@@ -13341,7 +13341,7 @@
           </a:ln>
           <a:effectLst>
             <a:glow rad="88900">
-              <a:srgbClr val="4C9AFF">
+              <a:srgbClr val="D8E04A">
                 <a:alpha val="38000"/>
               </a:srgbClr>
             </a:glow>
@@ -13399,7 +13399,7 @@
             <a:r>
               <a:rPr sz="1400" b="1">
                 <a:solidFill>
-                  <a:srgbClr val="141820"/>
+                  <a:srgbClr val="141A12"/>
                 </a:solidFill>
               </a:rPr>
               <a:t>1</a:t>
@@ -13437,7 +13437,7 @@
             <a:r>
               <a:rPr sz="1800" b="0">
                 <a:solidFill>
-                  <a:srgbClr val="F2F4F8"/>
+                  <a:srgbClr val="F4F7EE"/>
                 </a:solidFill>
               </a:rPr>
               <a:t>Пришлём полную линейку из 6 вкусов</a:t>
@@ -13464,10 +13464,10 @@
           <a:gradFill rotWithShape="1">
             <a:gsLst>
               <a:gs pos="0">
-                <a:srgbClr val="1E2430"/>
+                <a:srgbClr val="1D2519"/>
               </a:gs>
               <a:gs pos="100000">
-                <a:srgbClr val="2C3442"/>
+                <a:srgbClr val="2A331F"/>
               </a:gs>
             </a:gsLst>
             <a:lin scaled="0" ang="18900000"/>
@@ -13524,10 +13524,10 @@
           <a:gradFill rotWithShape="1">
             <a:gsLst>
               <a:gs pos="0">
-                <a:srgbClr val="4C9AFF"/>
+                <a:srgbClr val="D8E04A"/>
               </a:gs>
               <a:gs pos="100000">
-                <a:srgbClr val="7B61FF"/>
+                <a:srgbClr val="F2B705"/>
               </a:gs>
             </a:gsLst>
             <a:lin scaled="0" ang="18900000"/>
@@ -13576,10 +13576,10 @@
           <a:gradFill rotWithShape="1">
             <a:gsLst>
               <a:gs pos="0">
-                <a:srgbClr val="4C9AFF"/>
+                <a:srgbClr val="D8E04A"/>
               </a:gs>
               <a:gs pos="100000">
-                <a:srgbClr val="7B61FF"/>
+                <a:srgbClr val="F2B705"/>
               </a:gs>
             </a:gsLst>
             <a:lin scaled="0" ang="19800000"/>
@@ -13589,7 +13589,7 @@
           </a:ln>
           <a:effectLst>
             <a:glow rad="88900">
-              <a:srgbClr val="4C9AFF">
+              <a:srgbClr val="D8E04A">
                 <a:alpha val="38000"/>
               </a:srgbClr>
             </a:glow>
@@ -13647,7 +13647,7 @@
             <a:r>
               <a:rPr sz="1400" b="1">
                 <a:solidFill>
-                  <a:srgbClr val="141820"/>
+                  <a:srgbClr val="141A12"/>
                 </a:solidFill>
               </a:rPr>
               <a:t>2</a:t>
@@ -13685,7 +13685,7 @@
             <a:r>
               <a:rPr sz="1800" b="0">
                 <a:solidFill>
-                  <a:srgbClr val="F2F4F8"/>
+                  <a:srgbClr val="F4F7EE"/>
                 </a:solidFill>
               </a:rPr>
               <a:t>Подготовим расчёт под вашу матрицу</a:t>
@@ -13712,10 +13712,10 @@
           <a:gradFill rotWithShape="1">
             <a:gsLst>
               <a:gs pos="0">
-                <a:srgbClr val="1E2430"/>
+                <a:srgbClr val="1D2519"/>
               </a:gs>
               <a:gs pos="100000">
-                <a:srgbClr val="2C3442"/>
+                <a:srgbClr val="2A331F"/>
               </a:gs>
             </a:gsLst>
             <a:lin scaled="0" ang="18900000"/>
@@ -13772,10 +13772,10 @@
           <a:gradFill rotWithShape="1">
             <a:gsLst>
               <a:gs pos="0">
-                <a:srgbClr val="4C9AFF"/>
+                <a:srgbClr val="D8E04A"/>
               </a:gs>
               <a:gs pos="100000">
-                <a:srgbClr val="7B61FF"/>
+                <a:srgbClr val="F2B705"/>
               </a:gs>
             </a:gsLst>
             <a:lin scaled="0" ang="18900000"/>
@@ -13824,10 +13824,10 @@
           <a:gradFill rotWithShape="1">
             <a:gsLst>
               <a:gs pos="0">
-                <a:srgbClr val="4C9AFF"/>
+                <a:srgbClr val="D8E04A"/>
               </a:gs>
               <a:gs pos="100000">
-                <a:srgbClr val="7B61FF"/>
+                <a:srgbClr val="F2B705"/>
               </a:gs>
             </a:gsLst>
             <a:lin scaled="0" ang="19800000"/>
@@ -13837,7 +13837,7 @@
           </a:ln>
           <a:effectLst>
             <a:glow rad="88900">
-              <a:srgbClr val="4C9AFF">
+              <a:srgbClr val="D8E04A">
                 <a:alpha val="38000"/>
               </a:srgbClr>
             </a:glow>
@@ -13895,7 +13895,7 @@
             <a:r>
               <a:rPr sz="1400" b="1">
                 <a:solidFill>
-                  <a:srgbClr val="141820"/>
+                  <a:srgbClr val="141A12"/>
                 </a:solidFill>
               </a:rPr>
               <a:t>3</a:t>
@@ -13933,7 +13933,7 @@
             <a:r>
               <a:rPr sz="1800" b="0">
                 <a:solidFill>
-                  <a:srgbClr val="F2F4F8"/>
+                  <a:srgbClr val="F4F7EE"/>
                 </a:solidFill>
               </a:rPr>
               <a:t>Обсудим условия и сроки старта</a:t>
@@ -13960,10 +13960,10 @@
           <a:gradFill rotWithShape="1">
             <a:gsLst>
               <a:gs pos="0">
-                <a:srgbClr val="1E2430"/>
+                <a:srgbClr val="1D2519"/>
               </a:gs>
               <a:gs pos="100000">
-                <a:srgbClr val="2C3442"/>
+                <a:srgbClr val="2A331F"/>
               </a:gs>
             </a:gsLst>
             <a:lin scaled="0" ang="18900000"/>
@@ -14020,10 +14020,10 @@
           <a:gradFill rotWithShape="1">
             <a:gsLst>
               <a:gs pos="0">
-                <a:srgbClr val="4C9AFF"/>
+                <a:srgbClr val="D8E04A"/>
               </a:gs>
               <a:gs pos="100000">
-                <a:srgbClr val="7B61FF"/>
+                <a:srgbClr val="F2B705"/>
               </a:gs>
             </a:gsLst>
             <a:lin scaled="0" ang="18900000"/>
@@ -14072,10 +14072,10 @@
           <a:gradFill rotWithShape="1">
             <a:gsLst>
               <a:gs pos="0">
-                <a:srgbClr val="4C9AFF"/>
+                <a:srgbClr val="D8E04A"/>
               </a:gs>
               <a:gs pos="100000">
-                <a:srgbClr val="7B61FF"/>
+                <a:srgbClr val="F2B705"/>
               </a:gs>
             </a:gsLst>
             <a:lin scaled="0" ang="19800000"/>
@@ -14085,7 +14085,7 @@
           </a:ln>
           <a:effectLst>
             <a:glow rad="88900">
-              <a:srgbClr val="4C9AFF">
+              <a:srgbClr val="D8E04A">
                 <a:alpha val="38000"/>
               </a:srgbClr>
             </a:glow>
@@ -14143,7 +14143,7 @@
             <a:r>
               <a:rPr sz="1400" b="1">
                 <a:solidFill>
-                  <a:srgbClr val="141820"/>
+                  <a:srgbClr val="141A12"/>
                 </a:solidFill>
               </a:rPr>
               <a:t>4</a:t>
@@ -14181,7 +14181,7 @@
             <a:r>
               <a:rPr sz="1800" b="0">
                 <a:solidFill>
-                  <a:srgbClr val="F2F4F8"/>
+                  <a:srgbClr val="F4F7EE"/>
                 </a:solidFill>
               </a:rPr>
               <a:t>Контакты и коммерческое предложение внутри</a:t>
@@ -14555,7 +14555,7 @@
     <p:bg>
       <p:bgPr>
         <a:solidFill>
-          <a:srgbClr val="141820"/>
+          <a:srgbClr val="141A12"/>
         </a:solidFill>
         <a:effectLst/>
       </p:bgPr>
@@ -14569,7 +14569,7 @@
       <p:grpSpPr/>
       <p:pic>
         <p:nvPicPr>
-          <p:cNvPr id="2" name="Picture 1" descr="mesh.png"/>
+          <p:cNvPr id="2" name="Picture 1" descr="waves-D8E04A.png"/>
           <p:cNvPicPr>
             <a:picLocks noChangeAspect="1"/>
           </p:cNvPicPr>
@@ -14612,10 +14612,10 @@
           <a:gradFill rotWithShape="1">
             <a:gsLst>
               <a:gs pos="0">
-                <a:srgbClr val="4C9AFF"/>
+                <a:srgbClr val="D8E04A"/>
               </a:gs>
               <a:gs pos="100000">
-                <a:srgbClr val="7B61FF"/>
+                <a:srgbClr val="F2B705"/>
               </a:gs>
             </a:gsLst>
             <a:lin scaled="0" ang="18900000"/>
@@ -14625,7 +14625,7 @@
           </a:ln>
           <a:effectLst>
             <a:glow rad="127000">
-              <a:srgbClr val="4C9AFF">
+              <a:srgbClr val="D8E04A">
                 <a:alpha val="55000"/>
               </a:srgbClr>
             </a:glow>
@@ -14683,7 +14683,7 @@
             <a:r>
               <a:rPr sz="3200" b="1">
                 <a:solidFill>
-                  <a:srgbClr val="F2F4F8"/>
+                  <a:srgbClr val="F4F7EE"/>
                 </a:solidFill>
               </a:rPr>
               <a:t>Покупатель ушёл от сладкой газировки, но не от вкуса</a:t>
@@ -14710,10 +14710,10 @@
           <a:gradFill rotWithShape="1">
             <a:gsLst>
               <a:gs pos="0">
-                <a:srgbClr val="1E2430"/>
+                <a:srgbClr val="1D2519"/>
               </a:gs>
               <a:gs pos="100000">
-                <a:srgbClr val="2C3442"/>
+                <a:srgbClr val="2A331F"/>
               </a:gs>
             </a:gsLst>
             <a:lin scaled="0" ang="18900000"/>
@@ -14770,10 +14770,10 @@
           <a:gradFill rotWithShape="1">
             <a:gsLst>
               <a:gs pos="0">
-                <a:srgbClr val="4C9AFF"/>
+                <a:srgbClr val="D8E04A"/>
               </a:gs>
               <a:gs pos="100000">
-                <a:srgbClr val="7B61FF"/>
+                <a:srgbClr val="F2B705"/>
               </a:gs>
             </a:gsLst>
             <a:lin scaled="0" ang="18900000"/>
@@ -14822,10 +14822,10 @@
           <a:gradFill rotWithShape="1">
             <a:gsLst>
               <a:gs pos="0">
-                <a:srgbClr val="4C9AFF"/>
+                <a:srgbClr val="D8E04A"/>
               </a:gs>
               <a:gs pos="100000">
-                <a:srgbClr val="7B61FF"/>
+                <a:srgbClr val="F2B705"/>
               </a:gs>
             </a:gsLst>
             <a:lin scaled="0" ang="19800000"/>
@@ -14835,7 +14835,7 @@
           </a:ln>
           <a:effectLst>
             <a:glow rad="88900">
-              <a:srgbClr val="4C9AFF">
+              <a:srgbClr val="D8E04A">
                 <a:alpha val="38000"/>
               </a:srgbClr>
             </a:glow>
@@ -14893,7 +14893,7 @@
             <a:r>
               <a:rPr sz="1400" b="1">
                 <a:solidFill>
-                  <a:srgbClr val="141820"/>
+                  <a:srgbClr val="141A12"/>
                 </a:solidFill>
               </a:rPr>
               <a:t>1</a:t>
@@ -14931,7 +14931,7 @@
             <a:r>
               <a:rPr sz="1800" b="0">
                 <a:solidFill>
-                  <a:srgbClr val="F2F4F8"/>
+                  <a:srgbClr val="F4F7EE"/>
                 </a:solidFill>
               </a:rPr>
               <a:t>Спрос на натуральные напитки растёт третий год</a:t>
@@ -14958,10 +14958,10 @@
           <a:gradFill rotWithShape="1">
             <a:gsLst>
               <a:gs pos="0">
-                <a:srgbClr val="1E2430"/>
+                <a:srgbClr val="1D2519"/>
               </a:gs>
               <a:gs pos="100000">
-                <a:srgbClr val="2C3442"/>
+                <a:srgbClr val="2A331F"/>
               </a:gs>
             </a:gsLst>
             <a:lin scaled="0" ang="18900000"/>
@@ -15018,10 +15018,10 @@
           <a:gradFill rotWithShape="1">
             <a:gsLst>
               <a:gs pos="0">
-                <a:srgbClr val="4C9AFF"/>
+                <a:srgbClr val="D8E04A"/>
               </a:gs>
               <a:gs pos="100000">
-                <a:srgbClr val="7B61FF"/>
+                <a:srgbClr val="F2B705"/>
               </a:gs>
             </a:gsLst>
             <a:lin scaled="0" ang="18900000"/>
@@ -15070,10 +15070,10 @@
           <a:gradFill rotWithShape="1">
             <a:gsLst>
               <a:gs pos="0">
-                <a:srgbClr val="4C9AFF"/>
+                <a:srgbClr val="D8E04A"/>
               </a:gs>
               <a:gs pos="100000">
-                <a:srgbClr val="7B61FF"/>
+                <a:srgbClr val="F2B705"/>
               </a:gs>
             </a:gsLst>
             <a:lin scaled="0" ang="19800000"/>
@@ -15083,7 +15083,7 @@
           </a:ln>
           <a:effectLst>
             <a:glow rad="88900">
-              <a:srgbClr val="4C9AFF">
+              <a:srgbClr val="D8E04A">
                 <a:alpha val="38000"/>
               </a:srgbClr>
             </a:glow>
@@ -15141,7 +15141,7 @@
             <a:r>
               <a:rPr sz="1400" b="1">
                 <a:solidFill>
-                  <a:srgbClr val="141820"/>
+                  <a:srgbClr val="141A12"/>
                 </a:solidFill>
               </a:rPr>
               <a:t>2</a:t>
@@ -15179,7 +15179,7 @@
             <a:r>
               <a:rPr sz="1800" b="0">
                 <a:solidFill>
-                  <a:srgbClr val="F2F4F8"/>
+                  <a:srgbClr val="F4F7EE"/>
                 </a:solidFill>
               </a:rPr>
               <a:t>Классическая газировка теряет лояльность покупателя</a:t>
@@ -15206,10 +15206,10 @@
           <a:gradFill rotWithShape="1">
             <a:gsLst>
               <a:gs pos="0">
-                <a:srgbClr val="1E2430"/>
+                <a:srgbClr val="1D2519"/>
               </a:gs>
               <a:gs pos="100000">
-                <a:srgbClr val="2C3442"/>
+                <a:srgbClr val="2A331F"/>
               </a:gs>
             </a:gsLst>
             <a:lin scaled="0" ang="18900000"/>
@@ -15266,10 +15266,10 @@
           <a:gradFill rotWithShape="1">
             <a:gsLst>
               <a:gs pos="0">
-                <a:srgbClr val="4C9AFF"/>
+                <a:srgbClr val="D8E04A"/>
               </a:gs>
               <a:gs pos="100000">
-                <a:srgbClr val="7B61FF"/>
+                <a:srgbClr val="F2B705"/>
               </a:gs>
             </a:gsLst>
             <a:lin scaled="0" ang="18900000"/>
@@ -15318,10 +15318,10 @@
           <a:gradFill rotWithShape="1">
             <a:gsLst>
               <a:gs pos="0">
-                <a:srgbClr val="4C9AFF"/>
+                <a:srgbClr val="D8E04A"/>
               </a:gs>
               <a:gs pos="100000">
-                <a:srgbClr val="7B61FF"/>
+                <a:srgbClr val="F2B705"/>
               </a:gs>
             </a:gsLst>
             <a:lin scaled="0" ang="19800000"/>
@@ -15331,7 +15331,7 @@
           </a:ln>
           <a:effectLst>
             <a:glow rad="88900">
-              <a:srgbClr val="4C9AFF">
+              <a:srgbClr val="D8E04A">
                 <a:alpha val="38000"/>
               </a:srgbClr>
             </a:glow>
@@ -15389,7 +15389,7 @@
             <a:r>
               <a:rPr sz="1400" b="1">
                 <a:solidFill>
-                  <a:srgbClr val="141820"/>
+                  <a:srgbClr val="141A12"/>
                 </a:solidFill>
               </a:rPr>
               <a:t>3</a:t>
@@ -15427,7 +15427,7 @@
             <a:r>
               <a:rPr sz="1800" b="0">
                 <a:solidFill>
-                  <a:srgbClr val="F2F4F8"/>
+                  <a:srgbClr val="F4F7EE"/>
                 </a:solidFill>
               </a:rPr>
               <a:t>Сахарозаменители отпугивают осознанную аудиторию</a:t>
@@ -15454,10 +15454,10 @@
           <a:gradFill rotWithShape="1">
             <a:gsLst>
               <a:gs pos="0">
-                <a:srgbClr val="1E2430"/>
+                <a:srgbClr val="1D2519"/>
               </a:gs>
               <a:gs pos="100000">
-                <a:srgbClr val="2C3442"/>
+                <a:srgbClr val="2A331F"/>
               </a:gs>
             </a:gsLst>
             <a:lin scaled="0" ang="18900000"/>
@@ -15514,10 +15514,10 @@
           <a:gradFill rotWithShape="1">
             <a:gsLst>
               <a:gs pos="0">
-                <a:srgbClr val="4C9AFF"/>
+                <a:srgbClr val="D8E04A"/>
               </a:gs>
               <a:gs pos="100000">
-                <a:srgbClr val="7B61FF"/>
+                <a:srgbClr val="F2B705"/>
               </a:gs>
             </a:gsLst>
             <a:lin scaled="0" ang="18900000"/>
@@ -15566,10 +15566,10 @@
           <a:gradFill rotWithShape="1">
             <a:gsLst>
               <a:gs pos="0">
-                <a:srgbClr val="4C9AFF"/>
+                <a:srgbClr val="D8E04A"/>
               </a:gs>
               <a:gs pos="100000">
-                <a:srgbClr val="7B61FF"/>
+                <a:srgbClr val="F2B705"/>
               </a:gs>
             </a:gsLst>
             <a:lin scaled="0" ang="19800000"/>
@@ -15579,7 +15579,7 @@
           </a:ln>
           <a:effectLst>
             <a:glow rad="88900">
-              <a:srgbClr val="4C9AFF">
+              <a:srgbClr val="D8E04A">
                 <a:alpha val="38000"/>
               </a:srgbClr>
             </a:glow>
@@ -15637,7 +15637,7 @@
             <a:r>
               <a:rPr sz="1400" b="1">
                 <a:solidFill>
-                  <a:srgbClr val="141820"/>
+                  <a:srgbClr val="141A12"/>
                 </a:solidFill>
               </a:rPr>
               <a:t>4</a:t>
@@ -15675,7 +15675,7 @@
             <a:r>
               <a:rPr sz="1800" b="0">
                 <a:solidFill>
-                  <a:srgbClr val="F2F4F8"/>
+                  <a:srgbClr val="F4F7EE"/>
                 </a:solidFill>
               </a:rPr>
               <a:t>Полка требует нового качественного игрока</a:t>
@@ -16049,7 +16049,7 @@
     <p:bg>
       <p:bgPr>
         <a:solidFill>
-          <a:srgbClr val="141820"/>
+          <a:srgbClr val="141A12"/>
         </a:solidFill>
         <a:effectLst/>
       </p:bgPr>
@@ -16063,7 +16063,7 @@
       <p:grpSpPr/>
       <p:pic>
         <p:nvPicPr>
-          <p:cNvPr id="2" name="Picture 1" descr="waves.png"/>
+          <p:cNvPr id="2" name="Picture 1" descr="bars-D8E04A.png"/>
           <p:cNvPicPr>
             <a:picLocks noChangeAspect="1"/>
           </p:cNvPicPr>
@@ -16106,10 +16106,10 @@
           <a:gradFill rotWithShape="1">
             <a:gsLst>
               <a:gs pos="0">
-                <a:srgbClr val="4C9AFF"/>
+                <a:srgbClr val="D8E04A"/>
               </a:gs>
               <a:gs pos="100000">
-                <a:srgbClr val="7B61FF"/>
+                <a:srgbClr val="F2B705"/>
               </a:gs>
             </a:gsLst>
             <a:lin scaled="0" ang="18900000"/>
@@ -16119,7 +16119,7 @@
           </a:ln>
           <a:effectLst>
             <a:glow rad="127000">
-              <a:srgbClr val="4C9AFF">
+              <a:srgbClr val="D8E04A">
                 <a:alpha val="55000"/>
               </a:srgbClr>
             </a:glow>
@@ -16177,7 +16177,7 @@
             <a:r>
               <a:rPr sz="3200" b="1">
                 <a:solidFill>
-                  <a:srgbClr val="F2F4F8"/>
+                  <a:srgbClr val="F4F7EE"/>
                 </a:solidFill>
               </a:rPr>
               <a:t>Лимонад, состав которого не стыдно читать</a:t>
@@ -16204,10 +16204,10 @@
           <a:gradFill rotWithShape="1">
             <a:gsLst>
               <a:gs pos="0">
-                <a:srgbClr val="1E2430"/>
+                <a:srgbClr val="1D2519"/>
               </a:gs>
               <a:gs pos="100000">
-                <a:srgbClr val="2C3442"/>
+                <a:srgbClr val="2A331F"/>
               </a:gs>
             </a:gsLst>
             <a:lin scaled="0" ang="18900000"/>
@@ -16264,10 +16264,10 @@
           <a:gradFill rotWithShape="1">
             <a:gsLst>
               <a:gs pos="0">
-                <a:srgbClr val="4C9AFF"/>
+                <a:srgbClr val="D8E04A"/>
               </a:gs>
               <a:gs pos="100000">
-                <a:srgbClr val="7B61FF"/>
+                <a:srgbClr val="F2B705"/>
               </a:gs>
             </a:gsLst>
             <a:lin scaled="0" ang="18900000"/>
@@ -16316,10 +16316,10 @@
           <a:gradFill rotWithShape="1">
             <a:gsLst>
               <a:gs pos="0">
-                <a:srgbClr val="4C9AFF"/>
+                <a:srgbClr val="D8E04A"/>
               </a:gs>
               <a:gs pos="100000">
-                <a:srgbClr val="7B61FF"/>
+                <a:srgbClr val="F2B705"/>
               </a:gs>
             </a:gsLst>
             <a:lin scaled="0" ang="19800000"/>
@@ -16329,7 +16329,7 @@
           </a:ln>
           <a:effectLst>
             <a:glow rad="88900">
-              <a:srgbClr val="4C9AFF">
+              <a:srgbClr val="D8E04A">
                 <a:alpha val="38000"/>
               </a:srgbClr>
             </a:glow>
@@ -16387,7 +16387,7 @@
             <a:r>
               <a:rPr sz="1400" b="1">
                 <a:solidFill>
-                  <a:srgbClr val="141820"/>
+                  <a:srgbClr val="141A12"/>
                 </a:solidFill>
               </a:rPr>
               <a:t>1</a:t>
@@ -16425,7 +16425,7 @@
             <a:r>
               <a:rPr sz="1800" b="0">
                 <a:solidFill>
-                  <a:srgbClr val="F2F4F8"/>
+                  <a:srgbClr val="F4F7EE"/>
                 </a:solidFill>
               </a:rPr>
               <a:t>Только вода, сахар, сок и натуральные экстракты</a:t>
@@ -16452,10 +16452,10 @@
           <a:gradFill rotWithShape="1">
             <a:gsLst>
               <a:gs pos="0">
-                <a:srgbClr val="1E2430"/>
+                <a:srgbClr val="1D2519"/>
               </a:gs>
               <a:gs pos="100000">
-                <a:srgbClr val="2C3442"/>
+                <a:srgbClr val="2A331F"/>
               </a:gs>
             </a:gsLst>
             <a:lin scaled="0" ang="18900000"/>
@@ -16512,10 +16512,10 @@
           <a:gradFill rotWithShape="1">
             <a:gsLst>
               <a:gs pos="0">
-                <a:srgbClr val="4C9AFF"/>
+                <a:srgbClr val="D8E04A"/>
               </a:gs>
               <a:gs pos="100000">
-                <a:srgbClr val="7B61FF"/>
+                <a:srgbClr val="F2B705"/>
               </a:gs>
             </a:gsLst>
             <a:lin scaled="0" ang="18900000"/>
@@ -16564,10 +16564,10 @@
           <a:gradFill rotWithShape="1">
             <a:gsLst>
               <a:gs pos="0">
-                <a:srgbClr val="4C9AFF"/>
+                <a:srgbClr val="D8E04A"/>
               </a:gs>
               <a:gs pos="100000">
-                <a:srgbClr val="7B61FF"/>
+                <a:srgbClr val="F2B705"/>
               </a:gs>
             </a:gsLst>
             <a:lin scaled="0" ang="19800000"/>
@@ -16577,7 +16577,7 @@
           </a:ln>
           <a:effectLst>
             <a:glow rad="88900">
-              <a:srgbClr val="4C9AFF">
+              <a:srgbClr val="D8E04A">
                 <a:alpha val="38000"/>
               </a:srgbClr>
             </a:glow>
@@ -16635,7 +16635,7 @@
             <a:r>
               <a:rPr sz="1400" b="1">
                 <a:solidFill>
-                  <a:srgbClr val="141820"/>
+                  <a:srgbClr val="141A12"/>
                 </a:solidFill>
               </a:rPr>
               <a:t>2</a:t>
@@ -16673,7 +16673,7 @@
             <a:r>
               <a:rPr sz="1800" b="0">
                 <a:solidFill>
-                  <a:srgbClr val="F2F4F8"/>
+                  <a:srgbClr val="F4F7EE"/>
                 </a:solidFill>
               </a:rPr>
               <a:t>Без сахарозаменителей и синтетических ароматизаторов</a:t>
@@ -16700,10 +16700,10 @@
           <a:gradFill rotWithShape="1">
             <a:gsLst>
               <a:gs pos="0">
-                <a:srgbClr val="1E2430"/>
+                <a:srgbClr val="1D2519"/>
               </a:gs>
               <a:gs pos="100000">
-                <a:srgbClr val="2C3442"/>
+                <a:srgbClr val="2A331F"/>
               </a:gs>
             </a:gsLst>
             <a:lin scaled="0" ang="18900000"/>
@@ -16760,10 +16760,10 @@
           <a:gradFill rotWithShape="1">
             <a:gsLst>
               <a:gs pos="0">
-                <a:srgbClr val="4C9AFF"/>
+                <a:srgbClr val="D8E04A"/>
               </a:gs>
               <a:gs pos="100000">
-                <a:srgbClr val="7B61FF"/>
+                <a:srgbClr val="F2B705"/>
               </a:gs>
             </a:gsLst>
             <a:lin scaled="0" ang="18900000"/>
@@ -16812,10 +16812,10 @@
           <a:gradFill rotWithShape="1">
             <a:gsLst>
               <a:gs pos="0">
-                <a:srgbClr val="4C9AFF"/>
+                <a:srgbClr val="D8E04A"/>
               </a:gs>
               <a:gs pos="100000">
-                <a:srgbClr val="7B61FF"/>
+                <a:srgbClr val="F2B705"/>
               </a:gs>
             </a:gsLst>
             <a:lin scaled="0" ang="19800000"/>
@@ -16825,7 +16825,7 @@
           </a:ln>
           <a:effectLst>
             <a:glow rad="88900">
-              <a:srgbClr val="4C9AFF">
+              <a:srgbClr val="D8E04A">
                 <a:alpha val="38000"/>
               </a:srgbClr>
             </a:glow>
@@ -16883,7 +16883,7 @@
             <a:r>
               <a:rPr sz="1400" b="1">
                 <a:solidFill>
-                  <a:srgbClr val="141820"/>
+                  <a:srgbClr val="141A12"/>
                 </a:solidFill>
               </a:rPr>
               <a:t>3</a:t>
@@ -16921,7 +16921,7 @@
             <a:r>
               <a:rPr sz="1800" b="0">
                 <a:solidFill>
-                  <a:srgbClr val="F2F4F8"/>
+                  <a:srgbClr val="F4F7EE"/>
                 </a:solidFill>
               </a:rPr>
               <a:t>Вкус узнаваемый, знакомый с детства</a:t>
@@ -16948,10 +16948,10 @@
           <a:gradFill rotWithShape="1">
             <a:gsLst>
               <a:gs pos="0">
-                <a:srgbClr val="1E2430"/>
+                <a:srgbClr val="1D2519"/>
               </a:gs>
               <a:gs pos="100000">
-                <a:srgbClr val="2C3442"/>
+                <a:srgbClr val="2A331F"/>
               </a:gs>
             </a:gsLst>
             <a:lin scaled="0" ang="18900000"/>
@@ -17008,10 +17008,10 @@
           <a:gradFill rotWithShape="1">
             <a:gsLst>
               <a:gs pos="0">
-                <a:srgbClr val="4C9AFF"/>
+                <a:srgbClr val="D8E04A"/>
               </a:gs>
               <a:gs pos="100000">
-                <a:srgbClr val="7B61FF"/>
+                <a:srgbClr val="F2B705"/>
               </a:gs>
             </a:gsLst>
             <a:lin scaled="0" ang="18900000"/>
@@ -17060,10 +17060,10 @@
           <a:gradFill rotWithShape="1">
             <a:gsLst>
               <a:gs pos="0">
-                <a:srgbClr val="4C9AFF"/>
+                <a:srgbClr val="D8E04A"/>
               </a:gs>
               <a:gs pos="100000">
-                <a:srgbClr val="7B61FF"/>
+                <a:srgbClr val="F2B705"/>
               </a:gs>
             </a:gsLst>
             <a:lin scaled="0" ang="19800000"/>
@@ -17073,7 +17073,7 @@
           </a:ln>
           <a:effectLst>
             <a:glow rad="88900">
-              <a:srgbClr val="4C9AFF">
+              <a:srgbClr val="D8E04A">
                 <a:alpha val="38000"/>
               </a:srgbClr>
             </a:glow>
@@ -17131,7 +17131,7 @@
             <a:r>
               <a:rPr sz="1400" b="1">
                 <a:solidFill>
-                  <a:srgbClr val="141820"/>
+                  <a:srgbClr val="141A12"/>
                 </a:solidFill>
               </a:rPr>
               <a:t>4</a:t>
@@ -17169,7 +17169,7 @@
             <a:r>
               <a:rPr sz="1800" b="0">
                 <a:solidFill>
-                  <a:srgbClr val="F2F4F8"/>
+                  <a:srgbClr val="F4F7EE"/>
                 </a:solidFill>
               </a:rPr>
               <a:t>Позиционирование премиум, цена среднего сегмента</a:t>
@@ -17543,7 +17543,7 @@
     <p:bg>
       <p:bgPr>
         <a:solidFill>
-          <a:srgbClr val="141820"/>
+          <a:srgbClr val="141A12"/>
         </a:solidFill>
         <a:effectLst/>
       </p:bgPr>
@@ -17557,7 +17557,7 @@
       <p:grpSpPr/>
       <p:pic>
         <p:nvPicPr>
-          <p:cNvPr id="2" name="Picture 1" descr="rings.png"/>
+          <p:cNvPr id="2" name="Picture 1" descr="mesh-D8E04A.png"/>
           <p:cNvPicPr>
             <a:picLocks noChangeAspect="1"/>
           </p:cNvPicPr>
@@ -17600,10 +17600,10 @@
           <a:gradFill rotWithShape="1">
             <a:gsLst>
               <a:gs pos="0">
-                <a:srgbClr val="4C9AFF"/>
+                <a:srgbClr val="D8E04A"/>
               </a:gs>
               <a:gs pos="100000">
-                <a:srgbClr val="7B61FF"/>
+                <a:srgbClr val="F2B705"/>
               </a:gs>
             </a:gsLst>
             <a:lin scaled="0" ang="18900000"/>
@@ -17613,7 +17613,7 @@
           </a:ln>
           <a:effectLst>
             <a:glow rad="127000">
-              <a:srgbClr val="4C9AFF">
+              <a:srgbClr val="D8E04A">
                 <a:alpha val="55000"/>
               </a:srgbClr>
             </a:glow>
@@ -17671,7 +17671,7 @@
             <a:r>
               <a:rPr sz="3200" b="1">
                 <a:solidFill>
-                  <a:srgbClr val="F2F4F8"/>
+                  <a:srgbClr val="F4F7EE"/>
                 </a:solidFill>
               </a:rPr>
               <a:t>6 вкусов закрывают всю ширину полки</a:t>
@@ -17698,10 +17698,10 @@
           <a:gradFill rotWithShape="1">
             <a:gsLst>
               <a:gs pos="0">
-                <a:srgbClr val="1E2430"/>
+                <a:srgbClr val="1D2519"/>
               </a:gs>
               <a:gs pos="100000">
-                <a:srgbClr val="2C3442"/>
+                <a:srgbClr val="2A331F"/>
               </a:gs>
             </a:gsLst>
             <a:lin scaled="0" ang="18900000"/>
@@ -17758,10 +17758,10 @@
           <a:gradFill rotWithShape="1">
             <a:gsLst>
               <a:gs pos="0">
-                <a:srgbClr val="4C9AFF"/>
+                <a:srgbClr val="D8E04A"/>
               </a:gs>
               <a:gs pos="100000">
-                <a:srgbClr val="7B61FF"/>
+                <a:srgbClr val="F2B705"/>
               </a:gs>
             </a:gsLst>
             <a:lin scaled="0" ang="18900000"/>
@@ -17810,10 +17810,10 @@
           <a:gradFill rotWithShape="1">
             <a:gsLst>
               <a:gs pos="0">
-                <a:srgbClr val="4C9AFF"/>
+                <a:srgbClr val="D8E04A"/>
               </a:gs>
               <a:gs pos="100000">
-                <a:srgbClr val="7B61FF"/>
+                <a:srgbClr val="F2B705"/>
               </a:gs>
             </a:gsLst>
             <a:lin scaled="0" ang="19800000"/>
@@ -17823,7 +17823,7 @@
           </a:ln>
           <a:effectLst>
             <a:glow rad="88900">
-              <a:srgbClr val="4C9AFF">
+              <a:srgbClr val="D8E04A">
                 <a:alpha val="38000"/>
               </a:srgbClr>
             </a:glow>
@@ -17881,7 +17881,7 @@
             <a:r>
               <a:rPr sz="1400" b="1">
                 <a:solidFill>
-                  <a:srgbClr val="141820"/>
+                  <a:srgbClr val="141A12"/>
                 </a:solidFill>
               </a:rPr>
               <a:t>1</a:t>
@@ -17919,7 +17919,7 @@
             <a:r>
               <a:rPr sz="1800" b="0">
                 <a:solidFill>
-                  <a:srgbClr val="F2F4F8"/>
+                  <a:srgbClr val="F4F7EE"/>
                 </a:solidFill>
               </a:rPr>
               <a:t>Классика: лимон, лайм-мята, тархун</a:t>
@@ -17946,10 +17946,10 @@
           <a:gradFill rotWithShape="1">
             <a:gsLst>
               <a:gs pos="0">
-                <a:srgbClr val="1E2430"/>
+                <a:srgbClr val="1D2519"/>
               </a:gs>
               <a:gs pos="100000">
-                <a:srgbClr val="2C3442"/>
+                <a:srgbClr val="2A331F"/>
               </a:gs>
             </a:gsLst>
             <a:lin scaled="0" ang="18900000"/>
@@ -18006,10 +18006,10 @@
           <a:gradFill rotWithShape="1">
             <a:gsLst>
               <a:gs pos="0">
-                <a:srgbClr val="4C9AFF"/>
+                <a:srgbClr val="D8E04A"/>
               </a:gs>
               <a:gs pos="100000">
-                <a:srgbClr val="7B61FF"/>
+                <a:srgbClr val="F2B705"/>
               </a:gs>
             </a:gsLst>
             <a:lin scaled="0" ang="18900000"/>
@@ -18058,10 +18058,10 @@
           <a:gradFill rotWithShape="1">
             <a:gsLst>
               <a:gs pos="0">
-                <a:srgbClr val="4C9AFF"/>
+                <a:srgbClr val="D8E04A"/>
               </a:gs>
               <a:gs pos="100000">
-                <a:srgbClr val="7B61FF"/>
+                <a:srgbClr val="F2B705"/>
               </a:gs>
             </a:gsLst>
             <a:lin scaled="0" ang="19800000"/>
@@ -18071,7 +18071,7 @@
           </a:ln>
           <a:effectLst>
             <a:glow rad="88900">
-              <a:srgbClr val="4C9AFF">
+              <a:srgbClr val="D8E04A">
                 <a:alpha val="38000"/>
               </a:srgbClr>
             </a:glow>
@@ -18129,7 +18129,7 @@
             <a:r>
               <a:rPr sz="1400" b="1">
                 <a:solidFill>
-                  <a:srgbClr val="141820"/>
+                  <a:srgbClr val="141A12"/>
                 </a:solidFill>
               </a:rPr>
               <a:t>2</a:t>
@@ -18167,7 +18167,7 @@
             <a:r>
               <a:rPr sz="1800" b="0">
                 <a:solidFill>
-                  <a:srgbClr val="F2F4F8"/>
+                  <a:srgbClr val="F4F7EE"/>
                 </a:solidFill>
               </a:rPr>
               <a:t>Ягода: вишня, облепиха</a:t>
@@ -18194,10 +18194,10 @@
           <a:gradFill rotWithShape="1">
             <a:gsLst>
               <a:gs pos="0">
-                <a:srgbClr val="1E2430"/>
+                <a:srgbClr val="1D2519"/>
               </a:gs>
               <a:gs pos="100000">
-                <a:srgbClr val="2C3442"/>
+                <a:srgbClr val="2A331F"/>
               </a:gs>
             </a:gsLst>
             <a:lin scaled="0" ang="18900000"/>
@@ -18254,10 +18254,10 @@
           <a:gradFill rotWithShape="1">
             <a:gsLst>
               <a:gs pos="0">
-                <a:srgbClr val="4C9AFF"/>
+                <a:srgbClr val="D8E04A"/>
               </a:gs>
               <a:gs pos="100000">
-                <a:srgbClr val="7B61FF"/>
+                <a:srgbClr val="F2B705"/>
               </a:gs>
             </a:gsLst>
             <a:lin scaled="0" ang="18900000"/>
@@ -18306,10 +18306,10 @@
           <a:gradFill rotWithShape="1">
             <a:gsLst>
               <a:gs pos="0">
-                <a:srgbClr val="4C9AFF"/>
+                <a:srgbClr val="D8E04A"/>
               </a:gs>
               <a:gs pos="100000">
-                <a:srgbClr val="7B61FF"/>
+                <a:srgbClr val="F2B705"/>
               </a:gs>
             </a:gsLst>
             <a:lin scaled="0" ang="19800000"/>
@@ -18319,7 +18319,7 @@
           </a:ln>
           <a:effectLst>
             <a:glow rad="88900">
-              <a:srgbClr val="4C9AFF">
+              <a:srgbClr val="D8E04A">
                 <a:alpha val="38000"/>
               </a:srgbClr>
             </a:glow>
@@ -18377,7 +18377,7 @@
             <a:r>
               <a:rPr sz="1400" b="1">
                 <a:solidFill>
-                  <a:srgbClr val="141820"/>
+                  <a:srgbClr val="141A12"/>
                 </a:solidFill>
               </a:rPr>
               <a:t>3</a:t>
@@ -18415,7 +18415,7 @@
             <a:r>
               <a:rPr sz="1800" b="0">
                 <a:solidFill>
-                  <a:srgbClr val="F2F4F8"/>
+                  <a:srgbClr val="F4F7EE"/>
                 </a:solidFill>
               </a:rPr>
               <a:t>Сезонный хит: груша</a:t>
@@ -18442,10 +18442,10 @@
           <a:gradFill rotWithShape="1">
             <a:gsLst>
               <a:gs pos="0">
-                <a:srgbClr val="1E2430"/>
+                <a:srgbClr val="1D2519"/>
               </a:gs>
               <a:gs pos="100000">
-                <a:srgbClr val="2C3442"/>
+                <a:srgbClr val="2A331F"/>
               </a:gs>
             </a:gsLst>
             <a:lin scaled="0" ang="18900000"/>
@@ -18502,10 +18502,10 @@
           <a:gradFill rotWithShape="1">
             <a:gsLst>
               <a:gs pos="0">
-                <a:srgbClr val="4C9AFF"/>
+                <a:srgbClr val="D8E04A"/>
               </a:gs>
               <a:gs pos="100000">
-                <a:srgbClr val="7B61FF"/>
+                <a:srgbClr val="F2B705"/>
               </a:gs>
             </a:gsLst>
             <a:lin scaled="0" ang="18900000"/>
@@ -18554,10 +18554,10 @@
           <a:gradFill rotWithShape="1">
             <a:gsLst>
               <a:gs pos="0">
-                <a:srgbClr val="4C9AFF"/>
+                <a:srgbClr val="D8E04A"/>
               </a:gs>
               <a:gs pos="100000">
-                <a:srgbClr val="7B61FF"/>
+                <a:srgbClr val="F2B705"/>
               </a:gs>
             </a:gsLst>
             <a:lin scaled="0" ang="19800000"/>
@@ -18567,7 +18567,7 @@
           </a:ln>
           <a:effectLst>
             <a:glow rad="88900">
-              <a:srgbClr val="4C9AFF">
+              <a:srgbClr val="D8E04A">
                 <a:alpha val="38000"/>
               </a:srgbClr>
             </a:glow>
@@ -18625,7 +18625,7 @@
             <a:r>
               <a:rPr sz="1400" b="1">
                 <a:solidFill>
-                  <a:srgbClr val="141820"/>
+                  <a:srgbClr val="141A12"/>
                 </a:solidFill>
               </a:rPr>
               <a:t>4</a:t>
@@ -18663,7 +18663,7 @@
             <a:r>
               <a:rPr sz="1800" b="0">
                 <a:solidFill>
-                  <a:srgbClr val="F2F4F8"/>
+                  <a:srgbClr val="F4F7EE"/>
                 </a:solidFill>
               </a:rPr>
               <a:t>Ротация внутри линейки без потери места на полке</a:t>
@@ -19037,7 +19037,7 @@
     <p:bg>
       <p:bgPr>
         <a:solidFill>
-          <a:srgbClr val="141820"/>
+          <a:srgbClr val="141A12"/>
         </a:solidFill>
         <a:effectLst/>
       </p:bgPr>
@@ -19051,7 +19051,7 @@
       <p:grpSpPr/>
       <p:pic>
         <p:nvPicPr>
-          <p:cNvPr id="2" name="Picture 1" descr="aurora.png"/>
+          <p:cNvPr id="2" name="Picture 1" descr="bars-D8E04A.png"/>
           <p:cNvPicPr>
             <a:picLocks noChangeAspect="1"/>
           </p:cNvPicPr>
@@ -19094,10 +19094,10 @@
           <a:gradFill rotWithShape="1">
             <a:gsLst>
               <a:gs pos="0">
-                <a:srgbClr val="4C9AFF"/>
+                <a:srgbClr val="D8E04A"/>
               </a:gs>
               <a:gs pos="100000">
-                <a:srgbClr val="7B61FF"/>
+                <a:srgbClr val="F2B705"/>
               </a:gs>
             </a:gsLst>
             <a:lin scaled="0" ang="18900000"/>
@@ -19107,7 +19107,7 @@
           </a:ln>
           <a:effectLst>
             <a:glow rad="127000">
-              <a:srgbClr val="4C9AFF">
+              <a:srgbClr val="D8E04A">
                 <a:alpha val="55000"/>
               </a:srgbClr>
             </a:glow>
@@ -19165,7 +19165,7 @@
             <a:r>
               <a:rPr sz="3200" b="1">
                 <a:solidFill>
-                  <a:srgbClr val="F2F4F8"/>
+                  <a:srgbClr val="F4F7EE"/>
                 </a:solidFill>
               </a:rPr>
               <a:t>Два формата под два разных сценария покупки</a:t>
@@ -19192,10 +19192,10 @@
           <a:gradFill rotWithShape="1">
             <a:gsLst>
               <a:gs pos="0">
-                <a:srgbClr val="1E2430"/>
+                <a:srgbClr val="1D2519"/>
               </a:gs>
               <a:gs pos="100000">
-                <a:srgbClr val="2C3442"/>
+                <a:srgbClr val="2A331F"/>
               </a:gs>
             </a:gsLst>
             <a:lin scaled="0" ang="18900000"/>
@@ -19252,10 +19252,10 @@
           <a:gradFill rotWithShape="1">
             <a:gsLst>
               <a:gs pos="0">
-                <a:srgbClr val="4C9AFF"/>
+                <a:srgbClr val="D8E04A"/>
               </a:gs>
               <a:gs pos="100000">
-                <a:srgbClr val="7B61FF"/>
+                <a:srgbClr val="F2B705"/>
               </a:gs>
             </a:gsLst>
             <a:lin scaled="0" ang="18900000"/>
@@ -19304,10 +19304,10 @@
           <a:gradFill rotWithShape="1">
             <a:gsLst>
               <a:gs pos="0">
-                <a:srgbClr val="4C9AFF"/>
+                <a:srgbClr val="D8E04A"/>
               </a:gs>
               <a:gs pos="100000">
-                <a:srgbClr val="7B61FF"/>
+                <a:srgbClr val="F2B705"/>
               </a:gs>
             </a:gsLst>
             <a:lin scaled="0" ang="19800000"/>
@@ -19317,7 +19317,7 @@
           </a:ln>
           <a:effectLst>
             <a:glow rad="88900">
-              <a:srgbClr val="4C9AFF">
+              <a:srgbClr val="D8E04A">
                 <a:alpha val="38000"/>
               </a:srgbClr>
             </a:glow>
@@ -19375,7 +19375,7 @@
             <a:r>
               <a:rPr sz="1400" b="1">
                 <a:solidFill>
-                  <a:srgbClr val="141820"/>
+                  <a:srgbClr val="141A12"/>
                 </a:solidFill>
               </a:rPr>
               <a:t>1</a:t>
@@ -19413,7 +19413,7 @@
             <a:r>
               <a:rPr sz="1800" b="0">
                 <a:solidFill>
-                  <a:srgbClr val="F2F4F8"/>
+                  <a:srgbClr val="F4F7EE"/>
                 </a:solidFill>
               </a:rPr>
               <a:t>Стекло 0.33 - импульс, HoReCa, подарок</a:t>
@@ -19440,10 +19440,10 @@
           <a:gradFill rotWithShape="1">
             <a:gsLst>
               <a:gs pos="0">
-                <a:srgbClr val="1E2430"/>
+                <a:srgbClr val="1D2519"/>
               </a:gs>
               <a:gs pos="100000">
-                <a:srgbClr val="2C3442"/>
+                <a:srgbClr val="2A331F"/>
               </a:gs>
             </a:gsLst>
             <a:lin scaled="0" ang="18900000"/>
@@ -19500,10 +19500,10 @@
           <a:gradFill rotWithShape="1">
             <a:gsLst>
               <a:gs pos="0">
-                <a:srgbClr val="4C9AFF"/>
+                <a:srgbClr val="D8E04A"/>
               </a:gs>
               <a:gs pos="100000">
-                <a:srgbClr val="7B61FF"/>
+                <a:srgbClr val="F2B705"/>
               </a:gs>
             </a:gsLst>
             <a:lin scaled="0" ang="18900000"/>
@@ -19552,10 +19552,10 @@
           <a:gradFill rotWithShape="1">
             <a:gsLst>
               <a:gs pos="0">
-                <a:srgbClr val="4C9AFF"/>
+                <a:srgbClr val="D8E04A"/>
               </a:gs>
               <a:gs pos="100000">
-                <a:srgbClr val="7B61FF"/>
+                <a:srgbClr val="F2B705"/>
               </a:gs>
             </a:gsLst>
             <a:lin scaled="0" ang="19800000"/>
@@ -19565,7 +19565,7 @@
           </a:ln>
           <a:effectLst>
             <a:glow rad="88900">
-              <a:srgbClr val="4C9AFF">
+              <a:srgbClr val="D8E04A">
                 <a:alpha val="38000"/>
               </a:srgbClr>
             </a:glow>
@@ -19623,7 +19623,7 @@
             <a:r>
               <a:rPr sz="1400" b="1">
                 <a:solidFill>
-                  <a:srgbClr val="141820"/>
+                  <a:srgbClr val="141A12"/>
                 </a:solidFill>
               </a:rPr>
               <a:t>2</a:t>
@@ -19661,7 +19661,7 @@
             <a:r>
               <a:rPr sz="1800" b="0">
                 <a:solidFill>
-                  <a:srgbClr val="F2F4F8"/>
+                  <a:srgbClr val="F4F7EE"/>
                 </a:solidFill>
               </a:rPr>
               <a:t>ПЭТ 1 л - семейная покупка, домашнее потребление</a:t>
@@ -19688,10 +19688,10 @@
           <a:gradFill rotWithShape="1">
             <a:gsLst>
               <a:gs pos="0">
-                <a:srgbClr val="1E2430"/>
+                <a:srgbClr val="1D2519"/>
               </a:gs>
               <a:gs pos="100000">
-                <a:srgbClr val="2C3442"/>
+                <a:srgbClr val="2A331F"/>
               </a:gs>
             </a:gsLst>
             <a:lin scaled="0" ang="18900000"/>
@@ -19748,10 +19748,10 @@
           <a:gradFill rotWithShape="1">
             <a:gsLst>
               <a:gs pos="0">
-                <a:srgbClr val="4C9AFF"/>
+                <a:srgbClr val="D8E04A"/>
               </a:gs>
               <a:gs pos="100000">
-                <a:srgbClr val="7B61FF"/>
+                <a:srgbClr val="F2B705"/>
               </a:gs>
             </a:gsLst>
             <a:lin scaled="0" ang="18900000"/>
@@ -19800,10 +19800,10 @@
           <a:gradFill rotWithShape="1">
             <a:gsLst>
               <a:gs pos="0">
-                <a:srgbClr val="4C9AFF"/>
+                <a:srgbClr val="D8E04A"/>
               </a:gs>
               <a:gs pos="100000">
-                <a:srgbClr val="7B61FF"/>
+                <a:srgbClr val="F2B705"/>
               </a:gs>
             </a:gsLst>
             <a:lin scaled="0" ang="19800000"/>
@@ -19813,7 +19813,7 @@
           </a:ln>
           <a:effectLst>
             <a:glow rad="88900">
-              <a:srgbClr val="4C9AFF">
+              <a:srgbClr val="D8E04A">
                 <a:alpha val="38000"/>
               </a:srgbClr>
             </a:glow>
@@ -19871,7 +19871,7 @@
             <a:r>
               <a:rPr sz="1400" b="1">
                 <a:solidFill>
-                  <a:srgbClr val="141820"/>
+                  <a:srgbClr val="141A12"/>
                 </a:solidFill>
               </a:rPr>
               <a:t>3</a:t>
@@ -19909,7 +19909,7 @@
             <a:r>
               <a:rPr sz="1800" b="0">
                 <a:solidFill>
-                  <a:srgbClr val="F2F4F8"/>
+                  <a:srgbClr val="F4F7EE"/>
                 </a:solidFill>
               </a:rPr>
               <a:t>Разные полки, разные чеки, отсутствие каннибализации</a:t>
@@ -19936,10 +19936,10 @@
           <a:gradFill rotWithShape="1">
             <a:gsLst>
               <a:gs pos="0">
-                <a:srgbClr val="1E2430"/>
+                <a:srgbClr val="1D2519"/>
               </a:gs>
               <a:gs pos="100000">
-                <a:srgbClr val="2C3442"/>
+                <a:srgbClr val="2A331F"/>
               </a:gs>
             </a:gsLst>
             <a:lin scaled="0" ang="18900000"/>
@@ -19996,10 +19996,10 @@
           <a:gradFill rotWithShape="1">
             <a:gsLst>
               <a:gs pos="0">
-                <a:srgbClr val="4C9AFF"/>
+                <a:srgbClr val="D8E04A"/>
               </a:gs>
               <a:gs pos="100000">
-                <a:srgbClr val="7B61FF"/>
+                <a:srgbClr val="F2B705"/>
               </a:gs>
             </a:gsLst>
             <a:lin scaled="0" ang="18900000"/>
@@ -20048,10 +20048,10 @@
           <a:gradFill rotWithShape="1">
             <a:gsLst>
               <a:gs pos="0">
-                <a:srgbClr val="4C9AFF"/>
+                <a:srgbClr val="D8E04A"/>
               </a:gs>
               <a:gs pos="100000">
-                <a:srgbClr val="7B61FF"/>
+                <a:srgbClr val="F2B705"/>
               </a:gs>
             </a:gsLst>
             <a:lin scaled="0" ang="19800000"/>
@@ -20061,7 +20061,7 @@
           </a:ln>
           <a:effectLst>
             <a:glow rad="88900">
-              <a:srgbClr val="4C9AFF">
+              <a:srgbClr val="D8E04A">
                 <a:alpha val="38000"/>
               </a:srgbClr>
             </a:glow>
@@ -20119,7 +20119,7 @@
             <a:r>
               <a:rPr sz="1400" b="1">
                 <a:solidFill>
-                  <a:srgbClr val="141820"/>
+                  <a:srgbClr val="141A12"/>
                 </a:solidFill>
               </a:rPr>
               <a:t>4</a:t>
@@ -20157,7 +20157,7 @@
             <a:r>
               <a:rPr sz="1800" b="0">
                 <a:solidFill>
-                  <a:srgbClr val="F2F4F8"/>
+                  <a:srgbClr val="F4F7EE"/>
                 </a:solidFill>
               </a:rPr>
               <a:t>Единый бренд-блок узнаётся с трёх метров</a:t>
@@ -20531,7 +20531,7 @@
     <p:bg>
       <p:bgPr>
         <a:solidFill>
-          <a:srgbClr val="141820"/>
+          <a:srgbClr val="141A12"/>
         </a:solidFill>
         <a:effectLst/>
       </p:bgPr>
@@ -20545,7 +20545,7 @@
       <p:grpSpPr/>
       <p:pic>
         <p:nvPicPr>
-          <p:cNvPr id="2" name="Picture 1" descr="bars.png"/>
+          <p:cNvPr id="2" name="Picture 1" descr="bars-D8E04A.png"/>
           <p:cNvPicPr>
             <a:picLocks noChangeAspect="1"/>
           </p:cNvPicPr>
@@ -20588,10 +20588,10 @@
           <a:gradFill rotWithShape="1">
             <a:gsLst>
               <a:gs pos="0">
-                <a:srgbClr val="4C9AFF"/>
+                <a:srgbClr val="D8E04A"/>
               </a:gs>
               <a:gs pos="100000">
-                <a:srgbClr val="7B61FF"/>
+                <a:srgbClr val="F2B705"/>
               </a:gs>
             </a:gsLst>
             <a:lin scaled="0" ang="18900000"/>
@@ -20601,7 +20601,7 @@
           </a:ln>
           <a:effectLst>
             <a:glow rad="127000">
-              <a:srgbClr val="4C9AFF">
+              <a:srgbClr val="D8E04A">
                 <a:alpha val="55000"/>
               </a:srgbClr>
             </a:glow>
@@ -20659,7 +20659,7 @@
             <a:r>
               <a:rPr sz="3200" b="1">
                 <a:solidFill>
-                  <a:srgbClr val="F2F4F8"/>
+                  <a:srgbClr val="F4F7EE"/>
                 </a:solidFill>
               </a:rPr>
               <a:t>Цифры, ради которых стоит выделить полку</a:t>
@@ -20686,10 +20686,10 @@
           <a:gradFill rotWithShape="1">
             <a:gsLst>
               <a:gs pos="0">
-                <a:srgbClr val="1E2430"/>
+                <a:srgbClr val="1D2519"/>
               </a:gs>
               <a:gs pos="100000">
-                <a:srgbClr val="2C3442"/>
+                <a:srgbClr val="2A331F"/>
               </a:gs>
             </a:gsLst>
             <a:lin scaled="0" ang="18900000"/>
@@ -20757,7 +20757,7 @@
             <a:r>
               <a:rPr sz="3400" b="1">
                 <a:solidFill>
-                  <a:srgbClr val="4C9AFF"/>
+                  <a:srgbClr val="D8E04A"/>
                 </a:solidFill>
               </a:rPr>
               <a:t>35% наценка для сети</a:t>
@@ -20784,10 +20784,10 @@
           <a:gradFill rotWithShape="1">
             <a:gsLst>
               <a:gs pos="0">
-                <a:srgbClr val="1E2430"/>
+                <a:srgbClr val="1D2519"/>
               </a:gs>
               <a:gs pos="100000">
-                <a:srgbClr val="2C3442"/>
+                <a:srgbClr val="2A331F"/>
               </a:gs>
             </a:gsLst>
             <a:lin scaled="0" ang="18900000"/>
@@ -20855,7 +20855,7 @@
             <a:r>
               <a:rPr sz="3400" b="1">
                 <a:solidFill>
-                  <a:srgbClr val="4C9AFF"/>
+                  <a:srgbClr val="D8E04A"/>
                 </a:solidFill>
               </a:rPr>
               <a:t>12 дней оборачиваемость в тестовых магазинах</a:t>
@@ -20882,10 +20882,10 @@
           <a:gradFill rotWithShape="1">
             <a:gsLst>
               <a:gs pos="0">
-                <a:srgbClr val="1E2430"/>
+                <a:srgbClr val="1D2519"/>
               </a:gs>
               <a:gs pos="100000">
-                <a:srgbClr val="2C3442"/>
+                <a:srgbClr val="2A331F"/>
               </a:gs>
             </a:gsLst>
             <a:lin scaled="0" ang="18900000"/>
@@ -20953,7 +20953,7 @@
             <a:r>
               <a:rPr sz="3400" b="1">
                 <a:solidFill>
-                  <a:srgbClr val="4C9AFF"/>
+                  <a:srgbClr val="D8E04A"/>
                 </a:solidFill>
               </a:rPr>
               <a:t>9 месяцев срок годности</a:t>
@@ -20980,10 +20980,10 @@
           <a:gradFill rotWithShape="1">
             <a:gsLst>
               <a:gs pos="0">
-                <a:srgbClr val="1E2430"/>
+                <a:srgbClr val="1D2519"/>
               </a:gs>
               <a:gs pos="100000">
-                <a:srgbClr val="2C3442"/>
+                <a:srgbClr val="2A331F"/>
               </a:gs>
             </a:gsLst>
             <a:lin scaled="0" ang="18900000"/>
@@ -21051,7 +21051,7 @@
             <a:r>
               <a:rPr sz="3400" b="1">
                 <a:solidFill>
-                  <a:srgbClr val="4C9AFF"/>
+                  <a:srgbClr val="D8E04A"/>
                 </a:solidFill>
               </a:rPr>
               <a:t>6 SKU в линейке</a:t>
@@ -21425,7 +21425,7 @@
     <p:bg>
       <p:bgPr>
         <a:solidFill>
-          <a:srgbClr val="141820"/>
+          <a:srgbClr val="141A12"/>
         </a:solidFill>
         <a:effectLst/>
       </p:bgPr>
@@ -21439,7 +21439,7 @@
       <p:grpSpPr/>
       <p:pic>
         <p:nvPicPr>
-          <p:cNvPr id="2" name="Picture 1" descr="aurora.png"/>
+          <p:cNvPr id="2" name="Picture 1" descr="bars-D8E04A.png"/>
           <p:cNvPicPr>
             <a:picLocks noChangeAspect="1"/>
           </p:cNvPicPr>
@@ -21482,10 +21482,10 @@
           <a:gradFill rotWithShape="1">
             <a:gsLst>
               <a:gs pos="0">
-                <a:srgbClr val="4C9AFF"/>
+                <a:srgbClr val="D8E04A"/>
               </a:gs>
               <a:gs pos="100000">
-                <a:srgbClr val="7B61FF"/>
+                <a:srgbClr val="F2B705"/>
               </a:gs>
             </a:gsLst>
             <a:lin scaled="0" ang="18900000"/>
@@ -21495,7 +21495,7 @@
           </a:ln>
           <a:effectLst>
             <a:glow rad="127000">
-              <a:srgbClr val="4C9AFF">
+              <a:srgbClr val="D8E04A">
                 <a:alpha val="55000"/>
               </a:srgbClr>
             </a:glow>
@@ -21553,7 +21553,7 @@
             <a:r>
               <a:rPr sz="3200" b="1">
                 <a:solidFill>
-                  <a:srgbClr val="F2F4F8"/>
+                  <a:srgbClr val="F4F7EE"/>
                 </a:solidFill>
               </a:rPr>
               <a:t>9 месяцев срока годности снимают риск списаний</a:t>
@@ -21580,10 +21580,10 @@
           <a:gradFill rotWithShape="1">
             <a:gsLst>
               <a:gs pos="0">
-                <a:srgbClr val="1E2430"/>
+                <a:srgbClr val="1D2519"/>
               </a:gs>
               <a:gs pos="100000">
-                <a:srgbClr val="2C3442"/>
+                <a:srgbClr val="2A331F"/>
               </a:gs>
             </a:gsLst>
             <a:lin scaled="0" ang="18900000"/>
@@ -21640,10 +21640,10 @@
           <a:gradFill rotWithShape="1">
             <a:gsLst>
               <a:gs pos="0">
-                <a:srgbClr val="4C9AFF"/>
+                <a:srgbClr val="D8E04A"/>
               </a:gs>
               <a:gs pos="100000">
-                <a:srgbClr val="7B61FF"/>
+                <a:srgbClr val="F2B705"/>
               </a:gs>
             </a:gsLst>
             <a:lin scaled="0" ang="18900000"/>
@@ -21692,10 +21692,10 @@
           <a:gradFill rotWithShape="1">
             <a:gsLst>
               <a:gs pos="0">
-                <a:srgbClr val="4C9AFF"/>
+                <a:srgbClr val="D8E04A"/>
               </a:gs>
               <a:gs pos="100000">
-                <a:srgbClr val="7B61FF"/>
+                <a:srgbClr val="F2B705"/>
               </a:gs>
             </a:gsLst>
             <a:lin scaled="0" ang="19800000"/>
@@ -21705,7 +21705,7 @@
           </a:ln>
           <a:effectLst>
             <a:glow rad="88900">
-              <a:srgbClr val="4C9AFF">
+              <a:srgbClr val="D8E04A">
                 <a:alpha val="38000"/>
               </a:srgbClr>
             </a:glow>
@@ -21763,7 +21763,7 @@
             <a:r>
               <a:rPr sz="1400" b="1">
                 <a:solidFill>
-                  <a:srgbClr val="141820"/>
+                  <a:srgbClr val="141A12"/>
                 </a:solidFill>
               </a:rPr>
               <a:t>1</a:t>
@@ -21801,7 +21801,7 @@
             <a:r>
               <a:rPr sz="1800" b="0">
                 <a:solidFill>
-                  <a:srgbClr val="F2F4F8"/>
+                  <a:srgbClr val="F4F7EE"/>
                 </a:solidFill>
               </a:rPr>
               <a:t>Натуральный состав без потери стойкости продукта</a:t>
@@ -21828,10 +21828,10 @@
           <a:gradFill rotWithShape="1">
             <a:gsLst>
               <a:gs pos="0">
-                <a:srgbClr val="1E2430"/>
+                <a:srgbClr val="1D2519"/>
               </a:gs>
               <a:gs pos="100000">
-                <a:srgbClr val="2C3442"/>
+                <a:srgbClr val="2A331F"/>
               </a:gs>
             </a:gsLst>
             <a:lin scaled="0" ang="18900000"/>
@@ -21888,10 +21888,10 @@
           <a:gradFill rotWithShape="1">
             <a:gsLst>
               <a:gs pos="0">
-                <a:srgbClr val="4C9AFF"/>
+                <a:srgbClr val="D8E04A"/>
               </a:gs>
               <a:gs pos="100000">
-                <a:srgbClr val="7B61FF"/>
+                <a:srgbClr val="F2B705"/>
               </a:gs>
             </a:gsLst>
             <a:lin scaled="0" ang="18900000"/>
@@ -21940,10 +21940,10 @@
           <a:gradFill rotWithShape="1">
             <a:gsLst>
               <a:gs pos="0">
-                <a:srgbClr val="4C9AFF"/>
+                <a:srgbClr val="D8E04A"/>
               </a:gs>
               <a:gs pos="100000">
-                <a:srgbClr val="7B61FF"/>
+                <a:srgbClr val="F2B705"/>
               </a:gs>
             </a:gsLst>
             <a:lin scaled="0" ang="19800000"/>
@@ -21953,7 +21953,7 @@
           </a:ln>
           <a:effectLst>
             <a:glow rad="88900">
-              <a:srgbClr val="4C9AFF">
+              <a:srgbClr val="D8E04A">
                 <a:alpha val="38000"/>
               </a:srgbClr>
             </a:glow>
@@ -22011,7 +22011,7 @@
             <a:r>
               <a:rPr sz="1400" b="1">
                 <a:solidFill>
-                  <a:srgbClr val="141820"/>
+                  <a:srgbClr val="141A12"/>
                 </a:solidFill>
               </a:rPr>
               <a:t>2</a:t>
@@ -22049,7 +22049,7 @@
             <a:r>
               <a:rPr sz="1800" b="0">
                 <a:solidFill>
-                  <a:srgbClr val="F2F4F8"/>
+                  <a:srgbClr val="F4F7EE"/>
                 </a:solidFill>
               </a:rPr>
               <a:t>Запас по сроку на логистику и ротацию</a:t>
@@ -22076,10 +22076,10 @@
           <a:gradFill rotWithShape="1">
             <a:gsLst>
               <a:gs pos="0">
-                <a:srgbClr val="1E2430"/>
+                <a:srgbClr val="1D2519"/>
               </a:gs>
               <a:gs pos="100000">
-                <a:srgbClr val="2C3442"/>
+                <a:srgbClr val="2A331F"/>
               </a:gs>
             </a:gsLst>
             <a:lin scaled="0" ang="18900000"/>
@@ -22136,10 +22136,10 @@
           <a:gradFill rotWithShape="1">
             <a:gsLst>
               <a:gs pos="0">
-                <a:srgbClr val="4C9AFF"/>
+                <a:srgbClr val="D8E04A"/>
               </a:gs>
               <a:gs pos="100000">
-                <a:srgbClr val="7B61FF"/>
+                <a:srgbClr val="F2B705"/>
               </a:gs>
             </a:gsLst>
             <a:lin scaled="0" ang="18900000"/>
@@ -22188,10 +22188,10 @@
           <a:gradFill rotWithShape="1">
             <a:gsLst>
               <a:gs pos="0">
-                <a:srgbClr val="4C9AFF"/>
+                <a:srgbClr val="D8E04A"/>
               </a:gs>
               <a:gs pos="100000">
-                <a:srgbClr val="7B61FF"/>
+                <a:srgbClr val="F2B705"/>
               </a:gs>
             </a:gsLst>
             <a:lin scaled="0" ang="19800000"/>
@@ -22201,7 +22201,7 @@
           </a:ln>
           <a:effectLst>
             <a:glow rad="88900">
-              <a:srgbClr val="4C9AFF">
+              <a:srgbClr val="D8E04A">
                 <a:alpha val="38000"/>
               </a:srgbClr>
             </a:glow>
@@ -22259,7 +22259,7 @@
             <a:r>
               <a:rPr sz="1400" b="1">
                 <a:solidFill>
-                  <a:srgbClr val="141820"/>
+                  <a:srgbClr val="141A12"/>
                 </a:solidFill>
               </a:rPr>
               <a:t>3</a:t>
@@ -22297,7 +22297,7 @@
             <a:r>
               <a:rPr sz="1800" b="0">
                 <a:solidFill>
-                  <a:srgbClr val="F2F4F8"/>
+                  <a:srgbClr val="F4F7EE"/>
                 </a:solidFill>
               </a:rPr>
               <a:t>Минимальный процент возвратов на тестах</a:t>
@@ -22324,10 +22324,10 @@
           <a:gradFill rotWithShape="1">
             <a:gsLst>
               <a:gs pos="0">
-                <a:srgbClr val="1E2430"/>
+                <a:srgbClr val="1D2519"/>
               </a:gs>
               <a:gs pos="100000">
-                <a:srgbClr val="2C3442"/>
+                <a:srgbClr val="2A331F"/>
               </a:gs>
             </a:gsLst>
             <a:lin scaled="0" ang="18900000"/>
@@ -22384,10 +22384,10 @@
           <a:gradFill rotWithShape="1">
             <a:gsLst>
               <a:gs pos="0">
-                <a:srgbClr val="4C9AFF"/>
+                <a:srgbClr val="D8E04A"/>
               </a:gs>
               <a:gs pos="100000">
-                <a:srgbClr val="7B61FF"/>
+                <a:srgbClr val="F2B705"/>
               </a:gs>
             </a:gsLst>
             <a:lin scaled="0" ang="18900000"/>
@@ -22436,10 +22436,10 @@
           <a:gradFill rotWithShape="1">
             <a:gsLst>
               <a:gs pos="0">
-                <a:srgbClr val="4C9AFF"/>
+                <a:srgbClr val="D8E04A"/>
               </a:gs>
               <a:gs pos="100000">
-                <a:srgbClr val="7B61FF"/>
+                <a:srgbClr val="F2B705"/>
               </a:gs>
             </a:gsLst>
             <a:lin scaled="0" ang="19800000"/>
@@ -22449,7 +22449,7 @@
           </a:ln>
           <a:effectLst>
             <a:glow rad="88900">
-              <a:srgbClr val="4C9AFF">
+              <a:srgbClr val="D8E04A">
                 <a:alpha val="38000"/>
               </a:srgbClr>
             </a:glow>
@@ -22507,7 +22507,7 @@
             <a:r>
               <a:rPr sz="1400" b="1">
                 <a:solidFill>
-                  <a:srgbClr val="141820"/>
+                  <a:srgbClr val="141A12"/>
                 </a:solidFill>
               </a:rPr>
               <a:t>4</a:t>
@@ -22545,7 +22545,7 @@
             <a:r>
               <a:rPr sz="1800" b="0">
                 <a:solidFill>
-                  <a:srgbClr val="F2F4F8"/>
+                  <a:srgbClr val="F4F7EE"/>
                 </a:solidFill>
               </a:rPr>
               <a:t>Отгрузка партиями со свежей датой производства</a:t>
@@ -22919,7 +22919,7 @@
     <p:bg>
       <p:bgPr>
         <a:solidFill>
-          <a:srgbClr val="141820"/>
+          <a:srgbClr val="141A12"/>
         </a:solidFill>
         <a:effectLst/>
       </p:bgPr>
@@ -22933,7 +22933,7 @@
       <p:grpSpPr/>
       <p:pic>
         <p:nvPicPr>
-          <p:cNvPr id="2" name="Picture 1" descr="bars.png"/>
+          <p:cNvPr id="2" name="Picture 1" descr="bars-D8E04A.png"/>
           <p:cNvPicPr>
             <a:picLocks noChangeAspect="1"/>
           </p:cNvPicPr>
@@ -22976,10 +22976,10 @@
           <a:gradFill rotWithShape="1">
             <a:gsLst>
               <a:gs pos="0">
-                <a:srgbClr val="4C9AFF"/>
+                <a:srgbClr val="D8E04A"/>
               </a:gs>
               <a:gs pos="100000">
-                <a:srgbClr val="7B61FF"/>
+                <a:srgbClr val="F2B705"/>
               </a:gs>
             </a:gsLst>
             <a:lin scaled="0" ang="18900000"/>
@@ -22989,7 +22989,7 @@
           </a:ln>
           <a:effectLst>
             <a:glow rad="127000">
-              <a:srgbClr val="4C9AFF">
+              <a:srgbClr val="D8E04A">
                 <a:alpha val="55000"/>
               </a:srgbClr>
             </a:glow>
@@ -23047,7 +23047,7 @@
             <a:r>
               <a:rPr sz="3200" b="1">
                 <a:solidFill>
-                  <a:srgbClr val="F2F4F8"/>
+                  <a:srgbClr val="F4F7EE"/>
                 </a:solidFill>
               </a:rPr>
               <a:t>Результаты теста в 18 магазинах</a:t>
@@ -23074,10 +23074,10 @@
           <a:gradFill rotWithShape="1">
             <a:gsLst>
               <a:gs pos="0">
-                <a:srgbClr val="1E2430"/>
+                <a:srgbClr val="1D2519"/>
               </a:gs>
               <a:gs pos="100000">
-                <a:srgbClr val="2C3442"/>
+                <a:srgbClr val="2A331F"/>
               </a:gs>
             </a:gsLst>
             <a:lin scaled="0" ang="18900000"/>
@@ -23145,7 +23145,7 @@
             <a:r>
               <a:rPr sz="3400" b="1">
                 <a:solidFill>
-                  <a:srgbClr val="4C9AFF"/>
+                  <a:srgbClr val="D8E04A"/>
                 </a:solidFill>
               </a:rPr>
               <a:t>12 дней средняя оборачиваемость SKU</a:t>
@@ -23172,10 +23172,10 @@
           <a:gradFill rotWithShape="1">
             <a:gsLst>
               <a:gs pos="0">
-                <a:srgbClr val="1E2430"/>
+                <a:srgbClr val="1D2519"/>
               </a:gs>
               <a:gs pos="100000">
-                <a:srgbClr val="2C3442"/>
+                <a:srgbClr val="2A331F"/>
               </a:gs>
             </a:gsLst>
             <a:lin scaled="0" ang="18900000"/>
@@ -23243,7 +23243,7 @@
             <a:r>
               <a:rPr sz="3400" b="1">
                 <a:solidFill>
-                  <a:srgbClr val="4C9AFF"/>
+                  <a:srgbClr val="D8E04A"/>
                 </a:solidFill>
               </a:rPr>
               <a:t>+22% к обороту категории лимонадов на полке</a:t>
@@ -23270,10 +23270,10 @@
           <a:gradFill rotWithShape="1">
             <a:gsLst>
               <a:gs pos="0">
-                <a:srgbClr val="1E2430"/>
+                <a:srgbClr val="1D2519"/>
               </a:gs>
               <a:gs pos="100000">
-                <a:srgbClr val="2C3442"/>
+                <a:srgbClr val="2A331F"/>
               </a:gs>
             </a:gsLst>
             <a:lin scaled="0" ang="18900000"/>
@@ -23341,7 +23341,7 @@
             <a:r>
               <a:rPr sz="3400" b="1">
                 <a:solidFill>
-                  <a:srgbClr val="4C9AFF"/>
+                  <a:srgbClr val="D8E04A"/>
                 </a:solidFill>
               </a:rPr>
               <a:t>4 из 6 вкусов вошли в топ-10 категории</a:t>
@@ -23368,10 +23368,10 @@
           <a:gradFill rotWithShape="1">
             <a:gsLst>
               <a:gs pos="0">
-                <a:srgbClr val="1E2430"/>
+                <a:srgbClr val="1D2519"/>
               </a:gs>
               <a:gs pos="100000">
-                <a:srgbClr val="2C3442"/>
+                <a:srgbClr val="2A331F"/>
               </a:gs>
             </a:gsLst>
             <a:lin scaled="0" ang="18900000"/>
@@ -23439,7 +23439,7 @@
             <a:r>
               <a:rPr sz="3400" b="1">
                 <a:solidFill>
-                  <a:srgbClr val="4C9AFF"/>
+                  <a:srgbClr val="D8E04A"/>
                 </a:solidFill>
               </a:rPr>
               <a:t>Менее 1% списаний за квартал</a:t>
@@ -23813,7 +23813,7 @@
     <p:bg>
       <p:bgPr>
         <a:solidFill>
-          <a:srgbClr val="141820"/>
+          <a:srgbClr val="141A12"/>
         </a:solidFill>
         <a:effectLst/>
       </p:bgPr>
@@ -23827,7 +23827,7 @@
       <p:grpSpPr/>
       <p:pic>
         <p:nvPicPr>
-          <p:cNvPr id="2" name="Picture 1" descr="waves.png"/>
+          <p:cNvPr id="2" name="Picture 1" descr="mesh-D8E04A.png"/>
           <p:cNvPicPr>
             <a:picLocks noChangeAspect="1"/>
           </p:cNvPicPr>
@@ -23870,10 +23870,10 @@
           <a:gradFill rotWithShape="1">
             <a:gsLst>
               <a:gs pos="0">
-                <a:srgbClr val="4C9AFF"/>
+                <a:srgbClr val="D8E04A"/>
               </a:gs>
               <a:gs pos="100000">
-                <a:srgbClr val="7B61FF"/>
+                <a:srgbClr val="F2B705"/>
               </a:gs>
             </a:gsLst>
             <a:lin scaled="0" ang="18900000"/>
@@ -23883,7 +23883,7 @@
           </a:ln>
           <a:effectLst>
             <a:glow rad="127000">
-              <a:srgbClr val="4C9AFF">
+              <a:srgbClr val="D8E04A">
                 <a:alpha val="55000"/>
               </a:srgbClr>
             </a:glow>
@@ -23941,7 +23941,7 @@
             <a:r>
               <a:rPr sz="3200" b="1">
                 <a:solidFill>
-                  <a:srgbClr val="F2F4F8"/>
+                  <a:srgbClr val="F4F7EE"/>
                 </a:solidFill>
               </a:rPr>
               <a:t>Кто покупает наш лимонад</a:t>
@@ -23968,10 +23968,10 @@
           <a:gradFill rotWithShape="1">
             <a:gsLst>
               <a:gs pos="0">
-                <a:srgbClr val="1E2430"/>
+                <a:srgbClr val="1D2519"/>
               </a:gs>
               <a:gs pos="100000">
-                <a:srgbClr val="2C3442"/>
+                <a:srgbClr val="2A331F"/>
               </a:gs>
             </a:gsLst>
             <a:lin scaled="0" ang="18900000"/>
@@ -24028,10 +24028,10 @@
           <a:gradFill rotWithShape="1">
             <a:gsLst>
               <a:gs pos="0">
-                <a:srgbClr val="4C9AFF"/>
+                <a:srgbClr val="D8E04A"/>
               </a:gs>
               <a:gs pos="100000">
-                <a:srgbClr val="7B61FF"/>
+                <a:srgbClr val="F2B705"/>
               </a:gs>
             </a:gsLst>
             <a:lin scaled="0" ang="18900000"/>
@@ -24080,10 +24080,10 @@
           <a:gradFill rotWithShape="1">
             <a:gsLst>
               <a:gs pos="0">
-                <a:srgbClr val="4C9AFF"/>
+                <a:srgbClr val="D8E04A"/>
               </a:gs>
               <a:gs pos="100000">
-                <a:srgbClr val="7B61FF"/>
+                <a:srgbClr val="F2B705"/>
               </a:gs>
             </a:gsLst>
             <a:lin scaled="0" ang="19800000"/>
@@ -24093,7 +24093,7 @@
           </a:ln>
           <a:effectLst>
             <a:glow rad="88900">
-              <a:srgbClr val="4C9AFF">
+              <a:srgbClr val="D8E04A">
                 <a:alpha val="38000"/>
               </a:srgbClr>
             </a:glow>
@@ -24151,7 +24151,7 @@
             <a:r>
               <a:rPr sz="1400" b="1">
                 <a:solidFill>
-                  <a:srgbClr val="141820"/>
+                  <a:srgbClr val="141A12"/>
                 </a:solidFill>
               </a:rPr>
               <a:t>1</a:t>
@@ -24189,7 +24189,7 @@
             <a:r>
               <a:rPr sz="1800" b="0">
                 <a:solidFill>
-                  <a:srgbClr val="F2F4F8"/>
+                  <a:srgbClr val="F4F7EE"/>
                 </a:solidFill>
               </a:rPr>
               <a:t>Семьи с детьми, читающие состав на этикетке</a:t>
@@ -24216,10 +24216,10 @@
           <a:gradFill rotWithShape="1">
             <a:gsLst>
               <a:gs pos="0">
-                <a:srgbClr val="1E2430"/>
+                <a:srgbClr val="1D2519"/>
               </a:gs>
               <a:gs pos="100000">
-                <a:srgbClr val="2C3442"/>
+                <a:srgbClr val="2A331F"/>
               </a:gs>
             </a:gsLst>
             <a:lin scaled="0" ang="18900000"/>
@@ -24276,10 +24276,10 @@
           <a:gradFill rotWithShape="1">
             <a:gsLst>
               <a:gs pos="0">
-                <a:srgbClr val="4C9AFF"/>
+                <a:srgbClr val="D8E04A"/>
               </a:gs>
               <a:gs pos="100000">
-                <a:srgbClr val="7B61FF"/>
+                <a:srgbClr val="F2B705"/>
               </a:gs>
             </a:gsLst>
             <a:lin scaled="0" ang="18900000"/>
@@ -24328,10 +24328,10 @@
           <a:gradFill rotWithShape="1">
             <a:gsLst>
               <a:gs pos="0">
-                <a:srgbClr val="4C9AFF"/>
+                <a:srgbClr val="D8E04A"/>
               </a:gs>
               <a:gs pos="100000">
-                <a:srgbClr val="7B61FF"/>
+                <a:srgbClr val="F2B705"/>
               </a:gs>
             </a:gsLst>
             <a:lin scaled="0" ang="19800000"/>
@@ -24341,7 +24341,7 @@
           </a:ln>
           <a:effectLst>
             <a:glow rad="88900">
-              <a:srgbClr val="4C9AFF">
+              <a:srgbClr val="D8E04A">
                 <a:alpha val="38000"/>
               </a:srgbClr>
             </a:glow>
@@ -24399,7 +24399,7 @@
             <a:r>
               <a:rPr sz="1400" b="1">
                 <a:solidFill>
-                  <a:srgbClr val="141820"/>
+                  <a:srgbClr val="141A12"/>
                 </a:solidFill>
               </a:rPr>
               <a:t>2</a:t>
@@ -24437,7 +24437,7 @@
             <a:r>
               <a:rPr sz="1800" b="0">
                 <a:solidFill>
-                  <a:srgbClr val="F2F4F8"/>
+                  <a:srgbClr val="F4F7EE"/>
                 </a:solidFill>
               </a:rPr>
               <a:t>Аудитория 25-45 лет, средний и выше доход</a:t>
@@ -24464,10 +24464,10 @@
           <a:gradFill rotWithShape="1">
             <a:gsLst>
               <a:gs pos="0">
-                <a:srgbClr val="1E2430"/>
+                <a:srgbClr val="1D2519"/>
               </a:gs>
               <a:gs pos="100000">
-                <a:srgbClr val="2C3442"/>
+                <a:srgbClr val="2A331F"/>
               </a:gs>
             </a:gsLst>
             <a:lin scaled="0" ang="18900000"/>
@@ -24524,10 +24524,10 @@
           <a:gradFill rotWithShape="1">
             <a:gsLst>
               <a:gs pos="0">
-                <a:srgbClr val="4C9AFF"/>
+                <a:srgbClr val="D8E04A"/>
               </a:gs>
               <a:gs pos="100000">
-                <a:srgbClr val="7B61FF"/>
+                <a:srgbClr val="F2B705"/>
               </a:gs>
             </a:gsLst>
             <a:lin scaled="0" ang="18900000"/>
@@ -24576,10 +24576,10 @@
           <a:gradFill rotWithShape="1">
             <a:gsLst>
               <a:gs pos="0">
-                <a:srgbClr val="4C9AFF"/>
+                <a:srgbClr val="D8E04A"/>
               </a:gs>
               <a:gs pos="100000">
-                <a:srgbClr val="7B61FF"/>
+                <a:srgbClr val="F2B705"/>
               </a:gs>
             </a:gsLst>
             <a:lin scaled="0" ang="19800000"/>
@@ -24589,7 +24589,7 @@
           </a:ln>
           <a:effectLst>
             <a:glow rad="88900">
-              <a:srgbClr val="4C9AFF">
+              <a:srgbClr val="D8E04A">
                 <a:alpha val="38000"/>
               </a:srgbClr>
             </a:glow>
@@ -24647,7 +24647,7 @@
             <a:r>
               <a:rPr sz="1400" b="1">
                 <a:solidFill>
-                  <a:srgbClr val="141820"/>
+                  <a:srgbClr val="141A12"/>
                 </a:solidFill>
               </a:rPr>
               <a:t>3</a:t>
@@ -24685,7 +24685,7 @@
             <a:r>
               <a:rPr sz="1800" b="0">
                 <a:solidFill>
-                  <a:srgbClr val="F2F4F8"/>
+                  <a:srgbClr val="F4F7EE"/>
                 </a:solidFill>
               </a:rPr>
               <a:t>Покупатели, ушедшие из категории газировки</a:t>
@@ -24712,10 +24712,10 @@
           <a:gradFill rotWithShape="1">
             <a:gsLst>
               <a:gs pos="0">
-                <a:srgbClr val="1E2430"/>
+                <a:srgbClr val="1D2519"/>
               </a:gs>
               <a:gs pos="100000">
-                <a:srgbClr val="2C3442"/>
+                <a:srgbClr val="2A331F"/>
               </a:gs>
             </a:gsLst>
             <a:lin scaled="0" ang="18900000"/>
@@ -24772,10 +24772,10 @@
           <a:gradFill rotWithShape="1">
             <a:gsLst>
               <a:gs pos="0">
-                <a:srgbClr val="4C9AFF"/>
+                <a:srgbClr val="D8E04A"/>
               </a:gs>
               <a:gs pos="100000">
-                <a:srgbClr val="7B61FF"/>
+                <a:srgbClr val="F2B705"/>
               </a:gs>
             </a:gsLst>
             <a:lin scaled="0" ang="18900000"/>
@@ -24824,10 +24824,10 @@
           <a:gradFill rotWithShape="1">
             <a:gsLst>
               <a:gs pos="0">
-                <a:srgbClr val="4C9AFF"/>
+                <a:srgbClr val="D8E04A"/>
               </a:gs>
               <a:gs pos="100000">
-                <a:srgbClr val="7B61FF"/>
+                <a:srgbClr val="F2B705"/>
               </a:gs>
             </a:gsLst>
             <a:lin scaled="0" ang="19800000"/>
@@ -24837,7 +24837,7 @@
           </a:ln>
           <a:effectLst>
             <a:glow rad="88900">
-              <a:srgbClr val="4C9AFF">
+              <a:srgbClr val="D8E04A">
                 <a:alpha val="38000"/>
               </a:srgbClr>
             </a:glow>
@@ -24895,7 +24895,7 @@
             <a:r>
               <a:rPr sz="1400" b="1">
                 <a:solidFill>
-                  <a:srgbClr val="141820"/>
+                  <a:srgbClr val="141A12"/>
                 </a:solidFill>
               </a:rPr>
               <a:t>4</a:t>
@@ -24933,7 +24933,7 @@
             <a:r>
               <a:rPr sz="1800" b="0">
                 <a:solidFill>
-                  <a:srgbClr val="F2F4F8"/>
+                  <a:srgbClr val="F4F7EE"/>
                 </a:solidFill>
               </a:rPr>
               <a:t>Гости кафе и точек фастфуда</a:t>
